--- a/工作/面试准备/试讲_PPT.pptx
+++ b/工作/面试准备/试讲_PPT.pptx
@@ -2010,7 +2010,7 @@
                 <a:ea typeface="Calibri" pitchFamily="34" charset="-122"/>
                 <a:cs typeface="Calibri" pitchFamily="34" charset="-120"/>
               </a:rPr>
-              <a:t>RAG + 本体约束推理实践</a:t>
+              <a:t>从检索到约束：让AI学会"守规矩"</a:t>
             </a:r>
             <a:endParaRPr lang="en-US" sz="2200" dirty="0"/>
           </a:p>
@@ -2049,7 +2049,7 @@
                 <a:ea typeface="Calibri" pitchFamily="34" charset="-122"/>
                 <a:cs typeface="Calibri" pitchFamily="34" charset="-120"/>
               </a:rPr>
-              <a:t>从标准检索增强到领域知识驱动的可信推理</a:t>
+              <a:t>基于RAG + 本体的可信推理实践</a:t>
             </a:r>
             <a:endParaRPr lang="en-US" sz="1400" dirty="0"/>
           </a:p>
@@ -2093,28 +2093,6 @@
             <a:endParaRPr lang="en-US" sz="1200" dirty="0"/>
           </a:p>
         </p:txBody>
-      </p:sp>
-      <p:sp>
-        <p:nvSpPr>
-          <p:cNvPr id="10" name="Shape 8"/>
-          <p:cNvSpPr/>
-          <p:nvPr/>
-        </p:nvSpPr>
-        <p:spPr>
-          <a:xfrm>
-            <a:off x="8321040" y="1371600"/>
-            <a:ext cx="36576" cy="2743200"/>
-          </a:xfrm>
-          <a:prstGeom prst="rect">
-            <a:avLst/>
-          </a:prstGeom>
-          <a:solidFill>
-            <a:srgbClr val="2563EB">
-              <a:alpha val="70000"/>
-            </a:srgbClr>
-          </a:solidFill>
-          <a:ln/>
-        </p:spPr>
       </p:sp>
     </p:spTree>
   </p:cSld>
@@ -2201,7 +2179,7 @@
                 <a:ea typeface="Arial" pitchFamily="34" charset="-122"/>
                 <a:cs typeface="Arial" pitchFamily="34" charset="-120"/>
               </a:rPr>
-              <a:t>核心总结</a:t>
+              <a:t>记住这三句话就够了</a:t>
             </a:r>
             <a:endParaRPr lang="en-US" sz="2800" dirty="0"/>
           </a:p>
@@ -2299,7 +2277,7 @@
                 <a:ea typeface="Calibri" pitchFamily="34" charset="-122"/>
                 <a:cs typeface="Calibri" pitchFamily="34" charset="-120"/>
               </a:rPr>
-              <a:t>LLMs are not inherently unreliable — they need domain knowledge to constrain their reasoning</a:t>
+              <a:t>大模型本身并不可靠——给它正确的知识边界，它才可靠</a:t>
             </a:r>
             <a:endParaRPr lang="en-US" sz="1600" dirty="0"/>
           </a:p>
@@ -2314,7 +2292,7 @@
         <p:spPr>
           <a:xfrm>
             <a:off x="457200" y="2286000"/>
-            <a:ext cx="2560320" cy="2286000"/>
+            <a:ext cx="2560320" cy="2011680"/>
           </a:xfrm>
           <a:prstGeom prst="rect">
             <a:avLst/>
@@ -2436,7 +2414,7 @@
               <a:buNone/>
             </a:pPr>
             <a:r>
-              <a:rPr lang="en-US" sz="1300" b="1" dirty="0">
+              <a:rPr lang="en-US" sz="1400" b="1" dirty="0">
                 <a:solidFill>
                   <a:srgbClr val="EF4444"/>
                 </a:solidFill>
@@ -2444,9 +2422,9 @@
                 <a:ea typeface="Arial" pitchFamily="34" charset="-122"/>
                 <a:cs typeface="Arial" pitchFamily="34" charset="-120"/>
               </a:rPr>
-              <a:t>Hallucination is inherent</a:t>
-            </a:r>
-            <a:endParaRPr lang="en-US" sz="1300" dirty="0"/>
+              <a:t>幻觉是基因里带的</a:t>
+            </a:r>
+            <a:endParaRPr lang="en-US" sz="1400" dirty="0"/>
           </a:p>
         </p:txBody>
       </p:sp>
@@ -2458,8 +2436,8 @@
         </p:nvSpPr>
         <p:spPr>
           <a:xfrm>
-            <a:off x="640080" y="3611880"/>
-            <a:ext cx="2194560" cy="822960"/>
+            <a:off x="640080" y="3566160"/>
+            <a:ext cx="2194560" cy="457200"/>
           </a:xfrm>
           <a:prstGeom prst="rect">
             <a:avLst/>
@@ -2483,39 +2461,61 @@
                 <a:ea typeface="Calibri" pitchFamily="34" charset="-122"/>
                 <a:cs typeface="Calibri" pitchFamily="34" charset="-120"/>
               </a:rPr>
-              <a:t>LLMs are next-token predictors</a:t>
+              <a:t>LLM是猜词游戏，不是查数据库</a:t>
             </a:r>
             <a:endParaRPr lang="en-US" sz="1100" dirty="0"/>
           </a:p>
+        </p:txBody>
+      </p:sp>
+      <p:sp>
+        <p:nvSpPr>
+          <p:cNvPr id="13" name="Text 11"/>
+          <p:cNvSpPr/>
+          <p:nvPr/>
+        </p:nvSpPr>
+        <p:spPr>
+          <a:xfrm>
+            <a:off x="640080" y="3977640"/>
+            <a:ext cx="2194560" cy="228600"/>
+          </a:xfrm>
+          <a:prstGeom prst="rect">
+            <a:avLst/>
+          </a:prstGeom>
+          <a:noFill/>
+          <a:ln/>
+        </p:spPr>
+        <p:txBody>
+          <a:bodyPr wrap="square" lIns="0" tIns="0" rIns="0" bIns="0" rtlCol="0" anchor="ctr"/>
+          <a:lstStyle/>
           <a:p>
             <a:pPr algn="ctr" indent="0" marL="0">
               <a:buNone/>
             </a:pPr>
             <a:r>
-              <a:rPr lang="en-US" sz="1100" dirty="0">
-                <a:solidFill>
-                  <a:srgbClr val="1E293B"/>
+              <a:rPr lang="en-US" sz="800" i="1" dirty="0">
+                <a:solidFill>
+                  <a:srgbClr val="475569"/>
                 </a:solidFill>
                 <a:latin typeface="Calibri" pitchFamily="34" charset="0"/>
                 <a:ea typeface="Calibri" pitchFamily="34" charset="-122"/>
                 <a:cs typeface="Calibri" pitchFamily="34" charset="-120"/>
               </a:rPr>
-              <a:t>(Brown et al., 2020), not fact databases</a:t>
-            </a:r>
-            <a:endParaRPr lang="en-US" sz="1100" dirty="0"/>
-          </a:p>
-        </p:txBody>
-      </p:sp>
-      <p:sp>
-        <p:nvSpPr>
-          <p:cNvPr id="13" name="Shape 11"/>
+              <a:t>Brown et al., 2020</a:t>
+            </a:r>
+            <a:endParaRPr lang="en-US" sz="800" dirty="0"/>
+          </a:p>
+        </p:txBody>
+      </p:sp>
+      <p:sp>
+        <p:nvSpPr>
+          <p:cNvPr id="14" name="Shape 12"/>
           <p:cNvSpPr/>
           <p:nvPr/>
         </p:nvSpPr>
         <p:spPr>
           <a:xfrm>
             <a:off x="3337560" y="2286000"/>
-            <a:ext cx="2560320" cy="2286000"/>
+            <a:ext cx="2560320" cy="2011680"/>
           </a:xfrm>
           <a:prstGeom prst="rect">
             <a:avLst/>
@@ -2535,7 +2535,7 @@
       </p:sp>
       <p:sp>
         <p:nvSpPr>
-          <p:cNvPr id="14" name="Shape 12"/>
+          <p:cNvPr id="15" name="Shape 13"/>
           <p:cNvSpPr/>
           <p:nvPr/>
         </p:nvSpPr>
@@ -2555,7 +2555,7 @@
       </p:sp>
       <p:sp>
         <p:nvSpPr>
-          <p:cNvPr id="15" name="Shape 13"/>
+          <p:cNvPr id="16" name="Shape 14"/>
           <p:cNvSpPr/>
           <p:nvPr/>
         </p:nvSpPr>
@@ -2575,7 +2575,7 @@
       </p:sp>
       <p:sp>
         <p:nvSpPr>
-          <p:cNvPr id="16" name="Text 14"/>
+          <p:cNvPr id="17" name="Text 15"/>
           <p:cNvSpPr/>
           <p:nvPr/>
         </p:nvSpPr>
@@ -2614,7 +2614,7 @@
       </p:sp>
       <p:sp>
         <p:nvSpPr>
-          <p:cNvPr id="17" name="Text 15"/>
+          <p:cNvPr id="18" name="Text 16"/>
           <p:cNvSpPr/>
           <p:nvPr/>
         </p:nvSpPr>
@@ -2637,7 +2637,7 @@
               <a:buNone/>
             </a:pPr>
             <a:r>
-              <a:rPr lang="en-US" sz="1300" b="1" dirty="0">
+              <a:rPr lang="en-US" sz="1400" b="1" dirty="0">
                 <a:solidFill>
                   <a:srgbClr val="F59E0B"/>
                 </a:solidFill>
@@ -2645,22 +2645,22 @@
                 <a:ea typeface="Arial" pitchFamily="34" charset="-122"/>
                 <a:cs typeface="Arial" pitchFamily="34" charset="-120"/>
               </a:rPr>
-              <a:t>RAG helps, but insufficient</a:t>
-            </a:r>
-            <a:endParaRPr lang="en-US" sz="1300" dirty="0"/>
-          </a:p>
-        </p:txBody>
-      </p:sp>
-      <p:sp>
-        <p:nvSpPr>
-          <p:cNvPr id="18" name="Text 16"/>
-          <p:cNvSpPr/>
-          <p:nvPr/>
-        </p:nvSpPr>
-        <p:spPr>
-          <a:xfrm>
-            <a:off x="3520440" y="3611880"/>
-            <a:ext cx="2194560" cy="822960"/>
+              <a:t>RAG有用，但不够</a:t>
+            </a:r>
+            <a:endParaRPr lang="en-US" sz="1400" dirty="0"/>
+          </a:p>
+        </p:txBody>
+      </p:sp>
+      <p:sp>
+        <p:nvSpPr>
+          <p:cNvPr id="19" name="Text 17"/>
+          <p:cNvSpPr/>
+          <p:nvPr/>
+        </p:nvSpPr>
+        <p:spPr>
+          <a:xfrm>
+            <a:off x="3520440" y="3566160"/>
+            <a:ext cx="2194560" cy="457200"/>
           </a:xfrm>
           <a:prstGeom prst="rect">
             <a:avLst/>
@@ -2684,39 +2684,61 @@
                 <a:ea typeface="Calibri" pitchFamily="34" charset="-122"/>
                 <a:cs typeface="Calibri" pitchFamily="34" charset="-120"/>
               </a:rPr>
-              <a:t>Even with RAG, 51% error rate persists</a:t>
+              <a:t>用了RAG仍有51%的错误率</a:t>
             </a:r>
             <a:endParaRPr lang="en-US" sz="1100" dirty="0"/>
           </a:p>
+        </p:txBody>
+      </p:sp>
+      <p:sp>
+        <p:nvSpPr>
+          <p:cNvPr id="20" name="Text 18"/>
+          <p:cNvSpPr/>
+          <p:nvPr/>
+        </p:nvSpPr>
+        <p:spPr>
+          <a:xfrm>
+            <a:off x="3520440" y="3977640"/>
+            <a:ext cx="2194560" cy="228600"/>
+          </a:xfrm>
+          <a:prstGeom prst="rect">
+            <a:avLst/>
+          </a:prstGeom>
+          <a:noFill/>
+          <a:ln/>
+        </p:spPr>
+        <p:txBody>
+          <a:bodyPr wrap="square" lIns="0" tIns="0" rIns="0" bIns="0" rtlCol="0" anchor="ctr"/>
+          <a:lstStyle/>
           <a:p>
             <a:pPr algn="ctr" indent="0" marL="0">
               <a:buNone/>
             </a:pPr>
             <a:r>
-              <a:rPr lang="en-US" sz="1100" dirty="0">
-                <a:solidFill>
-                  <a:srgbClr val="1E293B"/>
+              <a:rPr lang="en-US" sz="800" i="1" dirty="0">
+                <a:solidFill>
+                  <a:srgbClr val="475569"/>
                 </a:solidFill>
                 <a:latin typeface="Calibri" pitchFamily="34" charset="0"/>
                 <a:ea typeface="Calibri" pitchFamily="34" charset="-122"/>
                 <a:cs typeface="Calibri" pitchFamily="34" charset="-120"/>
               </a:rPr>
-              <a:t>(BBC, 2025; CS224V)</a:t>
-            </a:r>
-            <a:endParaRPr lang="en-US" sz="1100" dirty="0"/>
-          </a:p>
-        </p:txBody>
-      </p:sp>
-      <p:sp>
-        <p:nvSpPr>
-          <p:cNvPr id="19" name="Shape 17"/>
+              <a:t>BBC / Stanford 2025</a:t>
+            </a:r>
+            <a:endParaRPr lang="en-US" sz="800" dirty="0"/>
+          </a:p>
+        </p:txBody>
+      </p:sp>
+      <p:sp>
+        <p:nvSpPr>
+          <p:cNvPr id="21" name="Shape 19"/>
           <p:cNvSpPr/>
           <p:nvPr/>
         </p:nvSpPr>
         <p:spPr>
           <a:xfrm>
             <a:off x="6217920" y="2286000"/>
-            <a:ext cx="2560320" cy="2286000"/>
+            <a:ext cx="2560320" cy="2011680"/>
           </a:xfrm>
           <a:prstGeom prst="rect">
             <a:avLst/>
@@ -2736,7 +2758,7 @@
       </p:sp>
       <p:sp>
         <p:nvSpPr>
-          <p:cNvPr id="20" name="Shape 18"/>
+          <p:cNvPr id="22" name="Shape 20"/>
           <p:cNvSpPr/>
           <p:nvPr/>
         </p:nvSpPr>
@@ -2756,7 +2778,7 @@
       </p:sp>
       <p:sp>
         <p:nvSpPr>
-          <p:cNvPr id="21" name="Shape 19"/>
+          <p:cNvPr id="23" name="Shape 21"/>
           <p:cNvSpPr/>
           <p:nvPr/>
         </p:nvSpPr>
@@ -2776,7 +2798,7 @@
       </p:sp>
       <p:sp>
         <p:nvSpPr>
-          <p:cNvPr id="22" name="Text 20"/>
+          <p:cNvPr id="24" name="Text 22"/>
           <p:cNvSpPr/>
           <p:nvPr/>
         </p:nvSpPr>
@@ -2815,7 +2837,7 @@
       </p:sp>
       <p:sp>
         <p:nvSpPr>
-          <p:cNvPr id="23" name="Text 21"/>
+          <p:cNvPr id="25" name="Text 23"/>
           <p:cNvSpPr/>
           <p:nvPr/>
         </p:nvSpPr>
@@ -2838,7 +2860,7 @@
               <a:buNone/>
             </a:pPr>
             <a:r>
-              <a:rPr lang="en-US" sz="1300" b="1" dirty="0">
+              <a:rPr lang="en-US" sz="1400" b="1" dirty="0">
                 <a:solidFill>
                   <a:srgbClr val="10B981"/>
                 </a:solidFill>
@@ -2846,22 +2868,22 @@
                 <a:ea typeface="Arial" pitchFamily="34" charset="-122"/>
                 <a:cs typeface="Arial" pitchFamily="34" charset="-120"/>
               </a:rPr>
-              <a:t>Ontology is the next step</a:t>
-            </a:r>
-            <a:endParaRPr lang="en-US" sz="1300" dirty="0"/>
-          </a:p>
-        </p:txBody>
-      </p:sp>
-      <p:sp>
-        <p:nvSpPr>
-          <p:cNvPr id="24" name="Text 22"/>
-          <p:cNvSpPr/>
-          <p:nvPr/>
-        </p:nvSpPr>
-        <p:spPr>
-          <a:xfrm>
-            <a:off x="6400800" y="3611880"/>
-            <a:ext cx="2194560" cy="822960"/>
+              <a:t>本体约束是进阶</a:t>
+            </a:r>
+            <a:endParaRPr lang="en-US" sz="1400" dirty="0"/>
+          </a:p>
+        </p:txBody>
+      </p:sp>
+      <p:sp>
+        <p:nvSpPr>
+          <p:cNvPr id="26" name="Text 24"/>
+          <p:cNvSpPr/>
+          <p:nvPr/>
+        </p:nvSpPr>
+        <p:spPr>
+          <a:xfrm>
+            <a:off x="6400800" y="3566160"/>
+            <a:ext cx="2194560" cy="457200"/>
           </a:xfrm>
           <a:prstGeom prst="rect">
             <a:avLst/>
@@ -2885,32 +2907,54 @@
                 <a:ea typeface="Calibri" pitchFamily="34" charset="-122"/>
                 <a:cs typeface="Calibri" pitchFamily="34" charset="-120"/>
               </a:rPr>
-              <a:t>Makes reasoning interpretable,</a:t>
+              <a:t>让推理可解释、可裁剪、可验证</a:t>
             </a:r>
             <a:endParaRPr lang="en-US" sz="1100" dirty="0"/>
           </a:p>
+        </p:txBody>
+      </p:sp>
+      <p:sp>
+        <p:nvSpPr>
+          <p:cNvPr id="27" name="Text 25"/>
+          <p:cNvSpPr/>
+          <p:nvPr/>
+        </p:nvSpPr>
+        <p:spPr>
+          <a:xfrm>
+            <a:off x="6400800" y="3977640"/>
+            <a:ext cx="2194560" cy="228600"/>
+          </a:xfrm>
+          <a:prstGeom prst="rect">
+            <a:avLst/>
+          </a:prstGeom>
+          <a:noFill/>
+          <a:ln/>
+        </p:spPr>
+        <p:txBody>
+          <a:bodyPr wrap="square" lIns="0" tIns="0" rIns="0" bIns="0" rtlCol="0" anchor="ctr"/>
+          <a:lstStyle/>
           <a:p>
             <a:pPr algn="ctr" indent="0" marL="0">
               <a:buNone/>
             </a:pPr>
             <a:r>
-              <a:rPr lang="en-US" sz="1100" dirty="0">
-                <a:solidFill>
-                  <a:srgbClr val="1E293B"/>
+              <a:rPr lang="en-US" sz="800" i="1" dirty="0">
+                <a:solidFill>
+                  <a:srgbClr val="475569"/>
                 </a:solidFill>
                 <a:latin typeface="Calibri" pitchFamily="34" charset="0"/>
                 <a:ea typeface="Calibri" pitchFamily="34" charset="-122"/>
                 <a:cs typeface="Calibri" pitchFamily="34" charset="-120"/>
               </a:rPr>
-              <a:t>prunable, and verifiable</a:t>
-            </a:r>
-            <a:endParaRPr lang="en-US" sz="1100" dirty="0"/>
-          </a:p>
-        </p:txBody>
-      </p:sp>
-      <p:sp>
-        <p:nvSpPr>
-          <p:cNvPr id="25" name="Shape 23"/>
+              <a:t>Ontology Layer</a:t>
+            </a:r>
+            <a:endParaRPr lang="en-US" sz="800" dirty="0"/>
+          </a:p>
+        </p:txBody>
+      </p:sp>
+      <p:sp>
+        <p:nvSpPr>
+          <p:cNvPr id="28" name="Shape 26"/>
           <p:cNvSpPr/>
           <p:nvPr/>
         </p:nvSpPr>
@@ -2930,7 +2974,7 @@
       </p:sp>
       <p:sp>
         <p:nvSpPr>
-          <p:cNvPr id="26" name="Text 24"/>
+          <p:cNvPr id="29" name="Text 27"/>
           <p:cNvSpPr/>
           <p:nvPr/>
         </p:nvSpPr>
@@ -2961,7 +3005,7 @@
                 <a:ea typeface="Calibri" pitchFamily="34" charset="-122"/>
                 <a:cs typeface="Calibri" pitchFamily="34" charset="-120"/>
               </a:rPr>
-              <a:t>From ML replacing physical simulation → Ontology constraining LLM reasoning: embedding domain knowledge into model inference</a:t>
+              <a:t>从用AI替代物理仿真 → 用本体约束大模型：把领域知识嵌入模型推理</a:t>
             </a:r>
             <a:endParaRPr lang="en-US" sz="1000" dirty="0"/>
           </a:p>
@@ -3052,7 +3096,7 @@
                 <a:ea typeface="Arial" pitchFamily="34" charset="-122"/>
                 <a:cs typeface="Arial" pitchFamily="34" charset="-120"/>
               </a:rPr>
-              <a:t>未来方向</a:t>
+              <a:t>下一步往哪走？</a:t>
             </a:r>
             <a:endParaRPr lang="en-US" sz="2800" dirty="0"/>
           </a:p>
@@ -3091,7 +3135,7 @@
                 <a:ea typeface="Calibri" pitchFamily="34" charset="-122"/>
                 <a:cs typeface="Calibri" pitchFamily="34" charset="-120"/>
               </a:rPr>
-              <a:t>Future Directions in Knowledge-Grounded LLMs</a:t>
+              <a:t>Future Directions</a:t>
             </a:r>
             <a:endParaRPr lang="en-US" sz="1400" dirty="0"/>
           </a:p>
@@ -3106,7 +3150,7 @@
         <p:spPr>
           <a:xfrm>
             <a:off x="457200" y="1371600"/>
-            <a:ext cx="2560320" cy="2926080"/>
+            <a:ext cx="2560320" cy="2743200"/>
           </a:xfrm>
           <a:prstGeom prst="rect">
             <a:avLst/>
@@ -3152,8 +3196,8 @@
         </p:nvSpPr>
         <p:spPr>
           <a:xfrm>
-            <a:off x="594360" y="1600200"/>
-            <a:ext cx="2286000" cy="457200"/>
+            <a:off x="594360" y="1554480"/>
+            <a:ext cx="2286000" cy="365760"/>
           </a:xfrm>
           <a:prstGeom prst="rect">
             <a:avLst/>
@@ -3169,7 +3213,7 @@
               <a:buNone/>
             </a:pPr>
             <a:r>
-              <a:rPr lang="en-US" sz="1600" b="1" dirty="0">
+              <a:rPr lang="en-US" sz="1800" b="1" dirty="0">
                 <a:solidFill>
                   <a:srgbClr val="2563EB"/>
                 </a:solidFill>
@@ -3177,9 +3221,9 @@
                 <a:ea typeface="Arial" pitchFamily="34" charset="-122"/>
                 <a:cs typeface="Arial" pitchFamily="34" charset="-120"/>
               </a:rPr>
-              <a:t>Self-RAG + Agents</a:t>
-            </a:r>
-            <a:endParaRPr lang="en-US" sz="1600" dirty="0"/>
+              <a:t>Self-RAG</a:t>
+            </a:r>
+            <a:endParaRPr lang="en-US" sz="1800" dirty="0"/>
           </a:p>
         </p:txBody>
       </p:sp>
@@ -3191,35 +3235,57 @@
         </p:nvSpPr>
         <p:spPr>
           <a:xfrm>
-            <a:off x="640080" y="2148840"/>
-            <a:ext cx="2194560" cy="1097280"/>
-          </a:xfrm>
-          <a:prstGeom prst="rect">
-            <a:avLst/>
-          </a:prstGeom>
-          <a:noFill/>
-          <a:ln/>
-        </p:spPr>
-        <p:txBody>
-          <a:bodyPr wrap="square" lIns="0" tIns="0" rIns="0" bIns="0" rtlCol="0" anchor="t"/>
+            <a:off x="594360" y="1920240"/>
+            <a:ext cx="2286000" cy="274320"/>
+          </a:xfrm>
+          <a:prstGeom prst="rect">
+            <a:avLst/>
+          </a:prstGeom>
+          <a:noFill/>
+          <a:ln/>
+        </p:spPr>
+        <p:txBody>
+          <a:bodyPr wrap="square" lIns="0" tIns="0" rIns="0" bIns="0" rtlCol="0" anchor="ctr"/>
           <a:lstStyle/>
           <a:p>
             <a:pPr indent="0" marL="0">
               <a:buNone/>
             </a:pPr>
             <a:r>
-              <a:rPr lang="en-US" sz="1200" dirty="0">
-                <a:solidFill>
-                  <a:srgbClr val="1E293B"/>
+              <a:rPr lang="en-US" sz="1100" dirty="0">
+                <a:solidFill>
+                  <a:srgbClr val="475569"/>
                 </a:solidFill>
                 <a:latin typeface="Calibri" pitchFamily="34" charset="0"/>
                 <a:ea typeface="Calibri" pitchFamily="34" charset="-122"/>
                 <a:cs typeface="Calibri" pitchFamily="34" charset="-120"/>
               </a:rPr>
-              <a:t>LLM 自主判断何时需要检索，</a:t>
-            </a:r>
-            <a:endParaRPr lang="en-US" sz="1200" dirty="0"/>
-          </a:p>
+              <a:t>自主检索</a:t>
+            </a:r>
+            <a:endParaRPr lang="en-US" sz="1100" dirty="0"/>
+          </a:p>
+        </p:txBody>
+      </p:sp>
+      <p:sp>
+        <p:nvSpPr>
+          <p:cNvPr id="9" name="Text 7"/>
+          <p:cNvSpPr/>
+          <p:nvPr/>
+        </p:nvSpPr>
+        <p:spPr>
+          <a:xfrm>
+            <a:off x="640080" y="2240280"/>
+            <a:ext cx="2194560" cy="1097280"/>
+          </a:xfrm>
+          <a:prstGeom prst="rect">
+            <a:avLst/>
+          </a:prstGeom>
+          <a:noFill/>
+          <a:ln/>
+        </p:spPr>
+        <p:txBody>
+          <a:bodyPr wrap="square" lIns="0" tIns="0" rIns="0" bIns="0" rtlCol="0" anchor="t"/>
+          <a:lstStyle/>
           <a:p>
             <a:pPr indent="0" marL="0">
               <a:buNone/>
@@ -3233,15 +3299,49 @@
                 <a:ea typeface="Calibri" pitchFamily="34" charset="-122"/>
                 <a:cs typeface="Calibri" pitchFamily="34" charset="-120"/>
               </a:rPr>
-              <a:t>动态决策检索时机</a:t>
+              <a:t>让AI自己判断</a:t>
             </a:r>
             <a:endParaRPr lang="en-US" sz="1200" dirty="0"/>
           </a:p>
-        </p:txBody>
-      </p:sp>
-      <p:sp>
-        <p:nvSpPr>
-          <p:cNvPr id="9" name="Shape 7"/>
+          <a:p>
+            <a:pPr indent="0" marL="0">
+              <a:buNone/>
+            </a:pPr>
+            <a:r>
+              <a:rPr lang="en-US" sz="1200" dirty="0">
+                <a:solidFill>
+                  <a:srgbClr val="1E293B"/>
+                </a:solidFill>
+                <a:latin typeface="Calibri" pitchFamily="34" charset="0"/>
+                <a:ea typeface="Calibri" pitchFamily="34" charset="-122"/>
+                <a:cs typeface="Calibri" pitchFamily="34" charset="-120"/>
+              </a:rPr>
+              <a:t>"什么时候该去查资料"</a:t>
+            </a:r>
+            <a:endParaRPr lang="en-US" sz="1200" dirty="0"/>
+          </a:p>
+          <a:p>
+            <a:pPr indent="0" marL="0">
+              <a:buNone/>
+            </a:pPr>
+            <a:r>
+              <a:rPr lang="en-US" sz="1200" dirty="0">
+                <a:solidFill>
+                  <a:srgbClr val="1E293B"/>
+                </a:solidFill>
+                <a:latin typeface="Calibri" pitchFamily="34" charset="0"/>
+                <a:ea typeface="Calibri" pitchFamily="34" charset="-122"/>
+                <a:cs typeface="Calibri" pitchFamily="34" charset="-120"/>
+              </a:rPr>
+              <a:t>而不是每次都检索</a:t>
+            </a:r>
+            <a:endParaRPr lang="en-US" sz="1200" dirty="0"/>
+          </a:p>
+        </p:txBody>
+      </p:sp>
+      <p:sp>
+        <p:nvSpPr>
+          <p:cNvPr id="10" name="Shape 8"/>
           <p:cNvSpPr/>
           <p:nvPr/>
         </p:nvSpPr>
@@ -3261,7 +3361,7 @@
       </p:sp>
       <p:sp>
         <p:nvSpPr>
-          <p:cNvPr id="10" name="Text 8"/>
+          <p:cNvPr id="11" name="Text 9"/>
           <p:cNvSpPr/>
           <p:nvPr/>
         </p:nvSpPr>
@@ -3300,14 +3400,14 @@
       </p:sp>
       <p:sp>
         <p:nvSpPr>
-          <p:cNvPr id="11" name="Shape 9"/>
+          <p:cNvPr id="12" name="Shape 10"/>
           <p:cNvSpPr/>
           <p:nvPr/>
         </p:nvSpPr>
         <p:spPr>
           <a:xfrm>
             <a:off x="3337560" y="1371600"/>
-            <a:ext cx="2560320" cy="2926080"/>
+            <a:ext cx="2560320" cy="2743200"/>
           </a:xfrm>
           <a:prstGeom prst="rect">
             <a:avLst/>
@@ -3327,7 +3427,7 @@
       </p:sp>
       <p:sp>
         <p:nvSpPr>
-          <p:cNvPr id="12" name="Shape 10"/>
+          <p:cNvPr id="13" name="Shape 11"/>
           <p:cNvSpPr/>
           <p:nvPr/>
         </p:nvSpPr>
@@ -3347,14 +3447,14 @@
       </p:sp>
       <p:sp>
         <p:nvSpPr>
-          <p:cNvPr id="13" name="Text 11"/>
-          <p:cNvSpPr/>
-          <p:nvPr/>
-        </p:nvSpPr>
-        <p:spPr>
-          <a:xfrm>
-            <a:off x="3474720" y="1600200"/>
-            <a:ext cx="2286000" cy="457200"/>
+          <p:cNvPr id="14" name="Text 12"/>
+          <p:cNvSpPr/>
+          <p:nvPr/>
+        </p:nvSpPr>
+        <p:spPr>
+          <a:xfrm>
+            <a:off x="3474720" y="1554480"/>
+            <a:ext cx="2286000" cy="365760"/>
           </a:xfrm>
           <a:prstGeom prst="rect">
             <a:avLst/>
@@ -3370,7 +3470,7 @@
               <a:buNone/>
             </a:pPr>
             <a:r>
-              <a:rPr lang="en-US" sz="1600" b="1" dirty="0">
+              <a:rPr lang="en-US" sz="1800" b="1" dirty="0">
                 <a:solidFill>
                   <a:srgbClr val="8B5CF6"/>
                 </a:solidFill>
@@ -3380,47 +3480,69 @@
               </a:rPr>
               <a:t>Graph-RAG</a:t>
             </a:r>
-            <a:endParaRPr lang="en-US" sz="1600" dirty="0"/>
-          </a:p>
-        </p:txBody>
-      </p:sp>
-      <p:sp>
-        <p:nvSpPr>
-          <p:cNvPr id="14" name="Text 12"/>
-          <p:cNvSpPr/>
-          <p:nvPr/>
-        </p:nvSpPr>
-        <p:spPr>
-          <a:xfrm>
-            <a:off x="3520440" y="2148840"/>
-            <a:ext cx="2194560" cy="1097280"/>
-          </a:xfrm>
-          <a:prstGeom prst="rect">
-            <a:avLst/>
-          </a:prstGeom>
-          <a:noFill/>
-          <a:ln/>
-        </p:spPr>
-        <p:txBody>
-          <a:bodyPr wrap="square" lIns="0" tIns="0" rIns="0" bIns="0" rtlCol="0" anchor="t"/>
+            <a:endParaRPr lang="en-US" sz="1800" dirty="0"/>
+          </a:p>
+        </p:txBody>
+      </p:sp>
+      <p:sp>
+        <p:nvSpPr>
+          <p:cNvPr id="15" name="Text 13"/>
+          <p:cNvSpPr/>
+          <p:nvPr/>
+        </p:nvSpPr>
+        <p:spPr>
+          <a:xfrm>
+            <a:off x="3474720" y="1920240"/>
+            <a:ext cx="2286000" cy="274320"/>
+          </a:xfrm>
+          <a:prstGeom prst="rect">
+            <a:avLst/>
+          </a:prstGeom>
+          <a:noFill/>
+          <a:ln/>
+        </p:spPr>
+        <p:txBody>
+          <a:bodyPr wrap="square" lIns="0" tIns="0" rIns="0" bIns="0" rtlCol="0" anchor="ctr"/>
           <a:lstStyle/>
           <a:p>
             <a:pPr indent="0" marL="0">
               <a:buNone/>
             </a:pPr>
             <a:r>
-              <a:rPr lang="en-US" sz="1200" dirty="0">
-                <a:solidFill>
-                  <a:srgbClr val="1E293B"/>
+              <a:rPr lang="en-US" sz="1100" dirty="0">
+                <a:solidFill>
+                  <a:srgbClr val="475569"/>
                 </a:solidFill>
                 <a:latin typeface="Calibri" pitchFamily="34" charset="0"/>
                 <a:ea typeface="Calibri" pitchFamily="34" charset="-122"/>
                 <a:cs typeface="Calibri" pitchFamily="34" charset="-120"/>
               </a:rPr>
-              <a:t>在知识图谱上进行</a:t>
-            </a:r>
-            <a:endParaRPr lang="en-US" sz="1200" dirty="0"/>
-          </a:p>
+              <a:t>图谱检索</a:t>
+            </a:r>
+            <a:endParaRPr lang="en-US" sz="1100" dirty="0"/>
+          </a:p>
+        </p:txBody>
+      </p:sp>
+      <p:sp>
+        <p:nvSpPr>
+          <p:cNvPr id="16" name="Text 14"/>
+          <p:cNvSpPr/>
+          <p:nvPr/>
+        </p:nvSpPr>
+        <p:spPr>
+          <a:xfrm>
+            <a:off x="3520440" y="2240280"/>
+            <a:ext cx="2194560" cy="1097280"/>
+          </a:xfrm>
+          <a:prstGeom prst="rect">
+            <a:avLst/>
+          </a:prstGeom>
+          <a:noFill/>
+          <a:ln/>
+        </p:spPr>
+        <p:txBody>
+          <a:bodyPr wrap="square" lIns="0" tIns="0" rIns="0" bIns="0" rtlCol="0" anchor="t"/>
+          <a:lstStyle/>
           <a:p>
             <a:pPr indent="0" marL="0">
               <a:buNone/>
@@ -3434,15 +3556,49 @@
                 <a:ea typeface="Calibri" pitchFamily="34" charset="-122"/>
                 <a:cs typeface="Calibri" pitchFamily="34" charset="-120"/>
               </a:rPr>
-              <a:t>细粒度结构化检索</a:t>
+              <a:t>在知识图谱上</a:t>
             </a:r>
             <a:endParaRPr lang="en-US" sz="1200" dirty="0"/>
           </a:p>
-        </p:txBody>
-      </p:sp>
-      <p:sp>
-        <p:nvSpPr>
-          <p:cNvPr id="15" name="Shape 13"/>
+          <a:p>
+            <a:pPr indent="0" marL="0">
+              <a:buNone/>
+            </a:pPr>
+            <a:r>
+              <a:rPr lang="en-US" sz="1200" dirty="0">
+                <a:solidFill>
+                  <a:srgbClr val="1E293B"/>
+                </a:solidFill>
+                <a:latin typeface="Calibri" pitchFamily="34" charset="0"/>
+                <a:ea typeface="Calibri" pitchFamily="34" charset="-122"/>
+                <a:cs typeface="Calibri" pitchFamily="34" charset="-120"/>
+              </a:rPr>
+              <a:t>做更精准的</a:t>
+            </a:r>
+            <a:endParaRPr lang="en-US" sz="1200" dirty="0"/>
+          </a:p>
+          <a:p>
+            <a:pPr indent="0" marL="0">
+              <a:buNone/>
+            </a:pPr>
+            <a:r>
+              <a:rPr lang="en-US" sz="1200" dirty="0">
+                <a:solidFill>
+                  <a:srgbClr val="1E293B"/>
+                </a:solidFill>
+                <a:latin typeface="Calibri" pitchFamily="34" charset="0"/>
+                <a:ea typeface="Calibri" pitchFamily="34" charset="-122"/>
+                <a:cs typeface="Calibri" pitchFamily="34" charset="-120"/>
+              </a:rPr>
+              <a:t>结构化检索</a:t>
+            </a:r>
+            <a:endParaRPr lang="en-US" sz="1200" dirty="0"/>
+          </a:p>
+        </p:txBody>
+      </p:sp>
+      <p:sp>
+        <p:nvSpPr>
+          <p:cNvPr id="17" name="Shape 15"/>
           <p:cNvSpPr/>
           <p:nvPr/>
         </p:nvSpPr>
@@ -3462,7 +3618,7 @@
       </p:sp>
       <p:sp>
         <p:nvSpPr>
-          <p:cNvPr id="16" name="Text 14"/>
+          <p:cNvPr id="18" name="Text 16"/>
           <p:cNvSpPr/>
           <p:nvPr/>
         </p:nvSpPr>
@@ -3493,7 +3649,7 @@
                 <a:ea typeface="Calibri" pitchFamily="34" charset="-122"/>
                 <a:cs typeface="Calibri" pitchFamily="34" charset="-120"/>
               </a:rPr>
-              <a:t>Edge et al., 2024</a:t>
+              <a:t>Edge et al., 2024 (Microsoft)</a:t>
             </a:r>
             <a:endParaRPr lang="en-US" sz="900" dirty="0"/>
           </a:p>
@@ -3501,14 +3657,14 @@
       </p:sp>
       <p:sp>
         <p:nvSpPr>
-          <p:cNvPr id="17" name="Shape 15"/>
+          <p:cNvPr id="19" name="Shape 17"/>
           <p:cNvSpPr/>
           <p:nvPr/>
         </p:nvSpPr>
         <p:spPr>
           <a:xfrm>
             <a:off x="6217920" y="1371600"/>
-            <a:ext cx="2560320" cy="2926080"/>
+            <a:ext cx="2560320" cy="2743200"/>
           </a:xfrm>
           <a:prstGeom prst="rect">
             <a:avLst/>
@@ -3528,7 +3684,7 @@
       </p:sp>
       <p:sp>
         <p:nvSpPr>
-          <p:cNvPr id="18" name="Shape 16"/>
+          <p:cNvPr id="20" name="Shape 18"/>
           <p:cNvSpPr/>
           <p:nvPr/>
         </p:nvSpPr>
@@ -3548,14 +3704,14 @@
       </p:sp>
       <p:sp>
         <p:nvSpPr>
-          <p:cNvPr id="19" name="Text 17"/>
-          <p:cNvSpPr/>
-          <p:nvPr/>
-        </p:nvSpPr>
-        <p:spPr>
-          <a:xfrm>
-            <a:off x="6355080" y="1600200"/>
-            <a:ext cx="2286000" cy="457200"/>
+          <p:cNvPr id="21" name="Text 19"/>
+          <p:cNvSpPr/>
+          <p:nvPr/>
+        </p:nvSpPr>
+        <p:spPr>
+          <a:xfrm>
+            <a:off x="6355080" y="1554480"/>
+            <a:ext cx="2286000" cy="365760"/>
           </a:xfrm>
           <a:prstGeom prst="rect">
             <a:avLst/>
@@ -3571,7 +3727,7 @@
               <a:buNone/>
             </a:pPr>
             <a:r>
-              <a:rPr lang="en-US" sz="1600" b="1" dirty="0">
+              <a:rPr lang="en-US" sz="1800" b="1" dirty="0">
                 <a:solidFill>
                   <a:srgbClr val="06B6D4"/>
                 </a:solidFill>
@@ -3579,49 +3735,71 @@
                 <a:ea typeface="Arial" pitchFamily="34" charset="-122"/>
                 <a:cs typeface="Arial" pitchFamily="34" charset="-120"/>
               </a:rPr>
-              <a:t>Explainable Reasoning</a:t>
-            </a:r>
-            <a:endParaRPr lang="en-US" sz="1600" dirty="0"/>
-          </a:p>
-        </p:txBody>
-      </p:sp>
-      <p:sp>
-        <p:nvSpPr>
-          <p:cNvPr id="20" name="Text 18"/>
-          <p:cNvSpPr/>
-          <p:nvPr/>
-        </p:nvSpPr>
-        <p:spPr>
-          <a:xfrm>
-            <a:off x="6400800" y="2148840"/>
-            <a:ext cx="2194560" cy="1097280"/>
-          </a:xfrm>
-          <a:prstGeom prst="rect">
-            <a:avLst/>
-          </a:prstGeom>
-          <a:noFill/>
-          <a:ln/>
-        </p:spPr>
-        <p:txBody>
-          <a:bodyPr wrap="square" lIns="0" tIns="0" rIns="0" bIns="0" rtlCol="0" anchor="t"/>
+              <a:t>可解释推理链</a:t>
+            </a:r>
+            <a:endParaRPr lang="en-US" sz="1800" dirty="0"/>
+          </a:p>
+        </p:txBody>
+      </p:sp>
+      <p:sp>
+        <p:nvSpPr>
+          <p:cNvPr id="22" name="Text 20"/>
+          <p:cNvSpPr/>
+          <p:nvPr/>
+        </p:nvSpPr>
+        <p:spPr>
+          <a:xfrm>
+            <a:off x="6355080" y="1920240"/>
+            <a:ext cx="2286000" cy="274320"/>
+          </a:xfrm>
+          <a:prstGeom prst="rect">
+            <a:avLst/>
+          </a:prstGeom>
+          <a:noFill/>
+          <a:ln/>
+        </p:spPr>
+        <p:txBody>
+          <a:bodyPr wrap="square" lIns="0" tIns="0" rIns="0" bIns="0" rtlCol="0" anchor="ctr"/>
           <a:lstStyle/>
           <a:p>
             <a:pPr indent="0" marL="0">
               <a:buNone/>
             </a:pPr>
             <a:r>
-              <a:rPr lang="en-US" sz="1200" dirty="0">
-                <a:solidFill>
-                  <a:srgbClr val="1E293B"/>
+              <a:rPr lang="en-US" sz="1100" dirty="0">
+                <a:solidFill>
+                  <a:srgbClr val="475569"/>
                 </a:solidFill>
                 <a:latin typeface="Calibri" pitchFamily="34" charset="0"/>
                 <a:ea typeface="Calibri" pitchFamily="34" charset="-122"/>
                 <a:cs typeface="Calibri" pitchFamily="34" charset="-120"/>
               </a:rPr>
-              <a:t>每条推理路径</a:t>
-            </a:r>
-            <a:endParaRPr lang="en-US" sz="1200" dirty="0"/>
-          </a:p>
+              <a:t>Explainable Chain</a:t>
+            </a:r>
+            <a:endParaRPr lang="en-US" sz="1100" dirty="0"/>
+          </a:p>
+        </p:txBody>
+      </p:sp>
+      <p:sp>
+        <p:nvSpPr>
+          <p:cNvPr id="23" name="Text 21"/>
+          <p:cNvSpPr/>
+          <p:nvPr/>
+        </p:nvSpPr>
+        <p:spPr>
+          <a:xfrm>
+            <a:off x="6400800" y="2240280"/>
+            <a:ext cx="2194560" cy="1097280"/>
+          </a:xfrm>
+          <a:prstGeom prst="rect">
+            <a:avLst/>
+          </a:prstGeom>
+          <a:noFill/>
+          <a:ln/>
+        </p:spPr>
+        <p:txBody>
+          <a:bodyPr wrap="square" lIns="0" tIns="0" rIns="0" bIns="0" rtlCol="0" anchor="t"/>
+          <a:lstStyle/>
           <a:p>
             <a:pPr indent="0" marL="0">
               <a:buNone/>
@@ -3635,15 +3813,49 @@
                 <a:ea typeface="Calibri" pitchFamily="34" charset="-122"/>
                 <a:cs typeface="Calibri" pitchFamily="34" charset="-120"/>
               </a:rPr>
-              <a:t>均可审计和追溯</a:t>
+              <a:t>每步推理都记录下来</a:t>
             </a:r>
             <a:endParaRPr lang="en-US" sz="1200" dirty="0"/>
           </a:p>
-        </p:txBody>
-      </p:sp>
-      <p:sp>
-        <p:nvSpPr>
-          <p:cNvPr id="21" name="Shape 19"/>
+          <a:p>
+            <a:pPr indent="0" marL="0">
+              <a:buNone/>
+            </a:pPr>
+            <a:r>
+              <a:rPr lang="en-US" sz="1200" dirty="0">
+                <a:solidFill>
+                  <a:srgbClr val="1E293B"/>
+                </a:solidFill>
+                <a:latin typeface="Calibri" pitchFamily="34" charset="0"/>
+                <a:ea typeface="Calibri" pitchFamily="34" charset="-122"/>
+                <a:cs typeface="Calibri" pitchFamily="34" charset="-120"/>
+              </a:rPr>
+              <a:t>可追溯、可审计</a:t>
+            </a:r>
+            <a:endParaRPr lang="en-US" sz="1200" dirty="0"/>
+          </a:p>
+          <a:p>
+            <a:pPr indent="0" marL="0">
+              <a:buNone/>
+            </a:pPr>
+            <a:r>
+              <a:rPr lang="en-US" sz="1200" dirty="0">
+                <a:solidFill>
+                  <a:srgbClr val="1E293B"/>
+                </a:solidFill>
+                <a:latin typeface="Calibri" pitchFamily="34" charset="0"/>
+                <a:ea typeface="Calibri" pitchFamily="34" charset="-122"/>
+                <a:cs typeface="Calibri" pitchFamily="34" charset="-120"/>
+              </a:rPr>
+              <a:t>不再是黑盒</a:t>
+            </a:r>
+            <a:endParaRPr lang="en-US" sz="1200" dirty="0"/>
+          </a:p>
+        </p:txBody>
+      </p:sp>
+      <p:sp>
+        <p:nvSpPr>
+          <p:cNvPr id="24" name="Shape 22"/>
           <p:cNvSpPr/>
           <p:nvPr/>
         </p:nvSpPr>
@@ -3663,7 +3875,7 @@
       </p:sp>
       <p:sp>
         <p:nvSpPr>
-          <p:cNvPr id="22" name="Text 20"/>
+          <p:cNvPr id="25" name="Text 23"/>
           <p:cNvSpPr/>
           <p:nvPr/>
         </p:nvSpPr>
@@ -3702,7 +3914,7 @@
       </p:sp>
       <p:sp>
         <p:nvSpPr>
-          <p:cNvPr id="23" name="Text 21"/>
+          <p:cNvPr id="26" name="Text 24"/>
           <p:cNvSpPr/>
           <p:nvPr/>
         </p:nvSpPr>
@@ -3733,7 +3945,7 @@
                 <a:ea typeface="Calibri" pitchFamily="34" charset="-122"/>
                 <a:cs typeface="Calibri" pitchFamily="34" charset="-120"/>
               </a:rPr>
-              <a:t>From basic RAG to knowledge-constrained reasoning — making AI both knowledgeable and rule-abiding</a:t>
+              <a:t>从"给AI材料"到"给AI规则"——让AI既"懂知识"，又"守规矩"</a:t>
             </a:r>
             <a:endParaRPr lang="en-US" sz="1300" dirty="0"/>
           </a:p>
@@ -3887,7 +4099,7 @@
                 <a:ea typeface="Calibri" pitchFamily="34" charset="-122"/>
                 <a:cs typeface="Calibri" pitchFamily="34" charset="-120"/>
               </a:rPr>
-              <a:t>Questions &amp; Discussion</a:t>
+              <a:t>欢迎提问交流</a:t>
             </a:r>
             <a:endParaRPr lang="en-US" sz="2200" dirty="0"/>
           </a:p>
@@ -3948,7 +4160,7 @@
                 <a:ea typeface="Calibri" pitchFamily="34" charset="-122"/>
                 <a:cs typeface="Calibri" pitchFamily="34" charset="-120"/>
               </a:rPr>
-              <a:t>"The best way to make LLMs reliable is not to make them larger —</a:t>
+              <a:t>"让大模型变得可靠，关键不是把它做得更大——</a:t>
             </a:r>
             <a:endParaRPr lang="en-US" sz="1400" dirty="0"/>
           </a:p>
@@ -3965,48 +4177,9 @@
                 <a:ea typeface="Calibri" pitchFamily="34" charset="-122"/>
                 <a:cs typeface="Calibri" pitchFamily="34" charset="-120"/>
               </a:rPr>
-              <a:t>it's to give them the right knowledge and the right constraints."</a:t>
+              <a:t>而是给它正确的知识和正确的边界。"</a:t>
             </a:r>
             <a:endParaRPr lang="en-US" sz="1400" dirty="0"/>
-          </a:p>
-        </p:txBody>
-      </p:sp>
-      <p:sp>
-        <p:nvSpPr>
-          <p:cNvPr id="8" name="Text 6"/>
-          <p:cNvSpPr/>
-          <p:nvPr/>
-        </p:nvSpPr>
-        <p:spPr>
-          <a:xfrm>
-            <a:off x="914400" y="4389120"/>
-            <a:ext cx="7315200" cy="274320"/>
-          </a:xfrm>
-          <a:prstGeom prst="rect">
-            <a:avLst/>
-          </a:prstGeom>
-          <a:noFill/>
-          <a:ln/>
-        </p:spPr>
-        <p:txBody>
-          <a:bodyPr wrap="square" rtlCol="0" anchor="ctr"/>
-          <a:lstStyle/>
-          <a:p>
-            <a:pPr algn="ctr" indent="0" marL="0">
-              <a:buNone/>
-            </a:pPr>
-            <a:r>
-              <a:rPr lang="en-US" sz="1000" dirty="0">
-                <a:solidFill>
-                  <a:srgbClr val="475569"/>
-                </a:solidFill>
-                <a:latin typeface="Calibri" pitchFamily="34" charset="0"/>
-                <a:ea typeface="Calibri" pitchFamily="34" charset="-122"/>
-                <a:cs typeface="Calibri" pitchFamily="34" charset="-120"/>
-              </a:rPr>
-              <a:t>参考文献详见讲义</a:t>
-            </a:r>
-            <a:endParaRPr lang="en-US" sz="1000" dirty="0"/>
           </a:p>
         </p:txBody>
       </p:sp>
@@ -4095,7 +4268,7 @@
                 <a:ea typeface="Arial" pitchFamily="34" charset="-122"/>
                 <a:cs typeface="Arial" pitchFamily="34" charset="-120"/>
               </a:rPr>
-              <a:t>大模型很强大，但还不够可靠</a:t>
+              <a:t>大模型很强大，但你真的能信它吗？</a:t>
             </a:r>
             <a:endParaRPr lang="en-US" sz="2800" dirty="0"/>
           </a:p>
@@ -4110,7 +4283,7 @@
         <p:spPr>
           <a:xfrm>
             <a:off x="457200" y="1188720"/>
-            <a:ext cx="3840480" cy="3291840"/>
+            <a:ext cx="3840480" cy="2926080"/>
           </a:xfrm>
           <a:prstGeom prst="rect">
             <a:avLst/>
@@ -4137,7 +4310,7 @@
         <p:spPr>
           <a:xfrm>
             <a:off x="457200" y="1188720"/>
-            <a:ext cx="54864" cy="3291840"/>
+            <a:ext cx="54864" cy="2926080"/>
           </a:xfrm>
           <a:prstGeom prst="rect">
             <a:avLst/>
@@ -4205,7 +4378,7 @@
                 <a:ea typeface="Arial" pitchFamily="34" charset="-122"/>
                 <a:cs typeface="Arial" pitchFamily="34" charset="-120"/>
               </a:rPr>
-              <a:t>大模型的核心能力</a:t>
+              <a:t>确实厉害</a:t>
             </a:r>
             <a:endParaRPr lang="en-US" sz="1600" dirty="0"/>
           </a:p>
@@ -4220,7 +4393,7 @@
         <p:spPr>
           <a:xfrm>
             <a:off x="685800" y="1783080"/>
-            <a:ext cx="3291840" cy="2286000"/>
+            <a:ext cx="3291840" cy="1828800"/>
           </a:xfrm>
           <a:prstGeom prst="rect">
             <a:avLst/>
@@ -4245,7 +4418,7 @@
                 <a:ea typeface="Calibri" pitchFamily="34" charset="-122"/>
                 <a:cs typeface="Calibri" pitchFamily="34" charset="-120"/>
               </a:rPr>
-              <a:t>自然语言理解与生成</a:t>
+              <a:t>能聊天、能写代码、能帮你写论文提纲</a:t>
             </a:r>
             <a:endParaRPr lang="en-US" sz="1200" dirty="0"/>
           </a:p>
@@ -4263,7 +4436,7 @@
                 <a:ea typeface="Calibri" pitchFamily="34" charset="-122"/>
                 <a:cs typeface="Calibri" pitchFamily="34" charset="-120"/>
               </a:rPr>
-              <a:t>代码生成与推理分析</a:t>
+              <a:t>GPT / Qwen 已渗透到各行各业</a:t>
             </a:r>
             <a:endParaRPr lang="en-US" sz="1200" dirty="0"/>
           </a:p>
@@ -4281,28 +4454,10 @@
                 <a:ea typeface="Calibri" pitchFamily="34" charset="-122"/>
                 <a:cs typeface="Calibri" pitchFamily="34" charset="-120"/>
               </a:rPr>
-              <a:t>知识问答与内容创作</a:t>
+              <a:t>能力确实让人惊叹</a:t>
             </a:r>
             <a:endParaRPr lang="en-US" sz="1200" dirty="0"/>
           </a:p>
-          <a:p>
-            <a:pPr marL="342900" indent="-342900">
-              <a:buSzPct val="100000"/>
-              <a:buChar char="•"/>
-            </a:pPr>
-            <a:r>
-              <a:rPr lang="en-US" sz="1200" dirty="0">
-                <a:solidFill>
-                  <a:srgbClr val="1E293B"/>
-                </a:solidFill>
-                <a:latin typeface="Calibri" pitchFamily="34" charset="0"/>
-                <a:ea typeface="Calibri" pitchFamily="34" charset="-122"/>
-                <a:cs typeface="Calibri" pitchFamily="34" charset="-120"/>
-              </a:rPr>
-              <a:t>ChatGPT / GPT-4 / Qwen 影响各行各业</a:t>
-            </a:r>
-            <a:endParaRPr lang="en-US" sz="1200" dirty="0"/>
-          </a:p>
         </p:txBody>
       </p:sp>
       <p:sp>
@@ -4314,7 +4469,7 @@
         <p:spPr>
           <a:xfrm>
             <a:off x="4846320" y="1188720"/>
-            <a:ext cx="3840480" cy="3291840"/>
+            <a:ext cx="3840480" cy="2926080"/>
           </a:xfrm>
           <a:prstGeom prst="rect">
             <a:avLst/>
@@ -4341,7 +4496,7 @@
         <p:spPr>
           <a:xfrm>
             <a:off x="4846320" y="1188720"/>
-            <a:ext cx="54864" cy="3291840"/>
+            <a:ext cx="54864" cy="2926080"/>
           </a:xfrm>
           <a:prstGeom prst="rect">
             <a:avLst/>
@@ -4409,7 +4564,7 @@
                 <a:ea typeface="Arial" pitchFamily="34" charset="-122"/>
                 <a:cs typeface="Arial" pitchFamily="34" charset="-120"/>
               </a:rPr>
-              <a:t>三大结构性困境</a:t>
+              <a:t>三大天生缺陷</a:t>
             </a:r>
             <a:endParaRPr lang="en-US" sz="1600" dirty="0"/>
           </a:p>
@@ -4424,7 +4579,7 @@
         <p:spPr>
           <a:xfrm>
             <a:off x="5074920" y="1783080"/>
-            <a:ext cx="3291840" cy="2286000"/>
+            <a:ext cx="3291840" cy="2011680"/>
           </a:xfrm>
           <a:prstGeom prst="rect">
             <a:avLst/>
@@ -4448,7 +4603,7 @@
                 <a:ea typeface="Calibri" pitchFamily="34" charset="-122"/>
                 <a:cs typeface="Calibri" pitchFamily="34" charset="-120"/>
               </a:rPr>
-              <a:t>Knowledge Cutoff</a:t>
+              <a:t>① 知识截止 (Knowledge Cutoff)</a:t>
             </a:r>
             <a:endParaRPr lang="en-US" sz="1200" dirty="0"/>
           </a:p>
@@ -4465,7 +4620,7 @@
                 <a:ea typeface="Calibri" pitchFamily="34" charset="-122"/>
                 <a:cs typeface="Calibri" pitchFamily="34" charset="-120"/>
               </a:rPr>
-              <a:t>训练数据截止后知识停止更新</a:t>
+              <a:t>学到的知识停在训练那天</a:t>
             </a:r>
             <a:endParaRPr lang="en-US" sz="1200" dirty="0"/>
           </a:p>
@@ -4482,7 +4637,7 @@
                 <a:ea typeface="Calibri" pitchFamily="34" charset="-122"/>
                 <a:cs typeface="Calibri" pitchFamily="34" charset="-120"/>
               </a:rPr>
-              <a:t>Hallucination</a:t>
+              <a:t>② 凭空编造 (Hallucination / 幻觉)</a:t>
             </a:r>
             <a:endParaRPr lang="en-US" sz="1200" dirty="0"/>
           </a:p>
@@ -4499,7 +4654,7 @@
                 <a:ea typeface="Calibri" pitchFamily="34" charset="-122"/>
                 <a:cs typeface="Calibri" pitchFamily="34" charset="-120"/>
               </a:rPr>
-              <a:t>模型可能自信地编造事实</a:t>
+              <a:t>用最自信的语气说最假的话</a:t>
             </a:r>
             <a:endParaRPr lang="en-US" sz="1200" dirty="0"/>
           </a:p>
@@ -4516,7 +4671,7 @@
                 <a:ea typeface="Calibri" pitchFamily="34" charset="-122"/>
                 <a:cs typeface="Calibri" pitchFamily="34" charset="-120"/>
               </a:rPr>
-              <a:t>No Private Data Access</a:t>
+              <a:t>③ 看不到你的数据</a:t>
             </a:r>
             <a:endParaRPr lang="en-US" sz="1200" dirty="0"/>
           </a:p>
@@ -4533,7 +4688,7 @@
                 <a:ea typeface="Calibri" pitchFamily="34" charset="-122"/>
                 <a:cs typeface="Calibri" pitchFamily="34" charset="-120"/>
               </a:rPr>
-              <a:t>企业内部知识模型无法获取</a:t>
+              <a:t>企业内部知识库模型一无所知</a:t>
             </a:r>
             <a:endParaRPr lang="en-US" sz="1200" dirty="0"/>
           </a:p>
@@ -4592,7 +4747,7 @@
                 <a:ea typeface="Calibri" pitchFamily="34" charset="-122"/>
                 <a:cs typeface="Calibri" pitchFamily="34" charset="-120"/>
               </a:rPr>
-              <a:t>BBC (2025): 51% of AI answers had significant issues  |  19% introduced factual errors  |  13% quotes altered or fabricated</a:t>
+              <a:t>📊 BBC 2025年大规模测试 → AI内容中 51% 存在严重问题 · 19% 引用错误 · 13% 引文编造</a:t>
             </a:r>
             <a:endParaRPr lang="en-US" sz="1000" dirty="0"/>
           </a:p>
@@ -4683,7 +4838,7 @@
                 <a:ea typeface="Arial" pitchFamily="34" charset="-122"/>
                 <a:cs typeface="Arial" pitchFamily="34" charset="-120"/>
               </a:rPr>
-              <a:t>一个典型场景：问答中的幻觉</a:t>
+              <a:t>明明在胡说，语气却那么坚定</a:t>
             </a:r>
             <a:endParaRPr lang="en-US" sz="2800" dirty="0"/>
           </a:p>
@@ -4691,53 +4846,14 @@
       </p:sp>
       <p:sp>
         <p:nvSpPr>
-          <p:cNvPr id="4" name="Text 2"/>
-          <p:cNvSpPr/>
-          <p:nvPr/>
-        </p:nvSpPr>
-        <p:spPr>
-          <a:xfrm>
-            <a:off x="548640" y="685800"/>
-            <a:ext cx="8046720" cy="320040"/>
-          </a:xfrm>
-          <a:prstGeom prst="rect">
-            <a:avLst/>
-          </a:prstGeom>
-          <a:noFill/>
-          <a:ln/>
-        </p:spPr>
-        <p:txBody>
-          <a:bodyPr wrap="square" lIns="0" tIns="0" rIns="0" bIns="0" rtlCol="0" anchor="ctr"/>
-          <a:lstStyle/>
-          <a:p>
-            <a:pPr indent="0" marL="0">
-              <a:buNone/>
-            </a:pPr>
-            <a:r>
-              <a:rPr lang="en-US" sz="1400" dirty="0">
-                <a:solidFill>
-                  <a:srgbClr val="475569"/>
-                </a:solidFill>
-                <a:latin typeface="Calibri" pitchFamily="34" charset="0"/>
-                <a:ea typeface="Calibri" pitchFamily="34" charset="-122"/>
-                <a:cs typeface="Calibri" pitchFamily="34" charset="-120"/>
-              </a:rPr>
-              <a:t>LLM的本质是语言模型，不是知识库</a:t>
-            </a:r>
-            <a:endParaRPr lang="en-US" sz="1400" dirty="0"/>
-          </a:p>
-        </p:txBody>
-      </p:sp>
-      <p:sp>
-        <p:nvSpPr>
-          <p:cNvPr id="5" name="Shape 3"/>
+          <p:cNvPr id="4" name="Shape 2"/>
           <p:cNvSpPr/>
           <p:nvPr/>
         </p:nvSpPr>
         <p:spPr>
           <a:xfrm>
             <a:off x="457200" y="1188720"/>
-            <a:ext cx="4389120" cy="3474720"/>
+            <a:ext cx="4206240" cy="3291840"/>
           </a:xfrm>
           <a:prstGeom prst="rect">
             <a:avLst/>
@@ -4757,14 +4873,14 @@
       </p:sp>
       <p:sp>
         <p:nvSpPr>
-          <p:cNvPr id="6" name="Shape 4"/>
+          <p:cNvPr id="5" name="Shape 3"/>
           <p:cNvSpPr/>
           <p:nvPr/>
         </p:nvSpPr>
         <p:spPr>
           <a:xfrm>
             <a:off x="457200" y="1188720"/>
-            <a:ext cx="54864" cy="3474720"/>
+            <a:ext cx="4206240" cy="54864"/>
           </a:xfrm>
           <a:prstGeom prst="rect">
             <a:avLst/>
@@ -4777,13 +4893,13 @@
       </p:sp>
       <p:sp>
         <p:nvSpPr>
-          <p:cNvPr id="7" name="Text 5"/>
-          <p:cNvSpPr/>
-          <p:nvPr/>
-        </p:nvSpPr>
-        <p:spPr>
-          <a:xfrm>
-            <a:off x="731520" y="1325880"/>
+          <p:cNvPr id="6" name="Text 4"/>
+          <p:cNvSpPr/>
+          <p:nvPr/>
+        </p:nvSpPr>
+        <p:spPr>
+          <a:xfrm>
+            <a:off x="640080" y="1371600"/>
             <a:ext cx="2743200" cy="320040"/>
           </a:xfrm>
           <a:prstGeom prst="rect">
@@ -4808,7 +4924,7 @@
                 <a:ea typeface="Arial" pitchFamily="34" charset="-122"/>
                 <a:cs typeface="Arial" pitchFamily="34" charset="-120"/>
               </a:rPr>
-              <a:t>典型案例</a:t>
+              <a:t>实测演示</a:t>
             </a:r>
             <a:endParaRPr lang="en-US" sz="1400" dirty="0"/>
           </a:p>
@@ -4816,14 +4932,14 @@
       </p:sp>
       <p:sp>
         <p:nvSpPr>
-          <p:cNvPr id="8" name="Shape 6"/>
+          <p:cNvPr id="7" name="Shape 5"/>
           <p:cNvSpPr/>
           <p:nvPr/>
         </p:nvSpPr>
         <p:spPr>
           <a:xfrm>
             <a:off x="685800" y="1783080"/>
-            <a:ext cx="3749040" cy="2560320"/>
+            <a:ext cx="3749040" cy="2468880"/>
           </a:xfrm>
           <a:prstGeom prst="rect">
             <a:avLst/>
@@ -4836,14 +4952,14 @@
       </p:sp>
       <p:sp>
         <p:nvSpPr>
-          <p:cNvPr id="9" name="Text 7"/>
-          <p:cNvSpPr/>
-          <p:nvPr/>
-        </p:nvSpPr>
-        <p:spPr>
-          <a:xfrm>
-            <a:off x="822960" y="1783080"/>
-            <a:ext cx="3474720" cy="2377440"/>
+          <p:cNvPr id="8" name="Text 6"/>
+          <p:cNvSpPr/>
+          <p:nvPr/>
+        </p:nvSpPr>
+        <p:spPr>
+          <a:xfrm>
+            <a:off x="822960" y="1874520"/>
+            <a:ext cx="3474720" cy="2286000"/>
           </a:xfrm>
           <a:prstGeom prst="rect">
             <a:avLst/>
@@ -4867,7 +4983,7 @@
                 <a:ea typeface="Consolas" pitchFamily="34" charset="-122"/>
                 <a:cs typeface="Consolas" pitchFamily="34" charset="-120"/>
               </a:rPr>
-              <a:t>Q: </a:t>
+              <a:t>问：</a:t>
             </a:r>
             <a:pPr indent="0" marL="0">
               <a:buNone/>
@@ -4881,7 +4997,7 @@
                 <a:ea typeface="Consolas" pitchFamily="34" charset="-122"/>
                 <a:cs typeface="Consolas" pitchFamily="34" charset="-120"/>
               </a:rPr>
-              <a:t>"What major AI products did AsiaInfo Technologies launch in 2025?"</a:t>
+              <a:t>"亚信科技2025年发布了什么AI产品？"</a:t>
             </a:r>
             <a:endParaRPr lang="en-US" sz="1000" dirty="0"/>
           </a:p>
@@ -4904,7 +5020,7 @@
                 <a:ea typeface="Consolas" pitchFamily="34" charset="-122"/>
                 <a:cs typeface="Consolas" pitchFamily="34" charset="-120"/>
               </a:rPr>
-              <a:t>LLM: </a:t>
+              <a:t>AI答：</a:t>
             </a:r>
             <a:endParaRPr lang="en-US" sz="1000" dirty="0"/>
           </a:p>
@@ -4921,7 +5037,7 @@
                 <a:ea typeface="Consolas" pitchFamily="34" charset="-122"/>
                 <a:cs typeface="Consolas" pitchFamily="34" charset="-120"/>
               </a:rPr>
-              <a:t>AsiaInfo Technologies launched the AISWare AI</a:t>
+              <a:t>"亚信科技在2025年推出了AISWare AI</a:t>
             </a:r>
             <a:endParaRPr lang="en-US" sz="1000" dirty="0"/>
           </a:p>
@@ -4938,7 +5054,7 @@
                 <a:ea typeface="Consolas" pitchFamily="34" charset="-122"/>
                 <a:cs typeface="Consolas" pitchFamily="34" charset="-120"/>
               </a:rPr>
-              <a:t>Platform in 2025..."</a:t>
+              <a:t>平台，基于深度学习实现..."</a:t>
             </a:r>
             <a:endParaRPr lang="en-US" sz="1000" dirty="0"/>
           </a:p>
@@ -4961,7 +5077,7 @@
                 <a:ea typeface="Consolas" pitchFamily="34" charset="-122"/>
                 <a:cs typeface="Consolas" pitchFamily="34" charset="-120"/>
               </a:rPr>
-              <a:t>⚠️ But this may be fabricated — no such product exists</a:t>
+              <a:t>⚠️ 但实际上这个产品根本不存在</a:t>
             </a:r>
             <a:endParaRPr lang="en-US" sz="1000" dirty="0"/>
           </a:p>
@@ -4969,14 +5085,14 @@
       </p:sp>
       <p:sp>
         <p:nvSpPr>
-          <p:cNvPr id="10" name="Shape 8"/>
-          <p:cNvSpPr/>
-          <p:nvPr/>
-        </p:nvSpPr>
-        <p:spPr>
-          <a:xfrm>
-            <a:off x="5120640" y="1188720"/>
-            <a:ext cx="3566160" cy="3474720"/>
+          <p:cNvPr id="9" name="Shape 7"/>
+          <p:cNvSpPr/>
+          <p:nvPr/>
+        </p:nvSpPr>
+        <p:spPr>
+          <a:xfrm>
+            <a:off x="4937760" y="1188720"/>
+            <a:ext cx="3749040" cy="3291840"/>
           </a:xfrm>
           <a:prstGeom prst="rect">
             <a:avLst/>
@@ -4996,14 +5112,14 @@
       </p:sp>
       <p:sp>
         <p:nvSpPr>
-          <p:cNvPr id="11" name="Shape 9"/>
-          <p:cNvSpPr/>
-          <p:nvPr/>
-        </p:nvSpPr>
-        <p:spPr>
-          <a:xfrm>
-            <a:off x="5120640" y="1188720"/>
-            <a:ext cx="54864" cy="3474720"/>
+          <p:cNvPr id="10" name="Shape 8"/>
+          <p:cNvSpPr/>
+          <p:nvPr/>
+        </p:nvSpPr>
+        <p:spPr>
+          <a:xfrm>
+            <a:off x="4937760" y="1188720"/>
+            <a:ext cx="54864" cy="3291840"/>
           </a:xfrm>
           <a:prstGeom prst="rect">
             <a:avLst/>
@@ -5016,13 +5132,13 @@
       </p:sp>
       <p:sp>
         <p:nvSpPr>
-          <p:cNvPr id="12" name="Text 10"/>
-          <p:cNvSpPr/>
-          <p:nvPr/>
-        </p:nvSpPr>
-        <p:spPr>
-          <a:xfrm>
-            <a:off x="5394960" y="1325880"/>
+          <p:cNvPr id="11" name="Text 9"/>
+          <p:cNvSpPr/>
+          <p:nvPr/>
+        </p:nvSpPr>
+        <p:spPr>
+          <a:xfrm>
+            <a:off x="5212080" y="1371600"/>
             <a:ext cx="2743200" cy="320040"/>
           </a:xfrm>
           <a:prstGeom prst="rect">
@@ -5055,14 +5171,14 @@
       </p:sp>
       <p:sp>
         <p:nvSpPr>
-          <p:cNvPr id="13" name="Text 11"/>
-          <p:cNvSpPr/>
-          <p:nvPr/>
-        </p:nvSpPr>
-        <p:spPr>
-          <a:xfrm>
-            <a:off x="5394960" y="1783080"/>
-            <a:ext cx="3017520" cy="2560320"/>
+          <p:cNvPr id="12" name="Text 10"/>
+          <p:cNvSpPr/>
+          <p:nvPr/>
+        </p:nvSpPr>
+        <p:spPr>
+          <a:xfrm>
+            <a:off x="5212080" y="1783080"/>
+            <a:ext cx="3200400" cy="2468880"/>
           </a:xfrm>
           <a:prstGeom prst="rect">
             <a:avLst/>
@@ -5078,7 +5194,7 @@
               <a:buNone/>
             </a:pPr>
             <a:r>
-              <a:rPr lang="en-US" sz="1200" b="1" dirty="0">
+              <a:rPr lang="en-US" sz="1300" dirty="0">
                 <a:solidFill>
                   <a:srgbClr val="1E293B"/>
                 </a:solidFill>
@@ -5086,55 +5202,72 @@
                 <a:ea typeface="Calibri" pitchFamily="34" charset="-122"/>
                 <a:cs typeface="Calibri" pitchFamily="34" charset="-120"/>
               </a:rPr>
-              <a:t>LLMs are next-token prediction models</a:t>
-            </a:r>
-            <a:endParaRPr lang="en-US" sz="1200" dirty="0"/>
+              <a:t>大模型本质上是个</a:t>
+            </a:r>
+            <a:endParaRPr lang="en-US" sz="1300" dirty="0"/>
           </a:p>
           <a:p>
             <a:pPr indent="0" marL="0">
               <a:buNone/>
             </a:pPr>
             <a:r>
-              <a:rPr lang="en-US" sz="900" i="1" dirty="0">
-                <a:solidFill>
-                  <a:srgbClr val="475569"/>
+              <a:rPr lang="en-US" sz="1600" b="1" dirty="0">
+                <a:solidFill>
+                  <a:srgbClr val="2563EB"/>
+                </a:solidFill>
+                <a:latin typeface="Arial" pitchFamily="34" charset="0"/>
+                <a:ea typeface="Arial" pitchFamily="34" charset="-122"/>
+                <a:cs typeface="Arial" pitchFamily="34" charset="-120"/>
+              </a:rPr>
+              <a:t>"猜词游戏"</a:t>
+            </a:r>
+            <a:endParaRPr lang="en-US" sz="1300" dirty="0"/>
+          </a:p>
+          <a:p>
+            <a:pPr indent="0" marL="0">
+              <a:buNone/>
+            </a:pPr>
+            <a:endParaRPr lang="en-US" sz="1300" dirty="0"/>
+          </a:p>
+          <a:p>
+            <a:pPr indent="0" marL="0">
+              <a:buNone/>
+            </a:pPr>
+            <a:r>
+              <a:rPr lang="en-US" sz="1200" dirty="0">
+                <a:solidFill>
+                  <a:srgbClr val="1E293B"/>
                 </a:solidFill>
                 <a:latin typeface="Calibri" pitchFamily="34" charset="0"/>
                 <a:ea typeface="Calibri" pitchFamily="34" charset="-122"/>
                 <a:cs typeface="Calibri" pitchFamily="34" charset="-120"/>
               </a:rPr>
-              <a:t>Bengio et al., 2003; Brown et al., 2020</a:t>
-            </a:r>
-            <a:endParaRPr lang="en-US" sz="1200" dirty="0"/>
+              <a:t>根据上文预测下一个最可能的词</a:t>
+            </a:r>
+            <a:endParaRPr lang="en-US" sz="1300" dirty="0"/>
           </a:p>
           <a:p>
             <a:pPr indent="0" marL="0">
               <a:buNone/>
             </a:pPr>
-            <a:endParaRPr lang="en-US" sz="1200" dirty="0"/>
-          </a:p>
-          <a:p>
-            <a:pPr indent="0" marL="0">
-              <a:buNone/>
-            </a:pPr>
-            <a:r>
-              <a:rPr lang="en-US" sz="1200" b="1" dirty="0">
-                <a:solidFill>
-                  <a:srgbClr val="2563EB"/>
+            <a:r>
+              <a:rPr lang="en-US" sz="1100" dirty="0">
+                <a:solidFill>
+                  <a:srgbClr val="475569"/>
                 </a:solidFill>
                 <a:latin typeface="Calibri" pitchFamily="34" charset="0"/>
                 <a:ea typeface="Calibri" pitchFamily="34" charset="-122"/>
                 <a:cs typeface="Calibri" pitchFamily="34" charset="-120"/>
               </a:rPr>
-              <a:t>Not fact-retrieval databases</a:t>
-            </a:r>
-            <a:endParaRPr lang="en-US" sz="1200" dirty="0"/>
+              <a:t>（Next-token Prediction）</a:t>
+            </a:r>
+            <a:endParaRPr lang="en-US" sz="1300" dirty="0"/>
           </a:p>
           <a:p>
             <a:pPr indent="0" marL="0">
               <a:buNone/>
             </a:pPr>
-            <a:endParaRPr lang="en-US" sz="1200" dirty="0"/>
+            <a:endParaRPr lang="en-US" sz="1300" dirty="0"/>
           </a:p>
           <a:p>
             <a:pPr indent="0" marL="0">
@@ -5149,9 +5282,9 @@
                 <a:ea typeface="Calibri" pitchFamily="34" charset="-122"/>
                 <a:cs typeface="Calibri" pitchFamily="34" charset="-120"/>
               </a:rPr>
-              <a:t>Knowledge boundary is fuzzy</a:t>
-            </a:r>
-            <a:endParaRPr lang="en-US" sz="1200" dirty="0"/>
+              <a:t>它不是数据库查事实</a:t>
+            </a:r>
+            <a:endParaRPr lang="en-US" sz="1300" dirty="0"/>
           </a:p>
           <a:p>
             <a:pPr indent="0" marL="0">
@@ -5166,38 +5299,22 @@
                 <a:ea typeface="Calibri" pitchFamily="34" charset="-122"/>
                 <a:cs typeface="Calibri" pitchFamily="34" charset="-120"/>
               </a:rPr>
-              <a:t>→ Hallucination is inherent</a:t>
-            </a:r>
-            <a:endParaRPr lang="en-US" sz="1200" dirty="0"/>
-          </a:p>
-        </p:txBody>
-      </p:sp>
-      <p:sp>
-        <p:nvSpPr>
-          <p:cNvPr id="14" name="Text 12"/>
-          <p:cNvSpPr/>
-          <p:nvPr/>
-        </p:nvSpPr>
-        <p:spPr>
-          <a:xfrm>
-            <a:off x="548640" y="4572000"/>
-            <a:ext cx="8046720" cy="320040"/>
-          </a:xfrm>
-          <a:prstGeom prst="rect">
-            <a:avLst/>
-          </a:prstGeom>
-          <a:noFill/>
-          <a:ln/>
-        </p:spPr>
-        <p:txBody>
-          <a:bodyPr wrap="square" lIns="0" tIns="0" rIns="0" bIns="0" rtlCol="0" anchor="ctr"/>
-          <a:lstStyle/>
+              <a:t>→ 幻觉是基因里带的，不是bug</a:t>
+            </a:r>
+            <a:endParaRPr lang="en-US" sz="1300" dirty="0"/>
+          </a:p>
           <a:p>
             <a:pPr indent="0" marL="0">
               <a:buNone/>
             </a:pPr>
-            <a:r>
-              <a:rPr lang="en-US" sz="800" i="1" dirty="0">
+            <a:endParaRPr lang="en-US" sz="1300" dirty="0"/>
+          </a:p>
+          <a:p>
+            <a:pPr indent="0" marL="0">
+              <a:buNone/>
+            </a:pPr>
+            <a:r>
+              <a:rPr lang="en-US" sz="900" i="1" dirty="0">
                 <a:solidFill>
                   <a:srgbClr val="475569"/>
                 </a:solidFill>
@@ -5205,9 +5322,9 @@
                 <a:ea typeface="Calibri" pitchFamily="34" charset="-122"/>
                 <a:cs typeface="Calibri" pitchFamily="34" charset="-120"/>
               </a:rPr>
-              <a:t>Ref: Brown et al. (2020). "Language Models are Few-Shot Learners." NeurIPS 2020.</a:t>
-            </a:r>
-            <a:endParaRPr lang="en-US" sz="800" dirty="0"/>
+              <a:t>Brown et al., 2020</a:t>
+            </a:r>
+            <a:endParaRPr lang="en-US" sz="1300" dirty="0"/>
           </a:p>
         </p:txBody>
       </p:sp>
@@ -5296,7 +5413,7 @@
                 <a:ea typeface="Arial" pitchFamily="34" charset="-122"/>
                 <a:cs typeface="Arial" pitchFamily="34" charset="-120"/>
               </a:rPr>
-              <a:t>RAG：检索增强生成的解决思路</a:t>
+              <a:t>RAG的思路很简单——别让它裸考</a:t>
             </a:r>
             <a:endParaRPr lang="en-US" sz="2800" dirty="0"/>
           </a:p>
@@ -5335,7 +5452,7 @@
                 <a:ea typeface="Calibri" pitchFamily="34" charset="-122"/>
                 <a:cs typeface="Calibri" pitchFamily="34" charset="-120"/>
               </a:rPr>
-              <a:t>RAG = Retrieval + Generation</a:t>
+              <a:t>Retrieval-Augmented Generation · 检索增强生成</a:t>
             </a:r>
             <a:endParaRPr lang="en-US" sz="1400" dirty="0"/>
           </a:p>
@@ -5433,7 +5550,7 @@
               <a:buNone/>
             </a:pPr>
             <a:r>
-              <a:rPr lang="en-US" sz="2200" b="1" dirty="0">
+              <a:rPr lang="en-US" sz="2400" b="1" dirty="0">
                 <a:solidFill>
                   <a:srgbClr val="FFFFFF"/>
                 </a:solidFill>
@@ -5443,7 +5560,7 @@
               </a:rPr>
               <a:t>1</a:t>
             </a:r>
-            <a:endParaRPr lang="en-US" sz="2200" dirty="0"/>
+            <a:endParaRPr lang="en-US" sz="2400" dirty="0"/>
           </a:p>
         </p:txBody>
       </p:sp>
@@ -5472,7 +5589,7 @@
               <a:buNone/>
             </a:pPr>
             <a:r>
-              <a:rPr lang="en-US" sz="1800" b="1" dirty="0">
+              <a:rPr lang="en-US" sz="2000" b="1" dirty="0">
                 <a:solidFill>
                   <a:srgbClr val="2563EB"/>
                 </a:solidFill>
@@ -5480,9 +5597,9 @@
                 <a:ea typeface="Arial" pitchFamily="34" charset="-122"/>
                 <a:cs typeface="Arial" pitchFamily="34" charset="-120"/>
               </a:rPr>
-              <a:t>Retrieve</a:t>
-            </a:r>
-            <a:endParaRPr lang="en-US" sz="1800" dirty="0"/>
+              <a:t>检索</a:t>
+            </a:r>
+            <a:endParaRPr lang="en-US" sz="2000" dirty="0"/>
           </a:p>
         </p:txBody>
       </p:sp>
@@ -5494,8 +5611,8 @@
         </p:nvSpPr>
         <p:spPr>
           <a:xfrm>
-            <a:off x="822960" y="2834640"/>
-            <a:ext cx="2011680" cy="1097280"/>
+            <a:off x="822960" y="2743200"/>
+            <a:ext cx="2011680" cy="1828800"/>
           </a:xfrm>
           <a:prstGeom prst="rect">
             <a:avLst/>
@@ -5511,7 +5628,7 @@
               <a:buNone/>
             </a:pPr>
             <a:r>
-              <a:rPr lang="en-US" sz="1200" dirty="0">
+              <a:rPr lang="en-US" sz="1100" dirty="0">
                 <a:solidFill>
                   <a:srgbClr val="1E293B"/>
                 </a:solidFill>
@@ -5519,16 +5636,16 @@
                 <a:ea typeface="Calibri" pitchFamily="34" charset="-122"/>
                 <a:cs typeface="Calibri" pitchFamily="34" charset="-120"/>
               </a:rPr>
-              <a:t>从知识库检索</a:t>
-            </a:r>
-            <a:endParaRPr lang="en-US" sz="1200" dirty="0"/>
+              <a:t>Retrieve</a:t>
+            </a:r>
+            <a:endParaRPr lang="en-US" sz="1100" dirty="0"/>
           </a:p>
           <a:p>
             <a:pPr algn="ctr" indent="0" marL="0">
               <a:buNone/>
             </a:pPr>
             <a:r>
-              <a:rPr lang="en-US" sz="1200" dirty="0">
+              <a:rPr lang="en-US" sz="1100" dirty="0">
                 <a:solidFill>
                   <a:srgbClr val="1E293B"/>
                 </a:solidFill>
@@ -5536,9 +5653,26 @@
                 <a:ea typeface="Calibri" pitchFamily="34" charset="-122"/>
                 <a:cs typeface="Calibri" pitchFamily="34" charset="-120"/>
               </a:rPr>
+              <a:t>从知识库找出</a:t>
+            </a:r>
+            <a:endParaRPr lang="en-US" sz="1100" dirty="0"/>
+          </a:p>
+          <a:p>
+            <a:pPr algn="ctr" indent="0" marL="0">
+              <a:buNone/>
+            </a:pPr>
+            <a:r>
+              <a:rPr lang="en-US" sz="1100" dirty="0">
+                <a:solidFill>
+                  <a:srgbClr val="1E293B"/>
+                </a:solidFill>
+                <a:latin typeface="Calibri" pitchFamily="34" charset="0"/>
+                <a:ea typeface="Calibri" pitchFamily="34" charset="-122"/>
+                <a:cs typeface="Calibri" pitchFamily="34" charset="-120"/>
+              </a:rPr>
               <a:t>相关文档片段</a:t>
             </a:r>
-            <a:endParaRPr lang="en-US" sz="1200" dirty="0"/>
+            <a:endParaRPr lang="en-US" sz="1100" dirty="0"/>
           </a:p>
         </p:txBody>
       </p:sp>
@@ -5634,7 +5768,7 @@
               <a:buNone/>
             </a:pPr>
             <a:r>
-              <a:rPr lang="en-US" sz="2200" b="1" dirty="0">
+              <a:rPr lang="en-US" sz="2400" b="1" dirty="0">
                 <a:solidFill>
                   <a:srgbClr val="FFFFFF"/>
                 </a:solidFill>
@@ -5644,7 +5778,7 @@
               </a:rPr>
               <a:t>2</a:t>
             </a:r>
-            <a:endParaRPr lang="en-US" sz="2200" dirty="0"/>
+            <a:endParaRPr lang="en-US" sz="2400" dirty="0"/>
           </a:p>
         </p:txBody>
       </p:sp>
@@ -5673,7 +5807,7 @@
               <a:buNone/>
             </a:pPr>
             <a:r>
-              <a:rPr lang="en-US" sz="1800" b="1" dirty="0">
+              <a:rPr lang="en-US" sz="2000" b="1" dirty="0">
                 <a:solidFill>
                   <a:srgbClr val="8B5CF6"/>
                 </a:solidFill>
@@ -5681,9 +5815,9 @@
                 <a:ea typeface="Arial" pitchFamily="34" charset="-122"/>
                 <a:cs typeface="Arial" pitchFamily="34" charset="-120"/>
               </a:rPr>
-              <a:t>Augment</a:t>
-            </a:r>
-            <a:endParaRPr lang="en-US" sz="1800" dirty="0"/>
+              <a:t>注入</a:t>
+            </a:r>
+            <a:endParaRPr lang="en-US" sz="2000" dirty="0"/>
           </a:p>
         </p:txBody>
       </p:sp>
@@ -5695,8 +5829,8 @@
         </p:nvSpPr>
         <p:spPr>
           <a:xfrm>
-            <a:off x="3703320" y="2834640"/>
-            <a:ext cx="2011680" cy="1097280"/>
+            <a:off x="3703320" y="2743200"/>
+            <a:ext cx="2011680" cy="1828800"/>
           </a:xfrm>
           <a:prstGeom prst="rect">
             <a:avLst/>
@@ -5712,7 +5846,7 @@
               <a:buNone/>
             </a:pPr>
             <a:r>
-              <a:rPr lang="en-US" sz="1200" dirty="0">
+              <a:rPr lang="en-US" sz="1100" dirty="0">
                 <a:solidFill>
                   <a:srgbClr val="1E293B"/>
                 </a:solidFill>
@@ -5720,16 +5854,16 @@
                 <a:ea typeface="Calibri" pitchFamily="34" charset="-122"/>
                 <a:cs typeface="Calibri" pitchFamily="34" charset="-120"/>
               </a:rPr>
-              <a:t>将检索结果注入</a:t>
-            </a:r>
-            <a:endParaRPr lang="en-US" sz="1200" dirty="0"/>
+              <a:t>Augment</a:t>
+            </a:r>
+            <a:endParaRPr lang="en-US" sz="1100" dirty="0"/>
           </a:p>
           <a:p>
             <a:pPr algn="ctr" indent="0" marL="0">
               <a:buNone/>
             </a:pPr>
             <a:r>
-              <a:rPr lang="en-US" sz="1200" dirty="0">
+              <a:rPr lang="en-US" sz="1100" dirty="0">
                 <a:solidFill>
                   <a:srgbClr val="1E293B"/>
                 </a:solidFill>
@@ -5737,9 +5871,26 @@
                 <a:ea typeface="Calibri" pitchFamily="34" charset="-122"/>
                 <a:cs typeface="Calibri" pitchFamily="34" charset="-120"/>
               </a:rPr>
-              <a:t>Prompt上下文</a:t>
-            </a:r>
-            <a:endParaRPr lang="en-US" sz="1200" dirty="0"/>
+              <a:t>检索结果</a:t>
+            </a:r>
+            <a:endParaRPr lang="en-US" sz="1100" dirty="0"/>
+          </a:p>
+          <a:p>
+            <a:pPr algn="ctr" indent="0" marL="0">
+              <a:buNone/>
+            </a:pPr>
+            <a:r>
+              <a:rPr lang="en-US" sz="1100" dirty="0">
+                <a:solidFill>
+                  <a:srgbClr val="1E293B"/>
+                </a:solidFill>
+                <a:latin typeface="Calibri" pitchFamily="34" charset="0"/>
+                <a:ea typeface="Calibri" pitchFamily="34" charset="-122"/>
+                <a:cs typeface="Calibri" pitchFamily="34" charset="-120"/>
+              </a:rPr>
+              <a:t>注入提示词</a:t>
+            </a:r>
+            <a:endParaRPr lang="en-US" sz="1100" dirty="0"/>
           </a:p>
         </p:txBody>
       </p:sp>
@@ -5835,7 +5986,7 @@
               <a:buNone/>
             </a:pPr>
             <a:r>
-              <a:rPr lang="en-US" sz="2200" b="1" dirty="0">
+              <a:rPr lang="en-US" sz="2400" b="1" dirty="0">
                 <a:solidFill>
                   <a:srgbClr val="FFFFFF"/>
                 </a:solidFill>
@@ -5845,7 +5996,7 @@
               </a:rPr>
               <a:t>3</a:t>
             </a:r>
-            <a:endParaRPr lang="en-US" sz="2200" dirty="0"/>
+            <a:endParaRPr lang="en-US" sz="2400" dirty="0"/>
           </a:p>
         </p:txBody>
       </p:sp>
@@ -5874,7 +6025,7 @@
               <a:buNone/>
             </a:pPr>
             <a:r>
-              <a:rPr lang="en-US" sz="1800" b="1" dirty="0">
+              <a:rPr lang="en-US" sz="2000" b="1" dirty="0">
                 <a:solidFill>
                   <a:srgbClr val="10B981"/>
                 </a:solidFill>
@@ -5882,9 +6033,9 @@
                 <a:ea typeface="Arial" pitchFamily="34" charset="-122"/>
                 <a:cs typeface="Arial" pitchFamily="34" charset="-120"/>
               </a:rPr>
-              <a:t>Generate</a:t>
-            </a:r>
-            <a:endParaRPr lang="en-US" sz="1800" dirty="0"/>
+              <a:t>生成</a:t>
+            </a:r>
+            <a:endParaRPr lang="en-US" sz="2000" dirty="0"/>
           </a:p>
         </p:txBody>
       </p:sp>
@@ -5896,8 +6047,8 @@
         </p:nvSpPr>
         <p:spPr>
           <a:xfrm>
-            <a:off x="6583680" y="2834640"/>
-            <a:ext cx="2011680" cy="1097280"/>
+            <a:off x="6583680" y="2743200"/>
+            <a:ext cx="2011680" cy="1828800"/>
           </a:xfrm>
           <a:prstGeom prst="rect">
             <a:avLst/>
@@ -5913,7 +6064,7 @@
               <a:buNone/>
             </a:pPr>
             <a:r>
-              <a:rPr lang="en-US" sz="1200" dirty="0">
+              <a:rPr lang="en-US" sz="1100" dirty="0">
                 <a:solidFill>
                   <a:srgbClr val="1E293B"/>
                 </a:solidFill>
@@ -5921,16 +6072,16 @@
                 <a:ea typeface="Calibri" pitchFamily="34" charset="-122"/>
                 <a:cs typeface="Calibri" pitchFamily="34" charset="-120"/>
               </a:rPr>
-              <a:t>LLM基于检索内容</a:t>
-            </a:r>
-            <a:endParaRPr lang="en-US" sz="1200" dirty="0"/>
+              <a:t>Generate</a:t>
+            </a:r>
+            <a:endParaRPr lang="en-US" sz="1100" dirty="0"/>
           </a:p>
           <a:p>
             <a:pPr algn="ctr" indent="0" marL="0">
               <a:buNone/>
             </a:pPr>
             <a:r>
-              <a:rPr lang="en-US" sz="1200" dirty="0">
+              <a:rPr lang="en-US" sz="1100" dirty="0">
                 <a:solidFill>
                   <a:srgbClr val="1E293B"/>
                 </a:solidFill>
@@ -5938,68 +6089,59 @@
                 <a:ea typeface="Calibri" pitchFamily="34" charset="-122"/>
                 <a:cs typeface="Calibri" pitchFamily="34" charset="-120"/>
               </a:rPr>
-              <a:t>生成可靠回答</a:t>
-            </a:r>
-            <a:endParaRPr lang="en-US" sz="1200" dirty="0"/>
-          </a:p>
-        </p:txBody>
-      </p:sp>
-      <p:sp>
-        <p:nvSpPr>
-          <p:cNvPr id="23" name="Shape 21"/>
-          <p:cNvSpPr/>
-          <p:nvPr/>
-        </p:nvSpPr>
-        <p:spPr>
-          <a:xfrm>
-            <a:off x="3200400" y="2743200"/>
-            <a:ext cx="228600" cy="0"/>
-          </a:xfrm>
-          <a:prstGeom prst="line">
-            <a:avLst/>
-          </a:prstGeom>
-          <a:noFill/>
-          <a:ln w="25400">
-            <a:solidFill>
-              <a:srgbClr val="475569"/>
-            </a:solidFill>
-            <a:prstDash val="solid"/>
-          </a:ln>
-        </p:spPr>
-      </p:sp>
-      <p:sp>
-        <p:nvSpPr>
-          <p:cNvPr id="24" name="Text 22"/>
-          <p:cNvSpPr/>
-          <p:nvPr/>
-        </p:nvSpPr>
-        <p:spPr>
-          <a:xfrm>
-            <a:off x="3383280" y="2468880"/>
-            <a:ext cx="274320" cy="365760"/>
-          </a:xfrm>
-          <a:prstGeom prst="rect">
-            <a:avLst/>
-          </a:prstGeom>
-          <a:noFill/>
-          <a:ln/>
-        </p:spPr>
-        <p:txBody>
-          <a:bodyPr wrap="square" rtlCol="0" anchor="ctr"/>
-          <a:lstStyle/>
+              <a:t>LLM基于材料</a:t>
+            </a:r>
+            <a:endParaRPr lang="en-US" sz="1100" dirty="0"/>
+          </a:p>
           <a:p>
             <a:pPr algn="ctr" indent="0" marL="0">
               <a:buNone/>
             </a:pPr>
             <a:r>
-              <a:rPr lang="en-US" sz="1600" dirty="0">
-                <a:solidFill>
-                  <a:srgbClr val="475569"/>
+              <a:rPr lang="en-US" sz="1100" dirty="0">
+                <a:solidFill>
+                  <a:srgbClr val="1E293B"/>
                 </a:solidFill>
                 <a:latin typeface="Calibri" pitchFamily="34" charset="0"/>
                 <a:ea typeface="Calibri" pitchFamily="34" charset="-122"/>
                 <a:cs typeface="Calibri" pitchFamily="34" charset="-120"/>
               </a:rPr>
+              <a:t>给出回答</a:t>
+            </a:r>
+            <a:endParaRPr lang="en-US" sz="1100" dirty="0"/>
+          </a:p>
+        </p:txBody>
+      </p:sp>
+      <p:sp>
+        <p:nvSpPr>
+          <p:cNvPr id="23" name="Text 21"/>
+          <p:cNvSpPr/>
+          <p:nvPr/>
+        </p:nvSpPr>
+        <p:spPr>
+          <a:xfrm>
+            <a:off x="3200400" y="2651760"/>
+            <a:ext cx="274320" cy="365760"/>
+          </a:xfrm>
+          <a:prstGeom prst="rect">
+            <a:avLst/>
+          </a:prstGeom>
+          <a:noFill/>
+          <a:ln/>
+        </p:spPr>
+        <p:txBody>
+          <a:bodyPr wrap="square" rtlCol="0" anchor="ctr"/>
+          <a:lstStyle/>
+          <a:p>
+            <a:pPr algn="ctr" indent="0" marL="0">
+              <a:buNone/>
+            </a:pPr>
+            <a:r>
+              <a:rPr lang="en-US" sz="1600" dirty="0">
+                <a:solidFill>
+                  <a:srgbClr val="475569"/>
+                </a:solidFill>
+              </a:rPr>
               <a:t>→</a:t>
             </a:r>
             <a:endParaRPr lang="en-US" sz="1600" dirty="0"/>
@@ -6008,36 +6150,13 @@
       </p:sp>
       <p:sp>
         <p:nvSpPr>
-          <p:cNvPr id="25" name="Shape 23"/>
-          <p:cNvSpPr/>
-          <p:nvPr/>
-        </p:nvSpPr>
-        <p:spPr>
-          <a:xfrm>
-            <a:off x="6080760" y="2743200"/>
-            <a:ext cx="228600" cy="0"/>
-          </a:xfrm>
-          <a:prstGeom prst="line">
-            <a:avLst/>
-          </a:prstGeom>
-          <a:noFill/>
-          <a:ln w="25400">
-            <a:solidFill>
-              <a:srgbClr val="475569"/>
-            </a:solidFill>
-            <a:prstDash val="solid"/>
-          </a:ln>
-        </p:spPr>
-      </p:sp>
-      <p:sp>
-        <p:nvSpPr>
-          <p:cNvPr id="26" name="Text 24"/>
-          <p:cNvSpPr/>
-          <p:nvPr/>
-        </p:nvSpPr>
-        <p:spPr>
-          <a:xfrm>
-            <a:off x="6263640" y="2468880"/>
+          <p:cNvPr id="24" name="Text 22"/>
+          <p:cNvSpPr/>
+          <p:nvPr/>
+        </p:nvSpPr>
+        <p:spPr>
+          <a:xfrm>
+            <a:off x="6080760" y="2651760"/>
             <a:ext cx="274320" cy="365760"/>
           </a:xfrm>
           <a:prstGeom prst="rect">
@@ -6055,6 +6174,42 @@
             </a:pPr>
             <a:r>
               <a:rPr lang="en-US" sz="1600" dirty="0">
+                <a:solidFill>
+                  <a:srgbClr val="475569"/>
+                </a:solidFill>
+              </a:rPr>
+              <a:t>→</a:t>
+            </a:r>
+            <a:endParaRPr lang="en-US" sz="1600" dirty="0"/>
+          </a:p>
+        </p:txBody>
+      </p:sp>
+      <p:sp>
+        <p:nvSpPr>
+          <p:cNvPr id="25" name="Text 23"/>
+          <p:cNvSpPr/>
+          <p:nvPr/>
+        </p:nvSpPr>
+        <p:spPr>
+          <a:xfrm>
+            <a:off x="548640" y="4480560"/>
+            <a:ext cx="8046720" cy="274320"/>
+          </a:xfrm>
+          <a:prstGeom prst="rect">
+            <a:avLst/>
+          </a:prstGeom>
+          <a:noFill/>
+          <a:ln/>
+        </p:spPr>
+        <p:txBody>
+          <a:bodyPr wrap="square" lIns="0" tIns="0" rIns="0" bIns="0" rtlCol="0" anchor="ctr"/>
+          <a:lstStyle/>
+          <a:p>
+            <a:pPr indent="0" marL="0">
+              <a:buNone/>
+            </a:pPr>
+            <a:r>
+              <a:rPr lang="en-US" sz="800" i="1" dirty="0">
                 <a:solidFill>
                   <a:srgbClr val="475569"/>
                 </a:solidFill>
@@ -6062,46 +6217,7 @@
                 <a:ea typeface="Calibri" pitchFamily="34" charset="-122"/>
                 <a:cs typeface="Calibri" pitchFamily="34" charset="-120"/>
               </a:rPr>
-              <a:t>→</a:t>
-            </a:r>
-            <a:endParaRPr lang="en-US" sz="1600" dirty="0"/>
-          </a:p>
-        </p:txBody>
-      </p:sp>
-      <p:sp>
-        <p:nvSpPr>
-          <p:cNvPr id="27" name="Text 25"/>
-          <p:cNvSpPr/>
-          <p:nvPr/>
-        </p:nvSpPr>
-        <p:spPr>
-          <a:xfrm>
-            <a:off x="548640" y="4480560"/>
-            <a:ext cx="8046720" cy="274320"/>
-          </a:xfrm>
-          <a:prstGeom prst="rect">
-            <a:avLst/>
-          </a:prstGeom>
-          <a:noFill/>
-          <a:ln/>
-        </p:spPr>
-        <p:txBody>
-          <a:bodyPr wrap="square" lIns="0" tIns="0" rIns="0" bIns="0" rtlCol="0" anchor="ctr"/>
-          <a:lstStyle/>
-          <a:p>
-            <a:pPr indent="0" marL="0">
-              <a:buNone/>
-            </a:pPr>
-            <a:r>
-              <a:rPr lang="en-US" sz="800" i="1" dirty="0">
-                <a:solidFill>
-                  <a:srgbClr val="475569"/>
-                </a:solidFill>
-                <a:latin typeface="Calibri" pitchFamily="34" charset="0"/>
-                <a:ea typeface="Calibri" pitchFamily="34" charset="-122"/>
-                <a:cs typeface="Calibri" pitchFamily="34" charset="-120"/>
-              </a:rPr>
-              <a:t>Ref: Lewis et al. (2020). "Retrieval-Augmented Generation." NeurIPS 2020.  |  Neubig, G. (2024). CMU Advanced NLP Lecture 10.</a:t>
+              <a:t>Lewis et al. (2020). Retrieval-Augmented Generation. NeurIPS 2020.</a:t>
             </a:r>
             <a:endParaRPr lang="en-US" sz="800" dirty="0"/>
           </a:p>
@@ -6192,7 +6308,7 @@
                 <a:ea typeface="Arial" pitchFamily="34" charset="-122"/>
                 <a:cs typeface="Arial" pitchFamily="34" charset="-120"/>
               </a:rPr>
-              <a:t>标准RAG Pipeline</a:t>
+              <a:t>标准RAG是怎么工作的？</a:t>
             </a:r>
             <a:endParaRPr lang="en-US" sz="2800" dirty="0"/>
           </a:p>
@@ -6231,7 +6347,7 @@
                 <a:ea typeface="Calibri" pitchFamily="34" charset="-122"/>
                 <a:cs typeface="Calibri" pitchFamily="34" charset="-120"/>
               </a:rPr>
-              <a:t>Hybrid Retrieval + Fusion + Reranking</a:t>
+              <a:t>双路检索 → 融合排序 → 精排 → 生成</a:t>
             </a:r>
             <a:endParaRPr lang="en-US" sz="1400" dirty="0"/>
           </a:p>
@@ -6290,7 +6406,7 @@
                 <a:ea typeface="Arial" pitchFamily="34" charset="-122"/>
                 <a:cs typeface="Arial" pitchFamily="34" charset="-120"/>
               </a:rPr>
-              <a:t>Documents</a:t>
+              <a:t>文档库</a:t>
             </a:r>
             <a:endParaRPr lang="en-US" sz="1400" dirty="0"/>
           </a:p>
@@ -6305,7 +6421,7 @@
         <p:spPr>
           <a:xfrm>
             <a:off x="2743200" y="1371600"/>
-            <a:ext cx="1645920" cy="914400"/>
+            <a:ext cx="2011680" cy="914400"/>
           </a:xfrm>
           <a:prstGeom prst="rect">
             <a:avLst/>
@@ -6325,7 +6441,7 @@
         <p:spPr>
           <a:xfrm>
             <a:off x="2743200" y="1371600"/>
-            <a:ext cx="1645920" cy="914400"/>
+            <a:ext cx="2011680" cy="914400"/>
           </a:xfrm>
           <a:prstGeom prst="rect">
             <a:avLst/>
@@ -6349,7 +6465,7 @@
                 <a:ea typeface="Arial" pitchFamily="34" charset="-122"/>
                 <a:cs typeface="Arial" pitchFamily="34" charset="-120"/>
               </a:rPr>
-              <a:t>Query</a:t>
+              <a:t>双路检索</a:t>
             </a:r>
             <a:endParaRPr lang="en-US" sz="1400" dirty="0"/>
           </a:p>
@@ -6363,8 +6479,8 @@
         </p:nvSpPr>
         <p:spPr>
           <a:xfrm>
-            <a:off x="4846320" y="1371600"/>
-            <a:ext cx="1645920" cy="914400"/>
+            <a:off x="5212080" y="1371600"/>
+            <a:ext cx="1828800" cy="914400"/>
           </a:xfrm>
           <a:prstGeom prst="rect">
             <a:avLst/>
@@ -6383,8 +6499,8 @@
         </p:nvSpPr>
         <p:spPr>
           <a:xfrm>
-            <a:off x="4846320" y="1371600"/>
-            <a:ext cx="1645920" cy="914400"/>
+            <a:off x="5212080" y="1371600"/>
+            <a:ext cx="1828800" cy="914400"/>
           </a:xfrm>
           <a:prstGeom prst="rect">
             <a:avLst/>
@@ -6408,7 +6524,7 @@
                 <a:ea typeface="Arial" pitchFamily="34" charset="-122"/>
                 <a:cs typeface="Arial" pitchFamily="34" charset="-120"/>
               </a:rPr>
-              <a:t>RRF Fusion</a:t>
+              <a:t>融合精排</a:t>
             </a:r>
             <a:endParaRPr lang="en-US" sz="1400" dirty="0"/>
           </a:p>
@@ -6422,14 +6538,14 @@
         </p:nvSpPr>
         <p:spPr>
           <a:xfrm>
-            <a:off x="6949440" y="1371600"/>
-            <a:ext cx="1645920" cy="914400"/>
+            <a:off x="7498080" y="1371600"/>
+            <a:ext cx="1463040" cy="914400"/>
           </a:xfrm>
           <a:prstGeom prst="rect">
             <a:avLst/>
           </a:prstGeom>
           <a:solidFill>
-            <a:srgbClr val="06B6D4"/>
+            <a:srgbClr val="10B981"/>
           </a:solidFill>
           <a:ln/>
         </p:spPr>
@@ -6442,8 +6558,8 @@
         </p:nvSpPr>
         <p:spPr>
           <a:xfrm>
-            <a:off x="6949440" y="1371600"/>
-            <a:ext cx="1645920" cy="914400"/>
+            <a:off x="7498080" y="1371600"/>
+            <a:ext cx="1463040" cy="914400"/>
           </a:xfrm>
           <a:prstGeom prst="rect">
             <a:avLst/>
@@ -6467,7 +6583,7 @@
                 <a:ea typeface="Arial" pitchFamily="34" charset="-122"/>
                 <a:cs typeface="Arial" pitchFamily="34" charset="-120"/>
               </a:rPr>
-              <a:t>Reranking</a:t>
+              <a:t>LLM生成</a:t>
             </a:r>
             <a:endParaRPr lang="en-US" sz="1400" dirty="0"/>
           </a:p>
@@ -6517,7 +6633,7 @@
         </p:nvSpPr>
         <p:spPr>
           <a:xfrm>
-            <a:off x="4434840" y="1691640"/>
+            <a:off x="4800600" y="1691640"/>
             <a:ext cx="320040" cy="274320"/>
           </a:xfrm>
           <a:prstGeom prst="rect">
@@ -6553,7 +6669,7 @@
         </p:nvSpPr>
         <p:spPr>
           <a:xfrm>
-            <a:off x="6537960" y="1691640"/>
+            <a:off x="7086600" y="1691640"/>
             <a:ext cx="320040" cy="274320"/>
           </a:xfrm>
           <a:prstGeom prst="rect">
@@ -6590,7 +6706,7 @@
         <p:spPr>
           <a:xfrm>
             <a:off x="457200" y="2651760"/>
-            <a:ext cx="1828800" cy="731520"/>
+            <a:ext cx="2194560" cy="822960"/>
           </a:xfrm>
           <a:prstGeom prst="rect">
             <a:avLst/>
@@ -6617,7 +6733,7 @@
         <p:spPr>
           <a:xfrm>
             <a:off x="457200" y="2651760"/>
-            <a:ext cx="1828800" cy="36576"/>
+            <a:ext cx="2194560" cy="36576"/>
           </a:xfrm>
           <a:prstGeom prst="rect">
             <a:avLst/>
@@ -6636,8 +6752,8 @@
         </p:nvSpPr>
         <p:spPr>
           <a:xfrm>
-            <a:off x="548640" y="2697480"/>
-            <a:ext cx="1645920" cy="365760"/>
+            <a:off x="566928" y="2697480"/>
+            <a:ext cx="1975104" cy="457200"/>
           </a:xfrm>
           <a:prstGeom prst="rect">
             <a:avLst/>
@@ -6653,7 +6769,7 @@
               <a:buNone/>
             </a:pPr>
             <a:r>
-              <a:rPr lang="en-US" sz="1100" b="1" dirty="0">
+              <a:rPr lang="en-US" sz="1200" b="1" dirty="0">
                 <a:solidFill>
                   <a:srgbClr val="1E293B"/>
                 </a:solidFill>
@@ -6663,7 +6779,24 @@
               </a:rPr>
               <a:t>Dense Retrieval</a:t>
             </a:r>
-            <a:endParaRPr lang="en-US" sz="1100" dirty="0"/>
+            <a:endParaRPr lang="en-US" sz="1200" dirty="0"/>
+          </a:p>
+          <a:p>
+            <a:pPr indent="0" marL="0">
+              <a:buNone/>
+            </a:pPr>
+            <a:r>
+              <a:rPr lang="en-US" sz="1200" b="1" dirty="0">
+                <a:solidFill>
+                  <a:srgbClr val="1E293B"/>
+                </a:solidFill>
+                <a:latin typeface="Arial" pitchFamily="34" charset="0"/>
+                <a:ea typeface="Arial" pitchFamily="34" charset="-122"/>
+                <a:cs typeface="Arial" pitchFamily="34" charset="-120"/>
+              </a:rPr>
+              <a:t>语义检索</a:t>
+            </a:r>
+            <a:endParaRPr lang="en-US" sz="1200" dirty="0"/>
           </a:p>
         </p:txBody>
       </p:sp>
@@ -6675,8 +6808,8 @@
         </p:nvSpPr>
         <p:spPr>
           <a:xfrm>
-            <a:off x="548640" y="3017520"/>
-            <a:ext cx="1645920" cy="274320"/>
+            <a:off x="566928" y="3154680"/>
+            <a:ext cx="1975104" cy="274320"/>
           </a:xfrm>
           <a:prstGeom prst="rect">
             <a:avLst/>
@@ -6714,8 +6847,8 @@
         </p:nvSpPr>
         <p:spPr>
           <a:xfrm>
-            <a:off x="2743200" y="2651760"/>
-            <a:ext cx="1828800" cy="731520"/>
+            <a:off x="2926080" y="2651760"/>
+            <a:ext cx="2194560" cy="822960"/>
           </a:xfrm>
           <a:prstGeom prst="rect">
             <a:avLst/>
@@ -6741,8 +6874,8 @@
         </p:nvSpPr>
         <p:spPr>
           <a:xfrm>
-            <a:off x="2743200" y="2651760"/>
-            <a:ext cx="1828800" cy="36576"/>
+            <a:off x="2926080" y="2651760"/>
+            <a:ext cx="2194560" cy="36576"/>
           </a:xfrm>
           <a:prstGeom prst="rect">
             <a:avLst/>
@@ -6761,8 +6894,8 @@
         </p:nvSpPr>
         <p:spPr>
           <a:xfrm>
-            <a:off x="2834640" y="2697480"/>
-            <a:ext cx="1645920" cy="365760"/>
+            <a:off x="3035808" y="2697480"/>
+            <a:ext cx="1975104" cy="457200"/>
           </a:xfrm>
           <a:prstGeom prst="rect">
             <a:avLst/>
@@ -6778,7 +6911,7 @@
               <a:buNone/>
             </a:pPr>
             <a:r>
-              <a:rPr lang="en-US" sz="1100" b="1" dirty="0">
+              <a:rPr lang="en-US" sz="1200" b="1" dirty="0">
                 <a:solidFill>
                   <a:srgbClr val="1E293B"/>
                 </a:solidFill>
@@ -6788,7 +6921,24 @@
               </a:rPr>
               <a:t>Sparse BM25</a:t>
             </a:r>
-            <a:endParaRPr lang="en-US" sz="1100" dirty="0"/>
+            <a:endParaRPr lang="en-US" sz="1200" dirty="0"/>
+          </a:p>
+          <a:p>
+            <a:pPr indent="0" marL="0">
+              <a:buNone/>
+            </a:pPr>
+            <a:r>
+              <a:rPr lang="en-US" sz="1200" b="1" dirty="0">
+                <a:solidFill>
+                  <a:srgbClr val="1E293B"/>
+                </a:solidFill>
+                <a:latin typeface="Arial" pitchFamily="34" charset="0"/>
+                <a:ea typeface="Arial" pitchFamily="34" charset="-122"/>
+                <a:cs typeface="Arial" pitchFamily="34" charset="-120"/>
+              </a:rPr>
+              <a:t>关键词检索</a:t>
+            </a:r>
+            <a:endParaRPr lang="en-US" sz="1200" dirty="0"/>
           </a:p>
         </p:txBody>
       </p:sp>
@@ -6800,8 +6950,8 @@
         </p:nvSpPr>
         <p:spPr>
           <a:xfrm>
-            <a:off x="2834640" y="3017520"/>
-            <a:ext cx="1645920" cy="274320"/>
+            <a:off x="3035808" y="3154680"/>
+            <a:ext cx="1975104" cy="274320"/>
           </a:xfrm>
           <a:prstGeom prst="rect">
             <a:avLst/>
@@ -6839,8 +6989,8 @@
         </p:nvSpPr>
         <p:spPr>
           <a:xfrm>
-            <a:off x="5029200" y="2651760"/>
-            <a:ext cx="1828800" cy="731520"/>
+            <a:off x="5394960" y="2651760"/>
+            <a:ext cx="1828800" cy="822960"/>
           </a:xfrm>
           <a:prstGeom prst="rect">
             <a:avLst/>
@@ -6866,14 +7016,14 @@
         </p:nvSpPr>
         <p:spPr>
           <a:xfrm>
-            <a:off x="5029200" y="2651760"/>
+            <a:off x="5394960" y="2651760"/>
             <a:ext cx="1828800" cy="36576"/>
           </a:xfrm>
           <a:prstGeom prst="rect">
             <a:avLst/>
           </a:prstGeom>
           <a:solidFill>
-            <a:srgbClr val="8B5CF6"/>
+            <a:srgbClr val="06B6D4"/>
           </a:solidFill>
           <a:ln/>
         </p:spPr>
@@ -6886,8 +7036,8 @@
         </p:nvSpPr>
         <p:spPr>
           <a:xfrm>
-            <a:off x="5120640" y="2697480"/>
-            <a:ext cx="1645920" cy="365760"/>
+            <a:off x="5504688" y="2697480"/>
+            <a:ext cx="1609344" cy="457200"/>
           </a:xfrm>
           <a:prstGeom prst="rect">
             <a:avLst/>
@@ -6903,7 +7053,7 @@
               <a:buNone/>
             </a:pPr>
             <a:r>
-              <a:rPr lang="en-US" sz="1100" b="1" dirty="0">
+              <a:rPr lang="en-US" sz="1200" b="1" dirty="0">
                 <a:solidFill>
                   <a:srgbClr val="1E293B"/>
                 </a:solidFill>
@@ -6911,9 +7061,26 @@
                 <a:ea typeface="Arial" pitchFamily="34" charset="-122"/>
                 <a:cs typeface="Arial" pitchFamily="34" charset="-120"/>
               </a:rPr>
-              <a:t>RRF Fusion</a:t>
-            </a:r>
-            <a:endParaRPr lang="en-US" sz="1100" dirty="0"/>
+              <a:t>RRF + Cross-Encoder</a:t>
+            </a:r>
+            <a:endParaRPr lang="en-US" sz="1200" dirty="0"/>
+          </a:p>
+          <a:p>
+            <a:pPr indent="0" marL="0">
+              <a:buNone/>
+            </a:pPr>
+            <a:r>
+              <a:rPr lang="en-US" sz="1200" b="1" dirty="0">
+                <a:solidFill>
+                  <a:srgbClr val="1E293B"/>
+                </a:solidFill>
+                <a:latin typeface="Arial" pitchFamily="34" charset="0"/>
+                <a:ea typeface="Arial" pitchFamily="34" charset="-122"/>
+                <a:cs typeface="Arial" pitchFamily="34" charset="-120"/>
+              </a:rPr>
+              <a:t>融合排序 + 精排</a:t>
+            </a:r>
+            <a:endParaRPr lang="en-US" sz="1200" dirty="0"/>
           </a:p>
         </p:txBody>
       </p:sp>
@@ -6925,8 +7092,8 @@
         </p:nvSpPr>
         <p:spPr>
           <a:xfrm>
-            <a:off x="5120640" y="3017520"/>
-            <a:ext cx="1645920" cy="274320"/>
+            <a:off x="5504688" y="3154680"/>
+            <a:ext cx="1609344" cy="274320"/>
           </a:xfrm>
           <a:prstGeom prst="rect">
             <a:avLst/>
@@ -6950,7 +7117,7 @@
                 <a:ea typeface="Calibri" pitchFamily="34" charset="-122"/>
                 <a:cs typeface="Calibri" pitchFamily="34" charset="-120"/>
               </a:rPr>
-              <a:t>Cormack et al., 2009</a:t>
+              <a:t>Cormack 2009 / Nogueira 2019</a:t>
             </a:r>
             <a:endParaRPr lang="en-US" sz="800" dirty="0"/>
           </a:p>
@@ -6958,210 +7125,39 @@
       </p:sp>
       <p:sp>
         <p:nvSpPr>
-          <p:cNvPr id="28" name="Shape 26"/>
-          <p:cNvSpPr/>
-          <p:nvPr/>
-        </p:nvSpPr>
-        <p:spPr>
-          <a:xfrm>
-            <a:off x="7040880" y="2651760"/>
-            <a:ext cx="1645920" cy="731520"/>
-          </a:xfrm>
-          <a:prstGeom prst="rect">
-            <a:avLst/>
-          </a:prstGeom>
-          <a:solidFill>
-            <a:srgbClr val="FFFFFF"/>
-          </a:solidFill>
-          <a:ln/>
-          <a:effectLst>
-            <a:outerShdw sx="100000" sy="100000" kx="0" ky="0" algn="bl" rotWithShape="0" blurRad="101600" dist="38100" dir="8100000">
-              <a:srgbClr val="000000">
-                <a:alpha val="8000"/>
-              </a:srgbClr>
-            </a:outerShdw>
-          </a:effectLst>
-        </p:spPr>
-      </p:sp>
-      <p:sp>
-        <p:nvSpPr>
-          <p:cNvPr id="29" name="Shape 27"/>
-          <p:cNvSpPr/>
-          <p:nvPr/>
-        </p:nvSpPr>
-        <p:spPr>
-          <a:xfrm>
-            <a:off x="7040880" y="2651760"/>
-            <a:ext cx="1645920" cy="36576"/>
-          </a:xfrm>
-          <a:prstGeom prst="rect">
-            <a:avLst/>
-          </a:prstGeom>
-          <a:solidFill>
-            <a:srgbClr val="06B6D4"/>
-          </a:solidFill>
-          <a:ln/>
-        </p:spPr>
-      </p:sp>
-      <p:sp>
-        <p:nvSpPr>
-          <p:cNvPr id="30" name="Text 28"/>
-          <p:cNvSpPr/>
-          <p:nvPr/>
-        </p:nvSpPr>
-        <p:spPr>
-          <a:xfrm>
-            <a:off x="7132320" y="2697480"/>
-            <a:ext cx="1463040" cy="365760"/>
-          </a:xfrm>
-          <a:prstGeom prst="rect">
-            <a:avLst/>
-          </a:prstGeom>
-          <a:noFill/>
-          <a:ln/>
-        </p:spPr>
-        <p:txBody>
-          <a:bodyPr wrap="square" lIns="0" tIns="0" rIns="0" bIns="0" rtlCol="0" anchor="ctr"/>
-          <a:lstStyle/>
-          <a:p>
-            <a:pPr indent="0" marL="0">
-              <a:buNone/>
-            </a:pPr>
-            <a:r>
-              <a:rPr lang="en-US" sz="1100" b="1" dirty="0">
-                <a:solidFill>
-                  <a:srgbClr val="1E293B"/>
-                </a:solidFill>
-                <a:latin typeface="Arial" pitchFamily="34" charset="0"/>
-                <a:ea typeface="Arial" pitchFamily="34" charset="-122"/>
-                <a:cs typeface="Arial" pitchFamily="34" charset="-120"/>
-              </a:rPr>
-              <a:t>Cross-Encoder</a:t>
-            </a:r>
-            <a:endParaRPr lang="en-US" sz="1100" dirty="0"/>
-          </a:p>
-        </p:txBody>
-      </p:sp>
-      <p:sp>
-        <p:nvSpPr>
-          <p:cNvPr id="31" name="Text 29"/>
-          <p:cNvSpPr/>
-          <p:nvPr/>
-        </p:nvSpPr>
-        <p:spPr>
-          <a:xfrm>
-            <a:off x="7132320" y="3017520"/>
-            <a:ext cx="1463040" cy="274320"/>
-          </a:xfrm>
-          <a:prstGeom prst="rect">
-            <a:avLst/>
-          </a:prstGeom>
-          <a:noFill/>
-          <a:ln/>
-        </p:spPr>
-        <p:txBody>
-          <a:bodyPr wrap="square" lIns="0" tIns="0" rIns="0" bIns="0" rtlCol="0" anchor="ctr"/>
-          <a:lstStyle/>
-          <a:p>
-            <a:pPr indent="0" marL="0">
-              <a:buNone/>
-            </a:pPr>
-            <a:r>
-              <a:rPr lang="en-US" sz="800" i="1" dirty="0">
+          <p:cNvPr id="28" name="Text 26"/>
+          <p:cNvSpPr/>
+          <p:nvPr/>
+        </p:nvSpPr>
+        <p:spPr>
+          <a:xfrm>
+            <a:off x="1371600" y="2286000"/>
+            <a:ext cx="914400" cy="274320"/>
+          </a:xfrm>
+          <a:prstGeom prst="rect">
+            <a:avLst/>
+          </a:prstGeom>
+          <a:noFill/>
+          <a:ln/>
+        </p:spPr>
+        <p:txBody>
+          <a:bodyPr wrap="square" rtlCol="0" anchor="ctr"/>
+          <a:lstStyle/>
+          <a:p>
+            <a:pPr algn="ctr" indent="0" marL="0">
+              <a:buNone/>
+            </a:pPr>
+            <a:r>
+              <a:rPr lang="en-US" sz="900" dirty="0">
                 <a:solidFill>
                   <a:srgbClr val="475569"/>
                 </a:solidFill>
-                <a:latin typeface="Calibri" pitchFamily="34" charset="0"/>
-                <a:ea typeface="Calibri" pitchFamily="34" charset="-122"/>
-                <a:cs typeface="Calibri" pitchFamily="34" charset="-120"/>
-              </a:rPr>
-              <a:t>Nogueira &amp; Cho, 2019</a:t>
-            </a:r>
-            <a:endParaRPr lang="en-US" sz="800" dirty="0"/>
-          </a:p>
-        </p:txBody>
-      </p:sp>
-      <p:sp>
-        <p:nvSpPr>
-          <p:cNvPr id="32" name="Shape 30"/>
-          <p:cNvSpPr/>
-          <p:nvPr/>
-        </p:nvSpPr>
-        <p:spPr>
-          <a:xfrm>
-            <a:off x="2743200" y="3840480"/>
-            <a:ext cx="3657600" cy="640080"/>
-          </a:xfrm>
-          <a:prstGeom prst="rect">
-            <a:avLst/>
-          </a:prstGeom>
-          <a:solidFill>
-            <a:srgbClr val="10B981"/>
-          </a:solidFill>
-          <a:ln/>
-        </p:spPr>
-      </p:sp>
-      <p:sp>
-        <p:nvSpPr>
-          <p:cNvPr id="33" name="Text 31"/>
-          <p:cNvSpPr/>
-          <p:nvPr/>
-        </p:nvSpPr>
-        <p:spPr>
-          <a:xfrm>
-            <a:off x="2743200" y="3840480"/>
-            <a:ext cx="3657600" cy="640080"/>
-          </a:xfrm>
-          <a:prstGeom prst="rect">
-            <a:avLst/>
-          </a:prstGeom>
-          <a:noFill/>
-          <a:ln/>
-        </p:spPr>
-        <p:txBody>
-          <a:bodyPr wrap="square" rtlCol="0" anchor="ctr"/>
-          <a:lstStyle/>
-          <a:p>
-            <a:pPr algn="ctr" indent="0" marL="0">
-              <a:buNone/>
-            </a:pPr>
-            <a:r>
-              <a:rPr lang="en-US" sz="1200" b="1" dirty="0">
-                <a:solidFill>
-                  <a:srgbClr val="FFFFFF"/>
-                </a:solidFill>
-                <a:latin typeface="Calibri" pitchFamily="34" charset="0"/>
-                <a:ea typeface="Calibri" pitchFamily="34" charset="-122"/>
-                <a:cs typeface="Calibri" pitchFamily="34" charset="-120"/>
-              </a:rPr>
-              <a:t>LLM Generator (context-grounded) → Final Answer</a:t>
-            </a:r>
-            <a:endParaRPr lang="en-US" sz="1200" dirty="0"/>
-          </a:p>
-        </p:txBody>
-      </p:sp>
-      <p:sp>
-        <p:nvSpPr>
-          <p:cNvPr id="34" name="Shape 32"/>
-          <p:cNvSpPr/>
-          <p:nvPr/>
-        </p:nvSpPr>
-        <p:spPr>
-          <a:xfrm>
-            <a:off x="7772400" y="3429000"/>
-            <a:ext cx="0" cy="365760"/>
-          </a:xfrm>
-          <a:prstGeom prst="line">
-            <a:avLst/>
-          </a:prstGeom>
-          <a:noFill/>
-          <a:ln w="19050">
-            <a:solidFill>
-              <a:srgbClr val="475569"/>
-            </a:solidFill>
-            <a:prstDash val="solid"/>
-          </a:ln>
-        </p:spPr>
+              </a:rPr>
+              <a:t>写入</a:t>
+            </a:r>
+            <a:endParaRPr lang="en-US" sz="900" dirty="0"/>
+          </a:p>
+        </p:txBody>
       </p:sp>
     </p:spTree>
   </p:cSld>
@@ -7248,7 +7244,7 @@
                 <a:ea typeface="Arial" pitchFamily="34" charset="-122"/>
                 <a:cs typeface="Arial" pitchFamily="34" charset="-120"/>
               </a:rPr>
-              <a:t>Still Hallucinate With RAG</a:t>
+              <a:t>等等——用了RAG还是不行？</a:t>
             </a:r>
             <a:endParaRPr lang="en-US" sz="2800" dirty="0"/>
           </a:p>
@@ -7287,7 +7283,7 @@
                 <a:ea typeface="Calibri" pitchFamily="34" charset="-122"/>
                 <a:cs typeface="Calibri" pitchFamily="34" charset="-120"/>
               </a:rPr>
-              <a:t>Stanford CS224V — Lam, 2025</a:t>
+              <a:t>Stanford CS224V 数据 · Lam, 2025</a:t>
             </a:r>
             <a:endParaRPr lang="en-US" sz="1300" dirty="0"/>
           </a:p>
@@ -7301,7 +7297,7 @@
         </p:nvSpPr>
         <p:spPr>
           <a:xfrm>
-            <a:off x="548640" y="1463040"/>
+            <a:off x="548640" y="1097280"/>
             <a:ext cx="2560320" cy="914400"/>
           </a:xfrm>
           <a:prstGeom prst="rect">
@@ -7318,7 +7314,7 @@
               <a:buNone/>
             </a:pPr>
             <a:r>
-              <a:rPr lang="en-US" sz="5200" b="1" dirty="0">
+              <a:rPr lang="en-US" sz="5600" b="1" dirty="0">
                 <a:solidFill>
                   <a:srgbClr val="EF4444"/>
                 </a:solidFill>
@@ -7328,7 +7324,7 @@
               </a:rPr>
               <a:t>51%</a:t>
             </a:r>
-            <a:endParaRPr lang="en-US" sz="5200" dirty="0"/>
+            <a:endParaRPr lang="en-US" sz="5600" dirty="0"/>
           </a:p>
         </p:txBody>
       </p:sp>
@@ -7340,8 +7336,8 @@
         </p:nvSpPr>
         <p:spPr>
           <a:xfrm>
-            <a:off x="548640" y="2377440"/>
-            <a:ext cx="2560320" cy="640080"/>
+            <a:off x="548640" y="2011680"/>
+            <a:ext cx="2560320" cy="548640"/>
           </a:xfrm>
           <a:prstGeom prst="rect">
             <a:avLst/>
@@ -7357,7 +7353,7 @@
               <a:buNone/>
             </a:pPr>
             <a:r>
-              <a:rPr lang="en-US" sz="1300" dirty="0">
+              <a:rPr lang="en-US" sz="1400" dirty="0">
                 <a:solidFill>
                   <a:srgbClr val="64748B"/>
                 </a:solidFill>
@@ -7365,16 +7361,16 @@
                 <a:ea typeface="Calibri" pitchFamily="34" charset="-122"/>
                 <a:cs typeface="Calibri" pitchFamily="34" charset="-120"/>
               </a:rPr>
-              <a:t>AI answers with</a:t>
-            </a:r>
-            <a:endParaRPr lang="en-US" sz="1300" dirty="0"/>
+              <a:t>AI回答有</a:t>
+            </a:r>
+            <a:endParaRPr lang="en-US" sz="1400" dirty="0"/>
           </a:p>
           <a:p>
             <a:pPr algn="ctr" indent="0" marL="0">
               <a:buNone/>
             </a:pPr>
             <a:r>
-              <a:rPr lang="en-US" sz="1300" dirty="0">
+              <a:rPr lang="en-US" sz="1400" dirty="0">
                 <a:solidFill>
                   <a:srgbClr val="64748B"/>
                 </a:solidFill>
@@ -7382,9 +7378,9 @@
                 <a:ea typeface="Calibri" pitchFamily="34" charset="-122"/>
                 <a:cs typeface="Calibri" pitchFamily="34" charset="-120"/>
               </a:rPr>
-              <a:t>significant issues</a:t>
-            </a:r>
-            <a:endParaRPr lang="en-US" sz="1300" dirty="0"/>
+              <a:t>严重问题</a:t>
+            </a:r>
+            <a:endParaRPr lang="en-US" sz="1400" dirty="0"/>
           </a:p>
         </p:txBody>
       </p:sp>
@@ -7396,7 +7392,7 @@
         </p:nvSpPr>
         <p:spPr>
           <a:xfrm>
-            <a:off x="3429000" y="1463040"/>
+            <a:off x="3429000" y="1097280"/>
             <a:ext cx="2560320" cy="914400"/>
           </a:xfrm>
           <a:prstGeom prst="rect">
@@ -7413,7 +7409,7 @@
               <a:buNone/>
             </a:pPr>
             <a:r>
-              <a:rPr lang="en-US" sz="5200" b="1" dirty="0">
+              <a:rPr lang="en-US" sz="5600" b="1" dirty="0">
                 <a:solidFill>
                   <a:srgbClr val="F59E0B"/>
                 </a:solidFill>
@@ -7423,7 +7419,7 @@
               </a:rPr>
               <a:t>19%</a:t>
             </a:r>
-            <a:endParaRPr lang="en-US" sz="5200" dirty="0"/>
+            <a:endParaRPr lang="en-US" sz="5600" dirty="0"/>
           </a:p>
         </p:txBody>
       </p:sp>
@@ -7435,8 +7431,8 @@
         </p:nvSpPr>
         <p:spPr>
           <a:xfrm>
-            <a:off x="3429000" y="2377440"/>
-            <a:ext cx="2560320" cy="640080"/>
+            <a:off x="3429000" y="2011680"/>
+            <a:ext cx="2560320" cy="548640"/>
           </a:xfrm>
           <a:prstGeom prst="rect">
             <a:avLst/>
@@ -7452,7 +7448,7 @@
               <a:buNone/>
             </a:pPr>
             <a:r>
-              <a:rPr lang="en-US" sz="1300" dirty="0">
+              <a:rPr lang="en-US" sz="1400" dirty="0">
                 <a:solidFill>
                   <a:srgbClr val="64748B"/>
                 </a:solidFill>
@@ -7460,16 +7456,16 @@
                 <a:ea typeface="Calibri" pitchFamily="34" charset="-122"/>
                 <a:cs typeface="Calibri" pitchFamily="34" charset="-120"/>
               </a:rPr>
-              <a:t>Answers introduced</a:t>
-            </a:r>
-            <a:endParaRPr lang="en-US" sz="1300" dirty="0"/>
+              <a:t>引用事实</a:t>
+            </a:r>
+            <a:endParaRPr lang="en-US" sz="1400" dirty="0"/>
           </a:p>
           <a:p>
             <a:pPr algn="ctr" indent="0" marL="0">
               <a:buNone/>
             </a:pPr>
             <a:r>
-              <a:rPr lang="en-US" sz="1300" dirty="0">
+              <a:rPr lang="en-US" sz="1400" dirty="0">
                 <a:solidFill>
                   <a:srgbClr val="64748B"/>
                 </a:solidFill>
@@ -7477,9 +7473,9 @@
                 <a:ea typeface="Calibri" pitchFamily="34" charset="-122"/>
                 <a:cs typeface="Calibri" pitchFamily="34" charset="-120"/>
               </a:rPr>
-              <a:t>factual errors</a:t>
-            </a:r>
-            <a:endParaRPr lang="en-US" sz="1300" dirty="0"/>
+              <a:t>是错的</a:t>
+            </a:r>
+            <a:endParaRPr lang="en-US" sz="1400" dirty="0"/>
           </a:p>
         </p:txBody>
       </p:sp>
@@ -7491,7 +7487,7 @@
         </p:nvSpPr>
         <p:spPr>
           <a:xfrm>
-            <a:off x="6309360" y="1463040"/>
+            <a:off x="6309360" y="1097280"/>
             <a:ext cx="2560320" cy="914400"/>
           </a:xfrm>
           <a:prstGeom prst="rect">
@@ -7508,7 +7504,7 @@
               <a:buNone/>
             </a:pPr>
             <a:r>
-              <a:rPr lang="en-US" sz="5200" b="1" dirty="0">
+              <a:rPr lang="en-US" sz="5600" b="1" dirty="0">
                 <a:solidFill>
                   <a:srgbClr val="06B6D4"/>
                 </a:solidFill>
@@ -7518,7 +7514,7 @@
               </a:rPr>
               <a:t>13%</a:t>
             </a:r>
-            <a:endParaRPr lang="en-US" sz="5200" dirty="0"/>
+            <a:endParaRPr lang="en-US" sz="5600" dirty="0"/>
           </a:p>
         </p:txBody>
       </p:sp>
@@ -7530,8 +7526,8 @@
         </p:nvSpPr>
         <p:spPr>
           <a:xfrm>
-            <a:off x="6309360" y="2377440"/>
-            <a:ext cx="2560320" cy="640080"/>
+            <a:off x="6309360" y="2011680"/>
+            <a:ext cx="2560320" cy="548640"/>
           </a:xfrm>
           <a:prstGeom prst="rect">
             <a:avLst/>
@@ -7547,7 +7543,7 @@
               <a:buNone/>
             </a:pPr>
             <a:r>
-              <a:rPr lang="en-US" sz="1300" dirty="0">
+              <a:rPr lang="en-US" sz="1400" dirty="0">
                 <a:solidFill>
                   <a:srgbClr val="64748B"/>
                 </a:solidFill>
@@ -7555,16 +7551,16 @@
                 <a:ea typeface="Calibri" pitchFamily="34" charset="-122"/>
                 <a:cs typeface="Calibri" pitchFamily="34" charset="-120"/>
               </a:rPr>
-              <a:t>Quotes altered</a:t>
-            </a:r>
-            <a:endParaRPr lang="en-US" sz="1300" dirty="0"/>
+              <a:t>引文是</a:t>
+            </a:r>
+            <a:endParaRPr lang="en-US" sz="1400" dirty="0"/>
           </a:p>
           <a:p>
             <a:pPr algn="ctr" indent="0" marL="0">
               <a:buNone/>
             </a:pPr>
             <a:r>
-              <a:rPr lang="en-US" sz="1300" dirty="0">
+              <a:rPr lang="en-US" sz="1400" dirty="0">
                 <a:solidFill>
                   <a:srgbClr val="64748B"/>
                 </a:solidFill>
@@ -7572,9 +7568,9 @@
                 <a:ea typeface="Calibri" pitchFamily="34" charset="-122"/>
                 <a:cs typeface="Calibri" pitchFamily="34" charset="-120"/>
               </a:rPr>
-              <a:t>or fabricated</a:t>
-            </a:r>
-            <a:endParaRPr lang="en-US" sz="1300" dirty="0"/>
+              <a:t>编造的</a:t>
+            </a:r>
+            <a:endParaRPr lang="en-US" sz="1400" dirty="0"/>
           </a:p>
         </p:txBody>
       </p:sp>
@@ -7586,7 +7582,7 @@
         </p:nvSpPr>
         <p:spPr>
           <a:xfrm>
-            <a:off x="548640" y="3291840"/>
+            <a:off x="548640" y="2926080"/>
             <a:ext cx="2560320" cy="1371600"/>
           </a:xfrm>
           <a:prstGeom prst="rect">
@@ -7606,7 +7602,7 @@
         </p:nvSpPr>
         <p:spPr>
           <a:xfrm>
-            <a:off x="548640" y="3291840"/>
+            <a:off x="548640" y="2926080"/>
             <a:ext cx="2560320" cy="36576"/>
           </a:xfrm>
           <a:prstGeom prst="rect">
@@ -7626,7 +7622,7 @@
         </p:nvSpPr>
         <p:spPr>
           <a:xfrm>
-            <a:off x="685800" y="3429000"/>
+            <a:off x="685800" y="3017520"/>
             <a:ext cx="2286000" cy="365760"/>
           </a:xfrm>
           <a:prstGeom prst="rect">
@@ -7643,7 +7639,7 @@
               <a:buNone/>
             </a:pPr>
             <a:r>
-              <a:rPr lang="en-US" sz="1300" b="1" dirty="0">
+              <a:rPr lang="en-US" sz="1400" b="1" dirty="0">
                 <a:solidFill>
                   <a:srgbClr val="2563EB"/>
                 </a:solidFill>
@@ -7651,9 +7647,9 @@
                 <a:ea typeface="Arial" pitchFamily="34" charset="-122"/>
                 <a:cs typeface="Arial" pitchFamily="34" charset="-120"/>
               </a:rPr>
-              <a:t>Retrieval Bias</a:t>
-            </a:r>
-            <a:endParaRPr lang="en-US" sz="1300" dirty="0"/>
+              <a:t>搜错了跟着错</a:t>
+            </a:r>
+            <a:endParaRPr lang="en-US" sz="1400" dirty="0"/>
           </a:p>
         </p:txBody>
       </p:sp>
@@ -7665,8 +7661,8 @@
         </p:nvSpPr>
         <p:spPr>
           <a:xfrm>
-            <a:off x="685800" y="3794760"/>
-            <a:ext cx="2286000" cy="548640"/>
+            <a:off x="685800" y="3337560"/>
+            <a:ext cx="2286000" cy="228600"/>
           </a:xfrm>
           <a:prstGeom prst="rect">
             <a:avLst/>
@@ -7682,29 +7678,85 @@
               <a:buNone/>
             </a:pPr>
             <a:r>
-              <a:rPr lang="en-US" sz="1100" dirty="0">
-                <a:solidFill>
-                  <a:srgbClr val="64748B"/>
+              <a:rPr lang="en-US" sz="900" i="1" dirty="0">
+                <a:solidFill>
+                  <a:srgbClr val="475569"/>
                 </a:solidFill>
                 <a:latin typeface="Calibri" pitchFamily="34" charset="0"/>
                 <a:ea typeface="Calibri" pitchFamily="34" charset="-122"/>
                 <a:cs typeface="Calibri" pitchFamily="34" charset="-120"/>
               </a:rPr>
-              <a:t>检索内容不相关，反而误导LLM</a:t>
-            </a:r>
-            <a:endParaRPr lang="en-US" sz="1100" dirty="0"/>
-          </a:p>
-        </p:txBody>
-      </p:sp>
-      <p:sp>
-        <p:nvSpPr>
-          <p:cNvPr id="15" name="Shape 13"/>
-          <p:cNvSpPr/>
-          <p:nvPr/>
-        </p:nvSpPr>
-        <p:spPr>
-          <a:xfrm>
-            <a:off x="3429000" y="3291840"/>
+              <a:t>Retrieval Bias</a:t>
+            </a:r>
+            <a:endParaRPr lang="en-US" sz="900" dirty="0"/>
+          </a:p>
+        </p:txBody>
+      </p:sp>
+      <p:sp>
+        <p:nvSpPr>
+          <p:cNvPr id="15" name="Text 13"/>
+          <p:cNvSpPr/>
+          <p:nvPr/>
+        </p:nvSpPr>
+        <p:spPr>
+          <a:xfrm>
+            <a:off x="685800" y="3566160"/>
+            <a:ext cx="2286000" cy="548640"/>
+          </a:xfrm>
+          <a:prstGeom prst="rect">
+            <a:avLst/>
+          </a:prstGeom>
+          <a:noFill/>
+          <a:ln/>
+        </p:spPr>
+        <p:txBody>
+          <a:bodyPr wrap="square" lIns="0" tIns="0" rIns="0" bIns="0" rtlCol="0" anchor="ctr"/>
+          <a:lstStyle/>
+          <a:p>
+            <a:pPr indent="0" marL="0">
+              <a:buNone/>
+            </a:pPr>
+            <a:r>
+              <a:rPr lang="en-US" sz="1200" dirty="0">
+                <a:solidFill>
+                  <a:srgbClr val="64748B"/>
+                </a:solidFill>
+                <a:latin typeface="Calibri" pitchFamily="34" charset="0"/>
+                <a:ea typeface="Calibri" pitchFamily="34" charset="-122"/>
+                <a:cs typeface="Calibri" pitchFamily="34" charset="-120"/>
+              </a:rPr>
+              <a:t>召回内容不相关，</a:t>
+            </a:r>
+            <a:endParaRPr lang="en-US" sz="1200" dirty="0"/>
+          </a:p>
+          <a:p>
+            <a:pPr indent="0" marL="0">
+              <a:buNone/>
+            </a:pPr>
+            <a:r>
+              <a:rPr lang="en-US" sz="1200" dirty="0">
+                <a:solidFill>
+                  <a:srgbClr val="64748B"/>
+                </a:solidFill>
+                <a:latin typeface="Calibri" pitchFamily="34" charset="0"/>
+                <a:ea typeface="Calibri" pitchFamily="34" charset="-122"/>
+                <a:cs typeface="Calibri" pitchFamily="34" charset="-120"/>
+              </a:rPr>
+              <a:t>AI只会错得更离谱</a:t>
+            </a:r>
+            <a:endParaRPr lang="en-US" sz="1200" dirty="0"/>
+          </a:p>
+        </p:txBody>
+      </p:sp>
+      <p:sp>
+        <p:nvSpPr>
+          <p:cNvPr id="16" name="Shape 14"/>
+          <p:cNvSpPr/>
+          <p:nvPr/>
+        </p:nvSpPr>
+        <p:spPr>
+          <a:xfrm>
+            <a:off x="3429000" y="2926080"/>
             <a:ext cx="2560320" cy="1371600"/>
           </a:xfrm>
           <a:prstGeom prst="rect">
@@ -7718,13 +7770,13 @@
       </p:sp>
       <p:sp>
         <p:nvSpPr>
-          <p:cNvPr id="16" name="Shape 14"/>
-          <p:cNvSpPr/>
-          <p:nvPr/>
-        </p:nvSpPr>
-        <p:spPr>
-          <a:xfrm>
-            <a:off x="3429000" y="3291840"/>
+          <p:cNvPr id="17" name="Shape 15"/>
+          <p:cNvSpPr/>
+          <p:nvPr/>
+        </p:nvSpPr>
+        <p:spPr>
+          <a:xfrm>
+            <a:off x="3429000" y="2926080"/>
             <a:ext cx="2560320" cy="36576"/>
           </a:xfrm>
           <a:prstGeom prst="rect">
@@ -7738,13 +7790,13 @@
       </p:sp>
       <p:sp>
         <p:nvSpPr>
-          <p:cNvPr id="17" name="Text 15"/>
-          <p:cNvSpPr/>
-          <p:nvPr/>
-        </p:nvSpPr>
-        <p:spPr>
-          <a:xfrm>
-            <a:off x="3566160" y="3429000"/>
+          <p:cNvPr id="18" name="Text 16"/>
+          <p:cNvSpPr/>
+          <p:nvPr/>
+        </p:nvSpPr>
+        <p:spPr>
+          <a:xfrm>
+            <a:off x="3566160" y="3017520"/>
             <a:ext cx="2286000" cy="365760"/>
           </a:xfrm>
           <a:prstGeom prst="rect">
@@ -7761,7 +7813,7 @@
               <a:buNone/>
             </a:pPr>
             <a:r>
-              <a:rPr lang="en-US" sz="1300" b="1" dirty="0">
+              <a:rPr lang="en-US" sz="1400" b="1" dirty="0">
                 <a:solidFill>
                   <a:srgbClr val="8B5CF6"/>
                 </a:solidFill>
@@ -7769,22 +7821,22 @@
                 <a:ea typeface="Arial" pitchFamily="34" charset="-122"/>
                 <a:cs typeface="Arial" pitchFamily="34" charset="-120"/>
               </a:rPr>
-              <a:t>No Domain Constraint</a:t>
-            </a:r>
-            <a:endParaRPr lang="en-US" sz="1300" dirty="0"/>
-          </a:p>
-        </p:txBody>
-      </p:sp>
-      <p:sp>
-        <p:nvSpPr>
-          <p:cNvPr id="18" name="Text 16"/>
-          <p:cNvSpPr/>
-          <p:nvPr/>
-        </p:nvSpPr>
-        <p:spPr>
-          <a:xfrm>
-            <a:off x="3566160" y="3794760"/>
-            <a:ext cx="2286000" cy="548640"/>
+              <a:t>没有'规矩'</a:t>
+            </a:r>
+            <a:endParaRPr lang="en-US" sz="1400" dirty="0"/>
+          </a:p>
+        </p:txBody>
+      </p:sp>
+      <p:sp>
+        <p:nvSpPr>
+          <p:cNvPr id="19" name="Text 17"/>
+          <p:cNvSpPr/>
+          <p:nvPr/>
+        </p:nvSpPr>
+        <p:spPr>
+          <a:xfrm>
+            <a:off x="3566160" y="3337560"/>
+            <a:ext cx="2286000" cy="228600"/>
           </a:xfrm>
           <a:prstGeom prst="rect">
             <a:avLst/>
@@ -7800,29 +7852,85 @@
               <a:buNone/>
             </a:pPr>
             <a:r>
-              <a:rPr lang="en-US" sz="1100" dirty="0">
-                <a:solidFill>
-                  <a:srgbClr val="64748B"/>
+              <a:rPr lang="en-US" sz="900" i="1" dirty="0">
+                <a:solidFill>
+                  <a:srgbClr val="475569"/>
                 </a:solidFill>
                 <a:latin typeface="Calibri" pitchFamily="34" charset="0"/>
                 <a:ea typeface="Calibri" pitchFamily="34" charset="-122"/>
                 <a:cs typeface="Calibri" pitchFamily="34" charset="-120"/>
               </a:rPr>
-              <a:t>推理路径完全不受控</a:t>
-            </a:r>
-            <a:endParaRPr lang="en-US" sz="1100" dirty="0"/>
-          </a:p>
-        </p:txBody>
-      </p:sp>
-      <p:sp>
-        <p:nvSpPr>
-          <p:cNvPr id="19" name="Shape 17"/>
-          <p:cNvSpPr/>
-          <p:nvPr/>
-        </p:nvSpPr>
-        <p:spPr>
-          <a:xfrm>
-            <a:off x="6309360" y="3291840"/>
+              <a:t>No Constraint</a:t>
+            </a:r>
+            <a:endParaRPr lang="en-US" sz="900" dirty="0"/>
+          </a:p>
+        </p:txBody>
+      </p:sp>
+      <p:sp>
+        <p:nvSpPr>
+          <p:cNvPr id="20" name="Text 18"/>
+          <p:cNvSpPr/>
+          <p:nvPr/>
+        </p:nvSpPr>
+        <p:spPr>
+          <a:xfrm>
+            <a:off x="3566160" y="3566160"/>
+            <a:ext cx="2286000" cy="548640"/>
+          </a:xfrm>
+          <a:prstGeom prst="rect">
+            <a:avLst/>
+          </a:prstGeom>
+          <a:noFill/>
+          <a:ln/>
+        </p:spPr>
+        <p:txBody>
+          <a:bodyPr wrap="square" lIns="0" tIns="0" rIns="0" bIns="0" rtlCol="0" anchor="ctr"/>
+          <a:lstStyle/>
+          <a:p>
+            <a:pPr indent="0" marL="0">
+              <a:buNone/>
+            </a:pPr>
+            <a:r>
+              <a:rPr lang="en-US" sz="1200" dirty="0">
+                <a:solidFill>
+                  <a:srgbClr val="64748B"/>
+                </a:solidFill>
+                <a:latin typeface="Calibri" pitchFamily="34" charset="0"/>
+                <a:ea typeface="Calibri" pitchFamily="34" charset="-122"/>
+                <a:cs typeface="Calibri" pitchFamily="34" charset="-120"/>
+              </a:rPr>
+              <a:t>推理路径完全</a:t>
+            </a:r>
+            <a:endParaRPr lang="en-US" sz="1200" dirty="0"/>
+          </a:p>
+          <a:p>
+            <a:pPr indent="0" marL="0">
+              <a:buNone/>
+            </a:pPr>
+            <a:r>
+              <a:rPr lang="en-US" sz="1200" dirty="0">
+                <a:solidFill>
+                  <a:srgbClr val="64748B"/>
+                </a:solidFill>
+                <a:latin typeface="Calibri" pitchFamily="34" charset="0"/>
+                <a:ea typeface="Calibri" pitchFamily="34" charset="-122"/>
+                <a:cs typeface="Calibri" pitchFamily="34" charset="-120"/>
+              </a:rPr>
+              <a:t>不受控</a:t>
+            </a:r>
+            <a:endParaRPr lang="en-US" sz="1200" dirty="0"/>
+          </a:p>
+        </p:txBody>
+      </p:sp>
+      <p:sp>
+        <p:nvSpPr>
+          <p:cNvPr id="21" name="Shape 19"/>
+          <p:cNvSpPr/>
+          <p:nvPr/>
+        </p:nvSpPr>
+        <p:spPr>
+          <a:xfrm>
+            <a:off x="6309360" y="2926080"/>
             <a:ext cx="2560320" cy="1371600"/>
           </a:xfrm>
           <a:prstGeom prst="rect">
@@ -7836,13 +7944,13 @@
       </p:sp>
       <p:sp>
         <p:nvSpPr>
-          <p:cNvPr id="20" name="Shape 18"/>
-          <p:cNvSpPr/>
-          <p:nvPr/>
-        </p:nvSpPr>
-        <p:spPr>
-          <a:xfrm>
-            <a:off x="6309360" y="3291840"/>
+          <p:cNvPr id="22" name="Shape 20"/>
+          <p:cNvSpPr/>
+          <p:nvPr/>
+        </p:nvSpPr>
+        <p:spPr>
+          <a:xfrm>
+            <a:off x="6309360" y="2926080"/>
             <a:ext cx="2560320" cy="36576"/>
           </a:xfrm>
           <a:prstGeom prst="rect">
@@ -7856,13 +7964,13 @@
       </p:sp>
       <p:sp>
         <p:nvSpPr>
-          <p:cNvPr id="21" name="Text 19"/>
-          <p:cNvSpPr/>
-          <p:nvPr/>
-        </p:nvSpPr>
-        <p:spPr>
-          <a:xfrm>
-            <a:off x="6446520" y="3429000"/>
+          <p:cNvPr id="23" name="Text 21"/>
+          <p:cNvSpPr/>
+          <p:nvPr/>
+        </p:nvSpPr>
+        <p:spPr>
+          <a:xfrm>
+            <a:off x="6446520" y="3017520"/>
             <a:ext cx="2286000" cy="365760"/>
           </a:xfrm>
           <a:prstGeom prst="rect">
@@ -7879,7 +7987,7 @@
               <a:buNone/>
             </a:pPr>
             <a:r>
-              <a:rPr lang="en-US" sz="1300" b="1" dirty="0">
+              <a:rPr lang="en-US" sz="1400" b="1" dirty="0">
                 <a:solidFill>
                   <a:srgbClr val="EF4444"/>
                 </a:solidFill>
@@ -7887,22 +7995,22 @@
                 <a:ea typeface="Arial" pitchFamily="34" charset="-122"/>
                 <a:cs typeface="Arial" pitchFamily="34" charset="-120"/>
               </a:rPr>
-              <a:t>No Verification</a:t>
-            </a:r>
-            <a:endParaRPr lang="en-US" sz="1300" dirty="0"/>
-          </a:p>
-        </p:txBody>
-      </p:sp>
-      <p:sp>
-        <p:nvSpPr>
-          <p:cNvPr id="22" name="Text 20"/>
-          <p:cNvSpPr/>
-          <p:nvPr/>
-        </p:nvSpPr>
-        <p:spPr>
-          <a:xfrm>
-            <a:off x="6446520" y="3794760"/>
-            <a:ext cx="2286000" cy="548640"/>
+              <a:t>没人查作业</a:t>
+            </a:r>
+            <a:endParaRPr lang="en-US" sz="1400" dirty="0"/>
+          </a:p>
+        </p:txBody>
+      </p:sp>
+      <p:sp>
+        <p:nvSpPr>
+          <p:cNvPr id="24" name="Text 22"/>
+          <p:cNvSpPr/>
+          <p:nvPr/>
+        </p:nvSpPr>
+        <p:spPr>
+          <a:xfrm>
+            <a:off x="6446520" y="3337560"/>
+            <a:ext cx="2286000" cy="228600"/>
           </a:xfrm>
           <a:prstGeom prst="rect">
             <a:avLst/>
@@ -7918,30 +8026,30 @@
               <a:buNone/>
             </a:pPr>
             <a:r>
-              <a:rPr lang="en-US" sz="1100" dirty="0">
-                <a:solidFill>
-                  <a:srgbClr val="64748B"/>
+              <a:rPr lang="en-US" sz="900" i="1" dirty="0">
+                <a:solidFill>
+                  <a:srgbClr val="475569"/>
                 </a:solidFill>
                 <a:latin typeface="Calibri" pitchFamily="34" charset="0"/>
                 <a:ea typeface="Calibri" pitchFamily="34" charset="-122"/>
                 <a:cs typeface="Calibri" pitchFamily="34" charset="-120"/>
               </a:rPr>
-              <a:t>缺少校验回答是否符合领域事实</a:t>
-            </a:r>
-            <a:endParaRPr lang="en-US" sz="1100" dirty="0"/>
-          </a:p>
-        </p:txBody>
-      </p:sp>
-      <p:sp>
-        <p:nvSpPr>
-          <p:cNvPr id="23" name="Text 21"/>
-          <p:cNvSpPr/>
-          <p:nvPr/>
-        </p:nvSpPr>
-        <p:spPr>
-          <a:xfrm>
-            <a:off x="548640" y="4480560"/>
-            <a:ext cx="8046720" cy="320040"/>
+              <a:t>No Verification</a:t>
+            </a:r>
+            <a:endParaRPr lang="en-US" sz="900" dirty="0"/>
+          </a:p>
+        </p:txBody>
+      </p:sp>
+      <p:sp>
+        <p:nvSpPr>
+          <p:cNvPr id="25" name="Text 23"/>
+          <p:cNvSpPr/>
+          <p:nvPr/>
+        </p:nvSpPr>
+        <p:spPr>
+          <a:xfrm>
+            <a:off x="6446520" y="3566160"/>
+            <a:ext cx="2286000" cy="548640"/>
           </a:xfrm>
           <a:prstGeom prst="rect">
             <a:avLst/>
@@ -7953,21 +8061,77 @@
           <a:bodyPr wrap="square" lIns="0" tIns="0" rIns="0" bIns="0" rtlCol="0" anchor="ctr"/>
           <a:lstStyle/>
           <a:p>
-            <a:pPr algn="ctr" indent="0" marL="0">
-              <a:buNone/>
-            </a:pPr>
-            <a:r>
-              <a:rPr lang="en-US" sz="1300" i="1" dirty="0">
-                <a:solidFill>
-                  <a:srgbClr val="F59E0B"/>
+            <a:pPr indent="0" marL="0">
+              <a:buNone/>
+            </a:pPr>
+            <a:r>
+              <a:rPr lang="en-US" sz="1200" dirty="0">
+                <a:solidFill>
+                  <a:srgbClr val="64748B"/>
                 </a:solidFill>
                 <a:latin typeface="Calibri" pitchFamily="34" charset="0"/>
                 <a:ea typeface="Calibri" pitchFamily="34" charset="-122"/>
                 <a:cs typeface="Calibri" pitchFamily="34" charset="-120"/>
               </a:rPr>
-              <a:t>How do we make LLM reasoning controllable, interpretable, and verifiable?</a:t>
-            </a:r>
-            <a:endParaRPr lang="en-US" sz="1300" dirty="0"/>
+              <a:t>不会校验回答</a:t>
+            </a:r>
+            <a:endParaRPr lang="en-US" sz="1200" dirty="0"/>
+          </a:p>
+          <a:p>
+            <a:pPr indent="0" marL="0">
+              <a:buNone/>
+            </a:pPr>
+            <a:r>
+              <a:rPr lang="en-US" sz="1200" dirty="0">
+                <a:solidFill>
+                  <a:srgbClr val="64748B"/>
+                </a:solidFill>
+                <a:latin typeface="Calibri" pitchFamily="34" charset="0"/>
+                <a:ea typeface="Calibri" pitchFamily="34" charset="-122"/>
+                <a:cs typeface="Calibri" pitchFamily="34" charset="-120"/>
+              </a:rPr>
+              <a:t>到底对不对</a:t>
+            </a:r>
+            <a:endParaRPr lang="en-US" sz="1200" dirty="0"/>
+          </a:p>
+        </p:txBody>
+      </p:sp>
+      <p:sp>
+        <p:nvSpPr>
+          <p:cNvPr id="26" name="Text 24"/>
+          <p:cNvSpPr/>
+          <p:nvPr/>
+        </p:nvSpPr>
+        <p:spPr>
+          <a:xfrm>
+            <a:off x="548640" y="4480560"/>
+            <a:ext cx="8046720" cy="365760"/>
+          </a:xfrm>
+          <a:prstGeom prst="rect">
+            <a:avLst/>
+          </a:prstGeom>
+          <a:noFill/>
+          <a:ln/>
+        </p:spPr>
+        <p:txBody>
+          <a:bodyPr wrap="square" lIns="0" tIns="0" rIns="0" bIns="0" rtlCol="0" anchor="ctr"/>
+          <a:lstStyle/>
+          <a:p>
+            <a:pPr algn="ctr" indent="0" marL="0">
+              <a:buNone/>
+            </a:pPr>
+            <a:r>
+              <a:rPr lang="en-US" sz="1400" i="1" dirty="0">
+                <a:solidFill>
+                  <a:srgbClr val="F59E0B"/>
+                </a:solidFill>
+                <a:latin typeface="Calibri" pitchFamily="34" charset="0"/>
+                <a:ea typeface="Calibri" pitchFamily="34" charset="-122"/>
+                <a:cs typeface="Calibri" pitchFamily="34" charset="-120"/>
+              </a:rPr>
+              <a:t>→ 怎么让大模型推理变得可控、可解释、可验证？</a:t>
+            </a:r>
+            <a:endParaRPr lang="en-US" sz="1400" dirty="0"/>
           </a:p>
         </p:txBody>
       </p:sp>
@@ -8056,7 +8220,7 @@
                 <a:ea typeface="Arial" pitchFamily="34" charset="-122"/>
                 <a:cs typeface="Arial" pitchFamily="34" charset="-120"/>
               </a:rPr>
-              <a:t>我的实践：本体驱动的约束推理</a:t>
+              <a:t>我的做法：给AI画一条'合理的路'</a:t>
             </a:r>
             <a:endParaRPr lang="en-US" sz="2800" dirty="0"/>
           </a:p>
@@ -8095,7 +8259,7 @@
                 <a:ea typeface="Calibri" pitchFamily="34" charset="-122"/>
                 <a:cs typeface="Calibri" pitchFamily="34" charset="-120"/>
               </a:rPr>
-              <a:t>Ontology-Constrained Reasoning</a:t>
+              <a:t>Ontology-Constrained Reasoning · 本体约束推理</a:t>
             </a:r>
             <a:endParaRPr lang="en-US" sz="1400" dirty="0"/>
           </a:p>
@@ -8110,7 +8274,7 @@
         <p:spPr>
           <a:xfrm>
             <a:off x="457200" y="1188720"/>
-            <a:ext cx="3657600" cy="3200400"/>
+            <a:ext cx="3840480" cy="3474720"/>
           </a:xfrm>
           <a:prstGeom prst="rect">
             <a:avLst/>
@@ -8136,8 +8300,8 @@
         </p:nvSpPr>
         <p:spPr>
           <a:xfrm>
-            <a:off x="640080" y="1325880"/>
-            <a:ext cx="3291840" cy="320040"/>
+            <a:off x="548640" y="1280160"/>
+            <a:ext cx="3657600" cy="320040"/>
           </a:xfrm>
           <a:prstGeom prst="rect">
             <a:avLst/>
@@ -8153,7 +8317,7 @@
               <a:buNone/>
             </a:pPr>
             <a:r>
-              <a:rPr lang="en-US" sz="1400" b="1" dirty="0">
+              <a:rPr lang="en-US" sz="1200" b="1" dirty="0">
                 <a:solidFill>
                   <a:srgbClr val="1E3A5F"/>
                 </a:solidFill>
@@ -8161,22 +8325,61 @@
                 <a:ea typeface="Arial" pitchFamily="34" charset="-122"/>
                 <a:cs typeface="Arial" pitchFamily="34" charset="-120"/>
               </a:rPr>
-              <a:t>Ontology Validation Layer</a:t>
-            </a:r>
-            <a:endParaRPr lang="en-US" sz="1400" dirty="0"/>
-          </a:p>
-        </p:txBody>
-      </p:sp>
-      <p:sp>
-        <p:nvSpPr>
-          <p:cNvPr id="7" name="Shape 5"/>
-          <p:cNvSpPr/>
-          <p:nvPr/>
-        </p:nvSpPr>
-        <p:spPr>
-          <a:xfrm>
-            <a:off x="822960" y="1783080"/>
-            <a:ext cx="2926080" cy="411480"/>
+              <a:t>本体校验层 (Ontology Validation Layer)</a:t>
+            </a:r>
+            <a:endParaRPr lang="en-US" sz="1200" dirty="0"/>
+          </a:p>
+        </p:txBody>
+      </p:sp>
+      <p:sp>
+        <p:nvSpPr>
+          <p:cNvPr id="7" name="Text 5"/>
+          <p:cNvSpPr/>
+          <p:nvPr/>
+        </p:nvSpPr>
+        <p:spPr>
+          <a:xfrm>
+            <a:off x="1371600" y="1645920"/>
+            <a:ext cx="1828800" cy="274320"/>
+          </a:xfrm>
+          <a:prstGeom prst="rect">
+            <a:avLst/>
+          </a:prstGeom>
+          <a:noFill/>
+          <a:ln/>
+        </p:spPr>
+        <p:txBody>
+          <a:bodyPr wrap="square" rtlCol="0" anchor="ctr"/>
+          <a:lstStyle/>
+          <a:p>
+            <a:pPr algn="ctr" indent="0" marL="0">
+              <a:buNone/>
+            </a:pPr>
+            <a:r>
+              <a:rPr lang="en-US" sz="1000" dirty="0">
+                <a:solidFill>
+                  <a:srgbClr val="475569"/>
+                </a:solidFill>
+                <a:latin typeface="Calibri" pitchFamily="34" charset="0"/>
+                <a:ea typeface="Calibri" pitchFamily="34" charset="-122"/>
+                <a:cs typeface="Calibri" pitchFamily="34" charset="-120"/>
+              </a:rPr>
+              <a:t>↓ LLM 原始输出</a:t>
+            </a:r>
+            <a:endParaRPr lang="en-US" sz="1000" dirty="0"/>
+          </a:p>
+        </p:txBody>
+      </p:sp>
+      <p:sp>
+        <p:nvSpPr>
+          <p:cNvPr id="8" name="Shape 6"/>
+          <p:cNvSpPr/>
+          <p:nvPr/>
+        </p:nvSpPr>
+        <p:spPr>
+          <a:xfrm>
+            <a:off x="822960" y="2011680"/>
+            <a:ext cx="3108960" cy="457200"/>
           </a:xfrm>
           <a:prstGeom prst="rect">
             <a:avLst/>
@@ -8189,14 +8392,14 @@
       </p:sp>
       <p:sp>
         <p:nvSpPr>
-          <p:cNvPr id="8" name="Text 6"/>
-          <p:cNvSpPr/>
-          <p:nvPr/>
-        </p:nvSpPr>
-        <p:spPr>
-          <a:xfrm>
-            <a:off x="822960" y="1783080"/>
-            <a:ext cx="2926080" cy="411480"/>
+          <p:cNvPr id="9" name="Text 7"/>
+          <p:cNvSpPr/>
+          <p:nvPr/>
+        </p:nvSpPr>
+        <p:spPr>
+          <a:xfrm>
+            <a:off x="822960" y="2011680"/>
+            <a:ext cx="3108960" cy="457200"/>
           </a:xfrm>
           <a:prstGeom prst="rect">
             <a:avLst/>
@@ -8220,7 +8423,7 @@
                 <a:ea typeface="Calibri" pitchFamily="34" charset="-122"/>
                 <a:cs typeface="Calibri" pitchFamily="34" charset="-120"/>
               </a:rPr>
-              <a:t>Entity Validity Check</a:t>
+              <a:t>实体校验——你说的东西存在吗？</a:t>
             </a:r>
             <a:endParaRPr lang="en-US" sz="1100" dirty="0"/>
           </a:p>
@@ -8228,14 +8431,14 @@
       </p:sp>
       <p:sp>
         <p:nvSpPr>
-          <p:cNvPr id="9" name="Shape 7"/>
-          <p:cNvSpPr/>
-          <p:nvPr/>
-        </p:nvSpPr>
-        <p:spPr>
-          <a:xfrm>
-            <a:off x="822960" y="2377440"/>
-            <a:ext cx="2926080" cy="411480"/>
+          <p:cNvPr id="10" name="Shape 8"/>
+          <p:cNvSpPr/>
+          <p:nvPr/>
+        </p:nvSpPr>
+        <p:spPr>
+          <a:xfrm>
+            <a:off x="822960" y="2606040"/>
+            <a:ext cx="3108960" cy="457200"/>
           </a:xfrm>
           <a:prstGeom prst="rect">
             <a:avLst/>
@@ -8248,14 +8451,14 @@
       </p:sp>
       <p:sp>
         <p:nvSpPr>
-          <p:cNvPr id="10" name="Text 8"/>
-          <p:cNvSpPr/>
-          <p:nvPr/>
-        </p:nvSpPr>
-        <p:spPr>
-          <a:xfrm>
-            <a:off x="822960" y="2377440"/>
-            <a:ext cx="2926080" cy="411480"/>
+          <p:cNvPr id="11" name="Text 9"/>
+          <p:cNvSpPr/>
+          <p:nvPr/>
+        </p:nvSpPr>
+        <p:spPr>
+          <a:xfrm>
+            <a:off x="822960" y="2606040"/>
+            <a:ext cx="3108960" cy="457200"/>
           </a:xfrm>
           <a:prstGeom prst="rect">
             <a:avLst/>
@@ -8279,7 +8482,7 @@
                 <a:ea typeface="Calibri" pitchFamily="34" charset="-122"/>
                 <a:cs typeface="Calibri" pitchFamily="34" charset="-120"/>
               </a:rPr>
-              <a:t>Relation Path Pruning</a:t>
+              <a:t>关系裁剪——它们真有关系吗？</a:t>
             </a:r>
             <a:endParaRPr lang="en-US" sz="1100" dirty="0"/>
           </a:p>
@@ -8287,14 +8490,14 @@
       </p:sp>
       <p:sp>
         <p:nvSpPr>
-          <p:cNvPr id="11" name="Shape 9"/>
-          <p:cNvSpPr/>
-          <p:nvPr/>
-        </p:nvSpPr>
-        <p:spPr>
-          <a:xfrm>
-            <a:off x="822960" y="2971800"/>
-            <a:ext cx="2926080" cy="411480"/>
+          <p:cNvPr id="12" name="Shape 10"/>
+          <p:cNvSpPr/>
+          <p:nvPr/>
+        </p:nvSpPr>
+        <p:spPr>
+          <a:xfrm>
+            <a:off x="822960" y="3200400"/>
+            <a:ext cx="3108960" cy="457200"/>
           </a:xfrm>
           <a:prstGeom prst="rect">
             <a:avLst/>
@@ -8307,14 +8510,14 @@
       </p:sp>
       <p:sp>
         <p:nvSpPr>
-          <p:cNvPr id="12" name="Text 10"/>
-          <p:cNvSpPr/>
-          <p:nvPr/>
-        </p:nvSpPr>
-        <p:spPr>
-          <a:xfrm>
-            <a:off x="822960" y="2971800"/>
-            <a:ext cx="2926080" cy="411480"/>
+          <p:cNvPr id="13" name="Text 11"/>
+          <p:cNvSpPr/>
+          <p:nvPr/>
+        </p:nvSpPr>
+        <p:spPr>
+          <a:xfrm>
+            <a:off x="822960" y="3200400"/>
+            <a:ext cx="3108960" cy="457200"/>
           </a:xfrm>
           <a:prstGeom prst="rect">
             <a:avLst/>
@@ -8338,7 +8541,7 @@
                 <a:ea typeface="Calibri" pitchFamily="34" charset="-122"/>
                 <a:cs typeface="Calibri" pitchFamily="34" charset="-120"/>
               </a:rPr>
-              <a:t>Triple Whitelist Filter</a:t>
+              <a:t>白名单过滤——专家审过的才能过</a:t>
             </a:r>
             <a:endParaRPr lang="en-US" sz="1100" dirty="0"/>
           </a:p>
@@ -8346,14 +8549,14 @@
       </p:sp>
       <p:sp>
         <p:nvSpPr>
-          <p:cNvPr id="13" name="Text 11"/>
-          <p:cNvSpPr/>
-          <p:nvPr/>
-        </p:nvSpPr>
-        <p:spPr>
-          <a:xfrm>
-            <a:off x="1371600" y="3474720"/>
-            <a:ext cx="1828800" cy="274320"/>
+          <p:cNvPr id="14" name="Text 12"/>
+          <p:cNvSpPr/>
+          <p:nvPr/>
+        </p:nvSpPr>
+        <p:spPr>
+          <a:xfrm>
+            <a:off x="1371600" y="3749040"/>
+            <a:ext cx="1828800" cy="228600"/>
           </a:xfrm>
           <a:prstGeom prst="rect">
             <a:avLst/>
@@ -8377,7 +8580,7 @@
                 <a:ea typeface="Calibri" pitchFamily="34" charset="-122"/>
                 <a:cs typeface="Calibri" pitchFamily="34" charset="-120"/>
               </a:rPr>
-              <a:t>↓  Pass / Prune</a:t>
+              <a:t>↓ 通过 → 输出</a:t>
             </a:r>
             <a:endParaRPr lang="en-US" sz="1000" dirty="0"/>
           </a:p>
@@ -8385,14 +8588,14 @@
       </p:sp>
       <p:sp>
         <p:nvSpPr>
-          <p:cNvPr id="14" name="Shape 12"/>
-          <p:cNvSpPr/>
-          <p:nvPr/>
-        </p:nvSpPr>
-        <p:spPr>
-          <a:xfrm>
-            <a:off x="914400" y="3794760"/>
-            <a:ext cx="2743200" cy="457200"/>
+          <p:cNvPr id="15" name="Shape 13"/>
+          <p:cNvSpPr/>
+          <p:nvPr/>
+        </p:nvSpPr>
+        <p:spPr>
+          <a:xfrm>
+            <a:off x="1097280" y="4023360"/>
+            <a:ext cx="2560320" cy="411480"/>
           </a:xfrm>
           <a:prstGeom prst="rect">
             <a:avLst/>
@@ -8405,14 +8608,14 @@
       </p:sp>
       <p:sp>
         <p:nvSpPr>
-          <p:cNvPr id="15" name="Text 13"/>
-          <p:cNvSpPr/>
-          <p:nvPr/>
-        </p:nvSpPr>
-        <p:spPr>
-          <a:xfrm>
-            <a:off x="914400" y="3794760"/>
-            <a:ext cx="2743200" cy="457200"/>
+          <p:cNvPr id="16" name="Text 14"/>
+          <p:cNvSpPr/>
+          <p:nvPr/>
+        </p:nvSpPr>
+        <p:spPr>
+          <a:xfrm>
+            <a:off x="1097280" y="4023360"/>
+            <a:ext cx="2560320" cy="411480"/>
           </a:xfrm>
           <a:prstGeom prst="rect">
             <a:avLst/>
@@ -8436,7 +8639,7 @@
                 <a:ea typeface="Arial" pitchFamily="34" charset="-122"/>
                 <a:cs typeface="Arial" pitchFamily="34" charset="-120"/>
               </a:rPr>
-              <a:t>Trustworthy Output</a:t>
+              <a:t>✅ 可信输出 (Trustworthy Output)</a:t>
             </a:r>
             <a:endParaRPr lang="en-US" sz="1200" dirty="0"/>
           </a:p>
@@ -8444,14 +8647,14 @@
       </p:sp>
       <p:sp>
         <p:nvSpPr>
-          <p:cNvPr id="16" name="Shape 14"/>
-          <p:cNvSpPr/>
-          <p:nvPr/>
-        </p:nvSpPr>
-        <p:spPr>
-          <a:xfrm>
-            <a:off x="4389120" y="1188720"/>
-            <a:ext cx="4297680" cy="3200400"/>
+          <p:cNvPr id="17" name="Shape 15"/>
+          <p:cNvSpPr/>
+          <p:nvPr/>
+        </p:nvSpPr>
+        <p:spPr>
+          <a:xfrm>
+            <a:off x="4572000" y="1188720"/>
+            <a:ext cx="4114800" cy="3474720"/>
           </a:xfrm>
           <a:prstGeom prst="rect">
             <a:avLst/>
@@ -8471,13 +8674,13 @@
       </p:sp>
       <p:sp>
         <p:nvSpPr>
-          <p:cNvPr id="17" name="Text 15"/>
-          <p:cNvSpPr/>
-          <p:nvPr/>
-        </p:nvSpPr>
-        <p:spPr>
-          <a:xfrm>
-            <a:off x="4572000" y="1325880"/>
+          <p:cNvPr id="18" name="Text 16"/>
+          <p:cNvSpPr/>
+          <p:nvPr/>
+        </p:nvSpPr>
+        <p:spPr>
+          <a:xfrm>
+            <a:off x="4754880" y="1280160"/>
             <a:ext cx="2743200" cy="320040"/>
           </a:xfrm>
           <a:prstGeom prst="rect">
@@ -8502,7 +8705,7 @@
                 <a:ea typeface="Arial" pitchFamily="34" charset="-122"/>
                 <a:cs typeface="Arial" pitchFamily="34" charset="-120"/>
               </a:rPr>
-              <a:t>核心理念</a:t>
+              <a:t>核心差异</a:t>
             </a:r>
             <a:endParaRPr lang="en-US" sz="1400" dirty="0"/>
           </a:p>
@@ -8510,14 +8713,186 @@
       </p:sp>
       <p:sp>
         <p:nvSpPr>
-          <p:cNvPr id="18" name="Text 16"/>
-          <p:cNvSpPr/>
-          <p:nvPr/>
-        </p:nvSpPr>
-        <p:spPr>
-          <a:xfrm>
-            <a:off x="4572000" y="1737360"/>
-            <a:ext cx="3840480" cy="2377440"/>
+          <p:cNvPr id="19" name="Shape 17"/>
+          <p:cNvSpPr/>
+          <p:nvPr/>
+        </p:nvSpPr>
+        <p:spPr>
+          <a:xfrm>
+            <a:off x="4846320" y="1737360"/>
+            <a:ext cx="3657600" cy="640080"/>
+          </a:xfrm>
+          <a:prstGeom prst="rect">
+            <a:avLst/>
+          </a:prstGeom>
+          <a:solidFill>
+            <a:srgbClr val="F1F5F9"/>
+          </a:solidFill>
+          <a:ln/>
+        </p:spPr>
+      </p:sp>
+      <p:sp>
+        <p:nvSpPr>
+          <p:cNvPr id="20" name="Text 18"/>
+          <p:cNvSpPr/>
+          <p:nvPr/>
+        </p:nvSpPr>
+        <p:spPr>
+          <a:xfrm>
+            <a:off x="5029200" y="1737360"/>
+            <a:ext cx="3291840" cy="640080"/>
+          </a:xfrm>
+          <a:prstGeom prst="rect">
+            <a:avLst/>
+          </a:prstGeom>
+          <a:noFill/>
+          <a:ln/>
+        </p:spPr>
+        <p:txBody>
+          <a:bodyPr wrap="square" rtlCol="0" anchor="ctr"/>
+          <a:lstStyle/>
+          <a:p>
+            <a:pPr indent="0" marL="0">
+              <a:buNone/>
+            </a:pPr>
+            <a:r>
+              <a:rPr lang="en-US" sz="1100" b="1" dirty="0">
+                <a:solidFill>
+                  <a:srgbClr val="475569"/>
+                </a:solidFill>
+              </a:rPr>
+              <a:t>RAG 的做法：</a:t>
+            </a:r>
+            <a:pPr indent="0" marL="0">
+              <a:buNone/>
+            </a:pPr>
+            <a:r>
+              <a:rPr lang="en-US" sz="1200" dirty="0">
+                <a:solidFill>
+                  <a:srgbClr val="1E293B"/>
+                </a:solidFill>
+              </a:rPr>
+              <a:t>给AI更多参考材料</a:t>
+            </a:r>
+            <a:endParaRPr lang="en-US" sz="1100" dirty="0"/>
+          </a:p>
+        </p:txBody>
+      </p:sp>
+      <p:sp>
+        <p:nvSpPr>
+          <p:cNvPr id="21" name="Text 19"/>
+          <p:cNvSpPr/>
+          <p:nvPr/>
+        </p:nvSpPr>
+        <p:spPr>
+          <a:xfrm>
+            <a:off x="6492240" y="2377440"/>
+            <a:ext cx="365760" cy="274320"/>
+          </a:xfrm>
+          <a:prstGeom prst="rect">
+            <a:avLst/>
+          </a:prstGeom>
+          <a:noFill/>
+          <a:ln/>
+        </p:spPr>
+        <p:txBody>
+          <a:bodyPr wrap="square" rtlCol="0" anchor="ctr"/>
+          <a:lstStyle/>
+          <a:p>
+            <a:pPr algn="ctr" indent="0" marL="0">
+              <a:buNone/>
+            </a:pPr>
+            <a:r>
+              <a:rPr lang="en-US" sz="1600" dirty="0">
+                <a:solidFill>
+                  <a:srgbClr val="06B6D4"/>
+                </a:solidFill>
+              </a:rPr>
+              <a:t>↓</a:t>
+            </a:r>
+            <a:endParaRPr lang="en-US" sz="1600" dirty="0"/>
+          </a:p>
+        </p:txBody>
+      </p:sp>
+      <p:sp>
+        <p:nvSpPr>
+          <p:cNvPr id="22" name="Shape 20"/>
+          <p:cNvSpPr/>
+          <p:nvPr/>
+        </p:nvSpPr>
+        <p:spPr>
+          <a:xfrm>
+            <a:off x="4846320" y="2743200"/>
+            <a:ext cx="3657600" cy="640080"/>
+          </a:xfrm>
+          <a:prstGeom prst="rect">
+            <a:avLst/>
+          </a:prstGeom>
+          <a:solidFill>
+            <a:srgbClr val="2563EB">
+              <a:alpha val="90000"/>
+            </a:srgbClr>
+          </a:solidFill>
+          <a:ln/>
+        </p:spPr>
+      </p:sp>
+      <p:sp>
+        <p:nvSpPr>
+          <p:cNvPr id="23" name="Text 21"/>
+          <p:cNvSpPr/>
+          <p:nvPr/>
+        </p:nvSpPr>
+        <p:spPr>
+          <a:xfrm>
+            <a:off x="5029200" y="2743200"/>
+            <a:ext cx="3291840" cy="640080"/>
+          </a:xfrm>
+          <a:prstGeom prst="rect">
+            <a:avLst/>
+          </a:prstGeom>
+          <a:noFill/>
+          <a:ln/>
+        </p:spPr>
+        <p:txBody>
+          <a:bodyPr wrap="square" rtlCol="0" anchor="ctr"/>
+          <a:lstStyle/>
+          <a:p>
+            <a:pPr indent="0" marL="0">
+              <a:buNone/>
+            </a:pPr>
+            <a:r>
+              <a:rPr lang="en-US" sz="1100" b="1" dirty="0">
+                <a:solidFill>
+                  <a:srgbClr val="2563EB"/>
+                </a:solidFill>
+              </a:rPr>
+              <a:t>我们的做法：</a:t>
+            </a:r>
+            <a:pPr indent="0" marL="0">
+              <a:buNone/>
+            </a:pPr>
+            <a:r>
+              <a:rPr lang="en-US" sz="1200" dirty="0">
+                <a:solidFill>
+                  <a:srgbClr val="1E293B"/>
+                </a:solidFill>
+              </a:rPr>
+              <a:t>给AI划好'能走的路'</a:t>
+            </a:r>
+            <a:endParaRPr lang="en-US" sz="1100" dirty="0"/>
+          </a:p>
+        </p:txBody>
+      </p:sp>
+      <p:sp>
+        <p:nvSpPr>
+          <p:cNvPr id="24" name="Text 22"/>
+          <p:cNvSpPr/>
+          <p:nvPr/>
+        </p:nvSpPr>
+        <p:spPr>
+          <a:xfrm>
+            <a:off x="4846320" y="3474720"/>
+            <a:ext cx="3474720" cy="1005840"/>
           </a:xfrm>
           <a:prstGeom prst="rect">
             <a:avLst/>
@@ -8532,31 +8907,31 @@
             <a:pPr indent="0" marL="0">
               <a:buNone/>
             </a:pPr>
-            <a:r>
-              <a:rPr lang="en-US" sz="1200" i="1" dirty="0">
-                <a:solidFill>
-                  <a:srgbClr val="475569"/>
+            <a:endParaRPr lang="en-US" sz="400" dirty="0"/>
+          </a:p>
+          <a:p>
+            <a:pPr indent="0" marL="0">
+              <a:buNone/>
+            </a:pPr>
+            <a:r>
+              <a:rPr lang="en-US" sz="1100" b="1" dirty="0">
+                <a:solidFill>
+                  <a:srgbClr val="2563EB"/>
                 </a:solidFill>
                 <a:latin typeface="Calibri" pitchFamily="34" charset="0"/>
                 <a:ea typeface="Calibri" pitchFamily="34" charset="-122"/>
                 <a:cs typeface="Calibri" pitchFamily="34" charset="-120"/>
               </a:rPr>
-              <a:t>RAG gives LLMs more text context</a:t>
-            </a:r>
-            <a:endParaRPr lang="en-US" sz="1200" dirty="0"/>
+              <a:t>与 Stanford CS224V 理念一致</a:t>
+            </a:r>
+            <a:endParaRPr lang="en-US" sz="400" dirty="0"/>
           </a:p>
           <a:p>
             <a:pPr indent="0" marL="0">
               <a:buNone/>
             </a:pPr>
-            <a:endParaRPr lang="en-US" sz="1200" dirty="0"/>
-          </a:p>
-          <a:p>
-            <a:pPr indent="0" marL="0">
-              <a:buNone/>
-            </a:pPr>
-            <a:r>
-              <a:rPr lang="en-US" sz="1200" b="1" dirty="0">
+            <a:r>
+              <a:rPr lang="en-US" sz="1000" dirty="0">
                 <a:solidFill>
                   <a:srgbClr val="1E293B"/>
                 </a:solidFill>
@@ -8564,139 +8939,29 @@
                 <a:ea typeface="Calibri" pitchFamily="34" charset="-122"/>
                 <a:cs typeface="Calibri" pitchFamily="34" charset="-120"/>
               </a:rPr>
-              <a:t>Ontology constraint enforces LLMs</a:t>
-            </a:r>
-            <a:endParaRPr lang="en-US" sz="1200" dirty="0"/>
-          </a:p>
-          <a:p>
+              <a:t>"计算思维 + 大模型"——用精确算法约束AI</a:t>
+            </a:r>
             <a:pPr indent="0" marL="0">
               <a:buNone/>
             </a:pPr>
-            <a:r>
-              <a:rPr lang="en-US" sz="1200" b="1" dirty="0">
-                <a:solidFill>
-                  <a:srgbClr val="1E293B"/>
+            <a:endParaRPr lang="en-US" sz="400" dirty="0"/>
+          </a:p>
+          <a:p>
+            <a:pPr indent="0" marL="0">
+              <a:buNone/>
+            </a:pPr>
+            <a:r>
+              <a:rPr lang="en-US" sz="900" i="1" dirty="0">
+                <a:solidFill>
+                  <a:srgbClr val="475569"/>
                 </a:solidFill>
                 <a:latin typeface="Calibri" pitchFamily="34" charset="0"/>
                 <a:ea typeface="Calibri" pitchFamily="34" charset="-122"/>
                 <a:cs typeface="Calibri" pitchFamily="34" charset="-120"/>
               </a:rPr>
-              <a:t>to follow validated reasoning paths</a:t>
-            </a:r>
-            <a:endParaRPr lang="en-US" sz="1200" dirty="0"/>
-          </a:p>
-          <a:p>
-            <a:pPr indent="0" marL="0">
-              <a:buNone/>
-            </a:pPr>
-            <a:endParaRPr lang="en-US" sz="1200" dirty="0"/>
-          </a:p>
-          <a:p>
-            <a:pPr indent="0" marL="0">
-              <a:buNone/>
-            </a:pPr>
-            <a:r>
-              <a:rPr lang="en-US" sz="1100" i="1" dirty="0">
-                <a:solidFill>
-                  <a:srgbClr val="2563EB"/>
-                </a:solidFill>
-                <a:latin typeface="Calibri" pitchFamily="34" charset="0"/>
-                <a:ea typeface="Calibri" pitchFamily="34" charset="-122"/>
-                <a:cs typeface="Calibri" pitchFamily="34" charset="-120"/>
-              </a:rPr>
-              <a:t>与 Stanford CS224V 理念一致：</a:t>
-            </a:r>
-            <a:endParaRPr lang="en-US" sz="1200" dirty="0"/>
-          </a:p>
-          <a:p>
-            <a:pPr indent="0" marL="0">
-              <a:buNone/>
-            </a:pPr>
-            <a:r>
-              <a:rPr lang="en-US" sz="1100" dirty="0">
-                <a:solidFill>
-                  <a:srgbClr val="1E293B"/>
-                </a:solidFill>
-                <a:latin typeface="Calibri" pitchFamily="34" charset="0"/>
-                <a:ea typeface="Calibri" pitchFamily="34" charset="-122"/>
-                <a:cs typeface="Calibri" pitchFamily="34" charset="-120"/>
-              </a:rPr>
-              <a:t>"Computational Thinking + LLM"</a:t>
-            </a:r>
-            <a:endParaRPr lang="en-US" sz="1200" dirty="0"/>
-          </a:p>
-          <a:p>
-            <a:pPr indent="0" marL="0">
-              <a:buNone/>
-            </a:pPr>
-            <a:r>
-              <a:rPr lang="en-US" sz="1100" dirty="0">
-                <a:solidFill>
-                  <a:srgbClr val="1E293B"/>
-                </a:solidFill>
-                <a:latin typeface="Calibri" pitchFamily="34" charset="0"/>
-                <a:ea typeface="Calibri" pitchFamily="34" charset="-122"/>
-                <a:cs typeface="Calibri" pitchFamily="34" charset="-120"/>
-              </a:rPr>
-              <a:t>Augment LLMs with algorithms,</a:t>
-            </a:r>
-            <a:endParaRPr lang="en-US" sz="1200" dirty="0"/>
-          </a:p>
-          <a:p>
-            <a:pPr indent="0" marL="0">
-              <a:buNone/>
-            </a:pPr>
-            <a:r>
-              <a:rPr lang="en-US" sz="1100" dirty="0">
-                <a:solidFill>
-                  <a:srgbClr val="1E293B"/>
-                </a:solidFill>
-                <a:latin typeface="Calibri" pitchFamily="34" charset="0"/>
-                <a:ea typeface="Calibri" pitchFamily="34" charset="-122"/>
-                <a:cs typeface="Calibri" pitchFamily="34" charset="-120"/>
-              </a:rPr>
-              <a:t>data representation, decomposition</a:t>
-            </a:r>
-            <a:endParaRPr lang="en-US" sz="1200" dirty="0"/>
-          </a:p>
-        </p:txBody>
-      </p:sp>
-      <p:sp>
-        <p:nvSpPr>
-          <p:cNvPr id="19" name="Text 17"/>
-          <p:cNvSpPr/>
-          <p:nvPr/>
-        </p:nvSpPr>
-        <p:spPr>
-          <a:xfrm>
-            <a:off x="548640" y="4663440"/>
-            <a:ext cx="8046720" cy="274320"/>
-          </a:xfrm>
-          <a:prstGeom prst="rect">
-            <a:avLst/>
-          </a:prstGeom>
-          <a:noFill/>
-          <a:ln/>
-        </p:spPr>
-        <p:txBody>
-          <a:bodyPr wrap="square" lIns="0" tIns="0" rIns="0" bIns="0" rtlCol="0" anchor="ctr"/>
-          <a:lstStyle/>
-          <a:p>
-            <a:pPr indent="0" marL="0">
-              <a:buNone/>
-            </a:pPr>
-            <a:r>
-              <a:rPr lang="en-US" sz="800" i="1" dirty="0">
-                <a:solidFill>
-                  <a:srgbClr val="475569"/>
-                </a:solidFill>
-                <a:latin typeface="Calibri" pitchFamily="34" charset="0"/>
-                <a:ea typeface="Calibri" pitchFamily="34" charset="-122"/>
-                <a:cs typeface="Calibri" pitchFamily="34" charset="-120"/>
-              </a:rPr>
-              <a:t>Ref: Gruber (1993); Guarino et al. (2009); Semnani et al. (2023) WikiChat — 97% accuracy</a:t>
-            </a:r>
-            <a:endParaRPr lang="en-US" sz="800" dirty="0"/>
+              <a:t>参考：WikiChat → 多步校验达 97% 准确率</a:t>
+            </a:r>
+            <a:endParaRPr lang="en-US" sz="400" dirty="0"/>
           </a:p>
         </p:txBody>
       </p:sp>
@@ -8785,7 +9050,7 @@
                 <a:ea typeface="Arial" pitchFamily="34" charset="-122"/>
                 <a:cs typeface="Arial" pitchFamily="34" charset="-120"/>
               </a:rPr>
-              <a:t>Multi-Agent 系统架构</a:t>
+              <a:t>多Agent协作的系统长这样</a:t>
             </a:r>
             <a:endParaRPr lang="en-US" sz="2800" dirty="0"/>
           </a:p>
@@ -8824,7 +9089,7 @@
                 <a:ea typeface="Calibri" pitchFamily="34" charset="-122"/>
                 <a:cs typeface="Calibri" pitchFamily="34" charset="-120"/>
               </a:rPr>
-              <a:t>LangGraph 编排 · 五 Agent 协作</a:t>
+              <a:t>五个Agent · 分工明确 · 链路可追踪</a:t>
             </a:r>
             <a:endParaRPr lang="en-US" sz="1400" dirty="0"/>
           </a:p>
@@ -8859,23 +9124,23 @@
         <p:spPr>
           <a:xfrm>
             <a:off x="457200" y="1371600"/>
-            <a:ext cx="1280160" cy="914400"/>
-          </a:xfrm>
-          <a:prstGeom prst="rect">
-            <a:avLst/>
-          </a:prstGeom>
-          <a:noFill/>
-          <a:ln/>
-        </p:spPr>
-        <p:txBody>
-          <a:bodyPr wrap="square" rtlCol="0" anchor="ctr"/>
+            <a:ext cx="1280160" cy="548640"/>
+          </a:xfrm>
+          <a:prstGeom prst="rect">
+            <a:avLst/>
+          </a:prstGeom>
+          <a:noFill/>
+          <a:ln/>
+        </p:spPr>
+        <p:txBody>
+          <a:bodyPr wrap="square" lIns="0" tIns="0" rIns="0" bIns="0" rtlCol="0" anchor="b"/>
           <a:lstStyle/>
           <a:p>
             <a:pPr algn="ctr" indent="0" marL="0">
               <a:buNone/>
             </a:pPr>
             <a:r>
-              <a:rPr lang="en-US" sz="1100" b="1" dirty="0">
+              <a:rPr lang="en-US" sz="1200" b="1" dirty="0">
                 <a:solidFill>
                   <a:srgbClr val="FFFFFF"/>
                 </a:solidFill>
@@ -8883,32 +9148,56 @@
                 <a:ea typeface="Calibri" pitchFamily="34" charset="-122"/>
                 <a:cs typeface="Calibri" pitchFamily="34" charset="-120"/>
               </a:rPr>
-              <a:t>Query</a:t>
-            </a:r>
-            <a:endParaRPr lang="en-US" sz="1100" dirty="0"/>
-          </a:p>
+              <a:t>意图解析</a:t>
+            </a:r>
+            <a:endParaRPr lang="en-US" sz="1200" dirty="0"/>
+          </a:p>
+        </p:txBody>
+      </p:sp>
+      <p:sp>
+        <p:nvSpPr>
+          <p:cNvPr id="7" name="Text 5"/>
+          <p:cNvSpPr/>
+          <p:nvPr/>
+        </p:nvSpPr>
+        <p:spPr>
+          <a:xfrm>
+            <a:off x="457200" y="1874520"/>
+            <a:ext cx="1280160" cy="365760"/>
+          </a:xfrm>
+          <a:prstGeom prst="rect">
+            <a:avLst/>
+          </a:prstGeom>
+          <a:noFill/>
+          <a:ln/>
+        </p:spPr>
+        <p:txBody>
+          <a:bodyPr wrap="square" lIns="0" tIns="0" rIns="0" bIns="0" rtlCol="0" anchor="t"/>
+          <a:lstStyle/>
           <a:p>
             <a:pPr algn="ctr" indent="0" marL="0">
               <a:buNone/>
             </a:pPr>
             <a:r>
-              <a:rPr lang="en-US" sz="1100" b="1" dirty="0">
-                <a:solidFill>
-                  <a:srgbClr val="FFFFFF"/>
+              <a:rPr lang="en-US" sz="800" i="1" dirty="0">
+                <a:solidFill>
+                  <a:srgbClr val="FFFFFF">
+                    <a:alpha val="70000"/>
+                  </a:srgbClr>
                 </a:solidFill>
                 <a:latin typeface="Calibri" pitchFamily="34" charset="0"/>
                 <a:ea typeface="Calibri" pitchFamily="34" charset="-122"/>
                 <a:cs typeface="Calibri" pitchFamily="34" charset="-120"/>
               </a:rPr>
-              <a:t>Parser</a:t>
-            </a:r>
-            <a:endParaRPr lang="en-US" sz="1100" dirty="0"/>
-          </a:p>
-        </p:txBody>
-      </p:sp>
-      <p:sp>
-        <p:nvSpPr>
-          <p:cNvPr id="7" name="Shape 5"/>
+              <a:t>Query Parser</a:t>
+            </a:r>
+            <a:endParaRPr lang="en-US" sz="800" dirty="0"/>
+          </a:p>
+        </p:txBody>
+      </p:sp>
+      <p:sp>
+        <p:nvSpPr>
+          <p:cNvPr id="8" name="Shape 6"/>
           <p:cNvSpPr/>
           <p:nvPr/>
         </p:nvSpPr>
@@ -8928,30 +9217,30 @@
       </p:sp>
       <p:sp>
         <p:nvSpPr>
-          <p:cNvPr id="8" name="Text 6"/>
+          <p:cNvPr id="9" name="Text 7"/>
           <p:cNvSpPr/>
           <p:nvPr/>
         </p:nvSpPr>
         <p:spPr>
           <a:xfrm>
             <a:off x="2194560" y="1371600"/>
-            <a:ext cx="1280160" cy="914400"/>
-          </a:xfrm>
-          <a:prstGeom prst="rect">
-            <a:avLst/>
-          </a:prstGeom>
-          <a:noFill/>
-          <a:ln/>
-        </p:spPr>
-        <p:txBody>
-          <a:bodyPr wrap="square" rtlCol="0" anchor="ctr"/>
+            <a:ext cx="1280160" cy="548640"/>
+          </a:xfrm>
+          <a:prstGeom prst="rect">
+            <a:avLst/>
+          </a:prstGeom>
+          <a:noFill/>
+          <a:ln/>
+        </p:spPr>
+        <p:txBody>
+          <a:bodyPr wrap="square" lIns="0" tIns="0" rIns="0" bIns="0" rtlCol="0" anchor="b"/>
           <a:lstStyle/>
           <a:p>
             <a:pPr algn="ctr" indent="0" marL="0">
               <a:buNone/>
             </a:pPr>
             <a:r>
-              <a:rPr lang="en-US" sz="1100" b="1" dirty="0">
+              <a:rPr lang="en-US" sz="1200" b="1" dirty="0">
                 <a:solidFill>
                   <a:srgbClr val="FFFFFF"/>
                 </a:solidFill>
@@ -8959,32 +9248,56 @@
                 <a:ea typeface="Calibri" pitchFamily="34" charset="-122"/>
                 <a:cs typeface="Calibri" pitchFamily="34" charset="-120"/>
               </a:rPr>
-              <a:t>Hybrid</a:t>
-            </a:r>
-            <a:endParaRPr lang="en-US" sz="1100" dirty="0"/>
-          </a:p>
+              <a:t>混合检索</a:t>
+            </a:r>
+            <a:endParaRPr lang="en-US" sz="1200" dirty="0"/>
+          </a:p>
+        </p:txBody>
+      </p:sp>
+      <p:sp>
+        <p:nvSpPr>
+          <p:cNvPr id="10" name="Text 8"/>
+          <p:cNvSpPr/>
+          <p:nvPr/>
+        </p:nvSpPr>
+        <p:spPr>
+          <a:xfrm>
+            <a:off x="2194560" y="1874520"/>
+            <a:ext cx="1280160" cy="365760"/>
+          </a:xfrm>
+          <a:prstGeom prst="rect">
+            <a:avLst/>
+          </a:prstGeom>
+          <a:noFill/>
+          <a:ln/>
+        </p:spPr>
+        <p:txBody>
+          <a:bodyPr wrap="square" lIns="0" tIns="0" rIns="0" bIns="0" rtlCol="0" anchor="t"/>
+          <a:lstStyle/>
           <a:p>
             <a:pPr algn="ctr" indent="0" marL="0">
               <a:buNone/>
             </a:pPr>
             <a:r>
-              <a:rPr lang="en-US" sz="1100" b="1" dirty="0">
-                <a:solidFill>
-                  <a:srgbClr val="FFFFFF"/>
+              <a:rPr lang="en-US" sz="800" i="1" dirty="0">
+                <a:solidFill>
+                  <a:srgbClr val="FFFFFF">
+                    <a:alpha val="70000"/>
+                  </a:srgbClr>
                 </a:solidFill>
                 <a:latin typeface="Calibri" pitchFamily="34" charset="0"/>
                 <a:ea typeface="Calibri" pitchFamily="34" charset="-122"/>
                 <a:cs typeface="Calibri" pitchFamily="34" charset="-120"/>
               </a:rPr>
-              <a:t>Retrieval</a:t>
-            </a:r>
-            <a:endParaRPr lang="en-US" sz="1100" dirty="0"/>
-          </a:p>
-        </p:txBody>
-      </p:sp>
-      <p:sp>
-        <p:nvSpPr>
-          <p:cNvPr id="9" name="Shape 7"/>
+              <a:t>BGE+BM25</a:t>
+            </a:r>
+            <a:endParaRPr lang="en-US" sz="800" dirty="0"/>
+          </a:p>
+        </p:txBody>
+      </p:sp>
+      <p:sp>
+        <p:nvSpPr>
+          <p:cNvPr id="11" name="Shape 9"/>
           <p:cNvSpPr/>
           <p:nvPr/>
         </p:nvSpPr>
@@ -9004,30 +9317,30 @@
       </p:sp>
       <p:sp>
         <p:nvSpPr>
-          <p:cNvPr id="10" name="Text 8"/>
+          <p:cNvPr id="12" name="Text 10"/>
           <p:cNvSpPr/>
           <p:nvPr/>
         </p:nvSpPr>
         <p:spPr>
           <a:xfrm>
             <a:off x="3931920" y="1371600"/>
-            <a:ext cx="1280160" cy="914400"/>
-          </a:xfrm>
-          <a:prstGeom prst="rect">
-            <a:avLst/>
-          </a:prstGeom>
-          <a:noFill/>
-          <a:ln/>
-        </p:spPr>
-        <p:txBody>
-          <a:bodyPr wrap="square" rtlCol="0" anchor="ctr"/>
+            <a:ext cx="1280160" cy="548640"/>
+          </a:xfrm>
+          <a:prstGeom prst="rect">
+            <a:avLst/>
+          </a:prstGeom>
+          <a:noFill/>
+          <a:ln/>
+        </p:spPr>
+        <p:txBody>
+          <a:bodyPr wrap="square" lIns="0" tIns="0" rIns="0" bIns="0" rtlCol="0" anchor="b"/>
           <a:lstStyle/>
           <a:p>
             <a:pPr algn="ctr" indent="0" marL="0">
               <a:buNone/>
             </a:pPr>
             <a:r>
-              <a:rPr lang="en-US" sz="1100" b="1" dirty="0">
+              <a:rPr lang="en-US" sz="1200" b="1" dirty="0">
                 <a:solidFill>
                   <a:srgbClr val="FFFFFF"/>
                 </a:solidFill>
@@ -9035,32 +9348,56 @@
                 <a:ea typeface="Calibri" pitchFamily="34" charset="-122"/>
                 <a:cs typeface="Calibri" pitchFamily="34" charset="-120"/>
               </a:rPr>
-              <a:t>Ontology</a:t>
-            </a:r>
-            <a:endParaRPr lang="en-US" sz="1100" dirty="0"/>
-          </a:p>
+              <a:t>本体对齐</a:t>
+            </a:r>
+            <a:endParaRPr lang="en-US" sz="1200" dirty="0"/>
+          </a:p>
+        </p:txBody>
+      </p:sp>
+      <p:sp>
+        <p:nvSpPr>
+          <p:cNvPr id="13" name="Text 11"/>
+          <p:cNvSpPr/>
+          <p:nvPr/>
+        </p:nvSpPr>
+        <p:spPr>
+          <a:xfrm>
+            <a:off x="3931920" y="1874520"/>
+            <a:ext cx="1280160" cy="365760"/>
+          </a:xfrm>
+          <a:prstGeom prst="rect">
+            <a:avLst/>
+          </a:prstGeom>
+          <a:noFill/>
+          <a:ln/>
+        </p:spPr>
+        <p:txBody>
+          <a:bodyPr wrap="square" lIns="0" tIns="0" rIns="0" bIns="0" rtlCol="0" anchor="t"/>
+          <a:lstStyle/>
           <a:p>
             <a:pPr algn="ctr" indent="0" marL="0">
               <a:buNone/>
             </a:pPr>
             <a:r>
-              <a:rPr lang="en-US" sz="1100" b="1" dirty="0">
-                <a:solidFill>
-                  <a:srgbClr val="FFFFFF"/>
+              <a:rPr lang="en-US" sz="800" i="1" dirty="0">
+                <a:solidFill>
+                  <a:srgbClr val="FFFFFF">
+                    <a:alpha val="70000"/>
+                  </a:srgbClr>
                 </a:solidFill>
                 <a:latin typeface="Calibri" pitchFamily="34" charset="0"/>
                 <a:ea typeface="Calibri" pitchFamily="34" charset="-122"/>
                 <a:cs typeface="Calibri" pitchFamily="34" charset="-120"/>
               </a:rPr>
-              <a:t>Alignment</a:t>
-            </a:r>
-            <a:endParaRPr lang="en-US" sz="1100" dirty="0"/>
-          </a:p>
-        </p:txBody>
-      </p:sp>
-      <p:sp>
-        <p:nvSpPr>
-          <p:cNvPr id="11" name="Shape 9"/>
+              <a:t>Ontology Alignment</a:t>
+            </a:r>
+            <a:endParaRPr lang="en-US" sz="800" dirty="0"/>
+          </a:p>
+        </p:txBody>
+      </p:sp>
+      <p:sp>
+        <p:nvSpPr>
+          <p:cNvPr id="14" name="Shape 12"/>
           <p:cNvSpPr/>
           <p:nvPr/>
         </p:nvSpPr>
@@ -9080,30 +9417,30 @@
       </p:sp>
       <p:sp>
         <p:nvSpPr>
-          <p:cNvPr id="12" name="Text 10"/>
+          <p:cNvPr id="15" name="Text 13"/>
           <p:cNvSpPr/>
           <p:nvPr/>
         </p:nvSpPr>
         <p:spPr>
           <a:xfrm>
             <a:off x="5669280" y="1371600"/>
-            <a:ext cx="1280160" cy="914400"/>
-          </a:xfrm>
-          <a:prstGeom prst="rect">
-            <a:avLst/>
-          </a:prstGeom>
-          <a:noFill/>
-          <a:ln/>
-        </p:spPr>
-        <p:txBody>
-          <a:bodyPr wrap="square" rtlCol="0" anchor="ctr"/>
+            <a:ext cx="1280160" cy="548640"/>
+          </a:xfrm>
+          <a:prstGeom prst="rect">
+            <a:avLst/>
+          </a:prstGeom>
+          <a:noFill/>
+          <a:ln/>
+        </p:spPr>
+        <p:txBody>
+          <a:bodyPr wrap="square" lIns="0" tIns="0" rIns="0" bIns="0" rtlCol="0" anchor="b"/>
           <a:lstStyle/>
           <a:p>
             <a:pPr algn="ctr" indent="0" marL="0">
               <a:buNone/>
             </a:pPr>
             <a:r>
-              <a:rPr lang="en-US" sz="1100" b="1" dirty="0">
+              <a:rPr lang="en-US" sz="1200" b="1" dirty="0">
                 <a:solidFill>
                   <a:srgbClr val="FFFFFF"/>
                 </a:solidFill>
@@ -9111,32 +9448,56 @@
                 <a:ea typeface="Calibri" pitchFamily="34" charset="-122"/>
                 <a:cs typeface="Calibri" pitchFamily="34" charset="-120"/>
               </a:rPr>
-              <a:t>Constrained</a:t>
-            </a:r>
-            <a:endParaRPr lang="en-US" sz="1100" dirty="0"/>
-          </a:p>
+              <a:t>约束推理</a:t>
+            </a:r>
+            <a:endParaRPr lang="en-US" sz="1200" dirty="0"/>
+          </a:p>
+        </p:txBody>
+      </p:sp>
+      <p:sp>
+        <p:nvSpPr>
+          <p:cNvPr id="16" name="Text 14"/>
+          <p:cNvSpPr/>
+          <p:nvPr/>
+        </p:nvSpPr>
+        <p:spPr>
+          <a:xfrm>
+            <a:off x="5669280" y="1874520"/>
+            <a:ext cx="1280160" cy="365760"/>
+          </a:xfrm>
+          <a:prstGeom prst="rect">
+            <a:avLst/>
+          </a:prstGeom>
+          <a:noFill/>
+          <a:ln/>
+        </p:spPr>
+        <p:txBody>
+          <a:bodyPr wrap="square" lIns="0" tIns="0" rIns="0" bIns="0" rtlCol="0" anchor="t"/>
+          <a:lstStyle/>
           <a:p>
             <a:pPr algn="ctr" indent="0" marL="0">
               <a:buNone/>
             </a:pPr>
             <a:r>
-              <a:rPr lang="en-US" sz="1100" b="1" dirty="0">
-                <a:solidFill>
-                  <a:srgbClr val="FFFFFF"/>
+              <a:rPr lang="en-US" sz="800" i="1" dirty="0">
+                <a:solidFill>
+                  <a:srgbClr val="FFFFFF">
+                    <a:alpha val="70000"/>
+                  </a:srgbClr>
                 </a:solidFill>
                 <a:latin typeface="Calibri" pitchFamily="34" charset="0"/>
                 <a:ea typeface="Calibri" pitchFamily="34" charset="-122"/>
                 <a:cs typeface="Calibri" pitchFamily="34" charset="-120"/>
               </a:rPr>
-              <a:t>Reasoning</a:t>
-            </a:r>
-            <a:endParaRPr lang="en-US" sz="1100" dirty="0"/>
-          </a:p>
-        </p:txBody>
-      </p:sp>
-      <p:sp>
-        <p:nvSpPr>
-          <p:cNvPr id="13" name="Shape 11"/>
+              <a:t>Constrained Reasoning</a:t>
+            </a:r>
+            <a:endParaRPr lang="en-US" sz="800" dirty="0"/>
+          </a:p>
+        </p:txBody>
+      </p:sp>
+      <p:sp>
+        <p:nvSpPr>
+          <p:cNvPr id="17" name="Shape 15"/>
           <p:cNvSpPr/>
           <p:nvPr/>
         </p:nvSpPr>
@@ -9156,30 +9517,30 @@
       </p:sp>
       <p:sp>
         <p:nvSpPr>
-          <p:cNvPr id="14" name="Text 12"/>
+          <p:cNvPr id="18" name="Text 16"/>
           <p:cNvSpPr/>
           <p:nvPr/>
         </p:nvSpPr>
         <p:spPr>
           <a:xfrm>
             <a:off x="7406640" y="1371600"/>
-            <a:ext cx="1280160" cy="914400"/>
-          </a:xfrm>
-          <a:prstGeom prst="rect">
-            <a:avLst/>
-          </a:prstGeom>
-          <a:noFill/>
-          <a:ln/>
-        </p:spPr>
-        <p:txBody>
-          <a:bodyPr wrap="square" rtlCol="0" anchor="ctr"/>
+            <a:ext cx="1280160" cy="548640"/>
+          </a:xfrm>
+          <a:prstGeom prst="rect">
+            <a:avLst/>
+          </a:prstGeom>
+          <a:noFill/>
+          <a:ln/>
+        </p:spPr>
+        <p:txBody>
+          <a:bodyPr wrap="square" lIns="0" tIns="0" rIns="0" bIns="0" rtlCol="0" anchor="b"/>
           <a:lstStyle/>
           <a:p>
             <a:pPr algn="ctr" indent="0" marL="0">
               <a:buNone/>
             </a:pPr>
             <a:r>
-              <a:rPr lang="en-US" sz="1100" b="1" dirty="0">
+              <a:rPr lang="en-US" sz="1200" b="1" dirty="0">
                 <a:solidFill>
                   <a:srgbClr val="FFFFFF"/>
                 </a:solidFill>
@@ -9187,32 +9548,56 @@
                 <a:ea typeface="Calibri" pitchFamily="34" charset="-122"/>
                 <a:cs typeface="Calibri" pitchFamily="34" charset="-120"/>
               </a:rPr>
-              <a:t>Consistency</a:t>
-            </a:r>
-            <a:endParaRPr lang="en-US" sz="1100" dirty="0"/>
-          </a:p>
+              <a:t>一致性校验</a:t>
+            </a:r>
+            <a:endParaRPr lang="en-US" sz="1200" dirty="0"/>
+          </a:p>
+        </p:txBody>
+      </p:sp>
+      <p:sp>
+        <p:nvSpPr>
+          <p:cNvPr id="19" name="Text 17"/>
+          <p:cNvSpPr/>
+          <p:nvPr/>
+        </p:nvSpPr>
+        <p:spPr>
+          <a:xfrm>
+            <a:off x="7406640" y="1874520"/>
+            <a:ext cx="1280160" cy="365760"/>
+          </a:xfrm>
+          <a:prstGeom prst="rect">
+            <a:avLst/>
+          </a:prstGeom>
+          <a:noFill/>
+          <a:ln/>
+        </p:spPr>
+        <p:txBody>
+          <a:bodyPr wrap="square" lIns="0" tIns="0" rIns="0" bIns="0" rtlCol="0" anchor="t"/>
+          <a:lstStyle/>
           <a:p>
             <a:pPr algn="ctr" indent="0" marL="0">
               <a:buNone/>
             </a:pPr>
             <a:r>
-              <a:rPr lang="en-US" sz="1100" b="1" dirty="0">
-                <a:solidFill>
-                  <a:srgbClr val="FFFFFF"/>
+              <a:rPr lang="en-US" sz="800" i="1" dirty="0">
+                <a:solidFill>
+                  <a:srgbClr val="FFFFFF">
+                    <a:alpha val="70000"/>
+                  </a:srgbClr>
                 </a:solidFill>
                 <a:latin typeface="Calibri" pitchFamily="34" charset="0"/>
                 <a:ea typeface="Calibri" pitchFamily="34" charset="-122"/>
                 <a:cs typeface="Calibri" pitchFamily="34" charset="-120"/>
               </a:rPr>
-              <a:t>Check</a:t>
-            </a:r>
-            <a:endParaRPr lang="en-US" sz="1100" dirty="0"/>
-          </a:p>
-        </p:txBody>
-      </p:sp>
-      <p:sp>
-        <p:nvSpPr>
-          <p:cNvPr id="15" name="Text 13"/>
+              <a:t>Consistency Check</a:t>
+            </a:r>
+            <a:endParaRPr lang="en-US" sz="800" dirty="0"/>
+          </a:p>
+        </p:txBody>
+      </p:sp>
+      <p:sp>
+        <p:nvSpPr>
+          <p:cNvPr id="20" name="Text 18"/>
           <p:cNvSpPr/>
           <p:nvPr/>
         </p:nvSpPr>
@@ -9248,7 +9633,7 @@
       </p:sp>
       <p:sp>
         <p:nvSpPr>
-          <p:cNvPr id="16" name="Text 14"/>
+          <p:cNvPr id="21" name="Text 19"/>
           <p:cNvSpPr/>
           <p:nvPr/>
         </p:nvSpPr>
@@ -9284,7 +9669,7 @@
       </p:sp>
       <p:sp>
         <p:nvSpPr>
-          <p:cNvPr id="17" name="Text 15"/>
+          <p:cNvPr id="22" name="Text 20"/>
           <p:cNvSpPr/>
           <p:nvPr/>
         </p:nvSpPr>
@@ -9320,7 +9705,7 @@
       </p:sp>
       <p:sp>
         <p:nvSpPr>
-          <p:cNvPr id="18" name="Text 16"/>
+          <p:cNvPr id="23" name="Text 21"/>
           <p:cNvSpPr/>
           <p:nvPr/>
         </p:nvSpPr>
@@ -9356,14 +9741,14 @@
       </p:sp>
       <p:sp>
         <p:nvSpPr>
-          <p:cNvPr id="19" name="Shape 17"/>
+          <p:cNvPr id="24" name="Shape 22"/>
           <p:cNvSpPr/>
           <p:nvPr/>
         </p:nvSpPr>
         <p:spPr>
           <a:xfrm>
             <a:off x="457200" y="2560320"/>
-            <a:ext cx="1371600" cy="1828800"/>
+            <a:ext cx="1280160" cy="1463040"/>
           </a:xfrm>
           <a:prstGeom prst="rect">
             <a:avLst/>
@@ -9383,14 +9768,14 @@
       </p:sp>
       <p:sp>
         <p:nvSpPr>
-          <p:cNvPr id="20" name="Shape 18"/>
+          <p:cNvPr id="25" name="Shape 23"/>
           <p:cNvSpPr/>
           <p:nvPr/>
         </p:nvSpPr>
         <p:spPr>
           <a:xfrm>
             <a:off x="457200" y="2560320"/>
-            <a:ext cx="1371600" cy="36576"/>
+            <a:ext cx="1280160" cy="36576"/>
           </a:xfrm>
           <a:prstGeom prst="rect">
             <a:avLst/>
@@ -9403,14 +9788,14 @@
       </p:sp>
       <p:sp>
         <p:nvSpPr>
-          <p:cNvPr id="21" name="Text 19"/>
-          <p:cNvSpPr/>
-          <p:nvPr/>
-        </p:nvSpPr>
-        <p:spPr>
-          <a:xfrm>
-            <a:off x="548640" y="2743200"/>
-            <a:ext cx="1188720" cy="1371600"/>
+          <p:cNvPr id="26" name="Text 24"/>
+          <p:cNvSpPr/>
+          <p:nvPr/>
+        </p:nvSpPr>
+        <p:spPr>
+          <a:xfrm>
+            <a:off x="548640" y="2697480"/>
+            <a:ext cx="1097280" cy="1188720"/>
           </a:xfrm>
           <a:prstGeom prst="rect">
             <a:avLst/>
@@ -9434,7 +9819,7 @@
                 <a:ea typeface="Calibri" pitchFamily="34" charset="-122"/>
                 <a:cs typeface="Calibri" pitchFamily="34" charset="-120"/>
               </a:rPr>
-              <a:t>Parse user</a:t>
+              <a:t>理解用户意图</a:t>
             </a:r>
             <a:endParaRPr lang="en-US" sz="1000" dirty="0"/>
           </a:p>
@@ -9451,7 +9836,7 @@
                 <a:ea typeface="Calibri" pitchFamily="34" charset="-122"/>
                 <a:cs typeface="Calibri" pitchFamily="34" charset="-120"/>
               </a:rPr>
-              <a:t>intent &amp; query</a:t>
+              <a:t>解析查询</a:t>
             </a:r>
             <a:endParaRPr lang="en-US" sz="1000" dirty="0"/>
           </a:p>
@@ -9459,14 +9844,14 @@
       </p:sp>
       <p:sp>
         <p:nvSpPr>
-          <p:cNvPr id="22" name="Shape 20"/>
+          <p:cNvPr id="27" name="Shape 25"/>
           <p:cNvSpPr/>
           <p:nvPr/>
         </p:nvSpPr>
         <p:spPr>
           <a:xfrm>
             <a:off x="2194560" y="2560320"/>
-            <a:ext cx="1371600" cy="1828800"/>
+            <a:ext cx="1280160" cy="1463040"/>
           </a:xfrm>
           <a:prstGeom prst="rect">
             <a:avLst/>
@@ -9486,14 +9871,14 @@
       </p:sp>
       <p:sp>
         <p:nvSpPr>
-          <p:cNvPr id="23" name="Shape 21"/>
+          <p:cNvPr id="28" name="Shape 26"/>
           <p:cNvSpPr/>
           <p:nvPr/>
         </p:nvSpPr>
         <p:spPr>
           <a:xfrm>
             <a:off x="2194560" y="2560320"/>
-            <a:ext cx="1371600" cy="36576"/>
+            <a:ext cx="1280160" cy="36576"/>
           </a:xfrm>
           <a:prstGeom prst="rect">
             <a:avLst/>
@@ -9506,14 +9891,14 @@
       </p:sp>
       <p:sp>
         <p:nvSpPr>
-          <p:cNvPr id="24" name="Text 22"/>
-          <p:cNvSpPr/>
-          <p:nvPr/>
-        </p:nvSpPr>
-        <p:spPr>
-          <a:xfrm>
-            <a:off x="2286000" y="2743200"/>
-            <a:ext cx="1188720" cy="1371600"/>
+          <p:cNvPr id="29" name="Text 27"/>
+          <p:cNvSpPr/>
+          <p:nvPr/>
+        </p:nvSpPr>
+        <p:spPr>
+          <a:xfrm>
+            <a:off x="2286000" y="2697480"/>
+            <a:ext cx="1097280" cy="1188720"/>
           </a:xfrm>
           <a:prstGeom prst="rect">
             <a:avLst/>
@@ -9537,7 +9922,7 @@
                 <a:ea typeface="Calibri" pitchFamily="34" charset="-122"/>
                 <a:cs typeface="Calibri" pitchFamily="34" charset="-120"/>
               </a:rPr>
-              <a:t>BGE + BM25</a:t>
+              <a:t>语义+关键词</a:t>
             </a:r>
             <a:endParaRPr lang="en-US" sz="1000" dirty="0"/>
           </a:p>
@@ -9554,7 +9939,7 @@
                 <a:ea typeface="Calibri" pitchFamily="34" charset="-122"/>
                 <a:cs typeface="Calibri" pitchFamily="34" charset="-120"/>
               </a:rPr>
-              <a:t>Hybrid retrieval</a:t>
+              <a:t>双路查找</a:t>
             </a:r>
             <a:endParaRPr lang="en-US" sz="1000" dirty="0"/>
           </a:p>
@@ -9562,14 +9947,14 @@
       </p:sp>
       <p:sp>
         <p:nvSpPr>
-          <p:cNvPr id="25" name="Shape 23"/>
+          <p:cNvPr id="30" name="Shape 28"/>
           <p:cNvSpPr/>
           <p:nvPr/>
         </p:nvSpPr>
         <p:spPr>
           <a:xfrm>
             <a:off x="3931920" y="2560320"/>
-            <a:ext cx="1371600" cy="1828800"/>
+            <a:ext cx="1280160" cy="1463040"/>
           </a:xfrm>
           <a:prstGeom prst="rect">
             <a:avLst/>
@@ -9589,14 +9974,14 @@
       </p:sp>
       <p:sp>
         <p:nvSpPr>
-          <p:cNvPr id="26" name="Shape 24"/>
+          <p:cNvPr id="31" name="Shape 29"/>
           <p:cNvSpPr/>
           <p:nvPr/>
         </p:nvSpPr>
         <p:spPr>
           <a:xfrm>
             <a:off x="3931920" y="2560320"/>
-            <a:ext cx="1371600" cy="36576"/>
+            <a:ext cx="1280160" cy="36576"/>
           </a:xfrm>
           <a:prstGeom prst="rect">
             <a:avLst/>
@@ -9609,14 +9994,14 @@
       </p:sp>
       <p:sp>
         <p:nvSpPr>
-          <p:cNvPr id="27" name="Text 25"/>
-          <p:cNvSpPr/>
-          <p:nvPr/>
-        </p:nvSpPr>
-        <p:spPr>
-          <a:xfrm>
-            <a:off x="4023360" y="2743200"/>
-            <a:ext cx="1188720" cy="1371600"/>
+          <p:cNvPr id="32" name="Text 30"/>
+          <p:cNvSpPr/>
+          <p:nvPr/>
+        </p:nvSpPr>
+        <p:spPr>
+          <a:xfrm>
+            <a:off x="4023360" y="2697480"/>
+            <a:ext cx="1097280" cy="1188720"/>
           </a:xfrm>
           <a:prstGeom prst="rect">
             <a:avLst/>
@@ -9640,7 +10025,7 @@
                 <a:ea typeface="Calibri" pitchFamily="34" charset="-122"/>
                 <a:cs typeface="Calibri" pitchFamily="34" charset="-120"/>
               </a:rPr>
-              <a:t>Map entities</a:t>
+              <a:t>映射实体</a:t>
             </a:r>
             <a:endParaRPr lang="en-US" sz="1000" dirty="0"/>
           </a:p>
@@ -9657,7 +10042,7 @@
                 <a:ea typeface="Calibri" pitchFamily="34" charset="-122"/>
                 <a:cs typeface="Calibri" pitchFamily="34" charset="-120"/>
               </a:rPr>
-              <a:t>to ontology</a:t>
+              <a:t>到知识结构</a:t>
             </a:r>
             <a:endParaRPr lang="en-US" sz="1000" dirty="0"/>
           </a:p>
@@ -9665,14 +10050,14 @@
       </p:sp>
       <p:sp>
         <p:nvSpPr>
-          <p:cNvPr id="28" name="Shape 26"/>
+          <p:cNvPr id="33" name="Shape 31"/>
           <p:cNvSpPr/>
           <p:nvPr/>
         </p:nvSpPr>
         <p:spPr>
           <a:xfrm>
             <a:off x="5669280" y="2560320"/>
-            <a:ext cx="1371600" cy="1828800"/>
+            <a:ext cx="1280160" cy="1463040"/>
           </a:xfrm>
           <a:prstGeom prst="rect">
             <a:avLst/>
@@ -9692,14 +10077,14 @@
       </p:sp>
       <p:sp>
         <p:nvSpPr>
-          <p:cNvPr id="29" name="Shape 27"/>
+          <p:cNvPr id="34" name="Shape 32"/>
           <p:cNvSpPr/>
           <p:nvPr/>
         </p:nvSpPr>
         <p:spPr>
           <a:xfrm>
             <a:off x="5669280" y="2560320"/>
-            <a:ext cx="1371600" cy="36576"/>
+            <a:ext cx="1280160" cy="36576"/>
           </a:xfrm>
           <a:prstGeom prst="rect">
             <a:avLst/>
@@ -9712,14 +10097,14 @@
       </p:sp>
       <p:sp>
         <p:nvSpPr>
-          <p:cNvPr id="30" name="Text 28"/>
-          <p:cNvSpPr/>
-          <p:nvPr/>
-        </p:nvSpPr>
-        <p:spPr>
-          <a:xfrm>
-            <a:off x="5760720" y="2743200"/>
-            <a:ext cx="1188720" cy="1371600"/>
+          <p:cNvPr id="35" name="Text 33"/>
+          <p:cNvSpPr/>
+          <p:nvPr/>
+        </p:nvSpPr>
+        <p:spPr>
+          <a:xfrm>
+            <a:off x="5760720" y="2697480"/>
+            <a:ext cx="1097280" cy="1188720"/>
           </a:xfrm>
           <a:prstGeom prst="rect">
             <a:avLst/>
@@ -9743,7 +10128,7 @@
                 <a:ea typeface="Calibri" pitchFamily="34" charset="-122"/>
                 <a:cs typeface="Calibri" pitchFamily="34" charset="-120"/>
               </a:rPr>
-              <a:t>Execute path</a:t>
+              <a:t>执行推理</a:t>
             </a:r>
             <a:endParaRPr lang="en-US" sz="1000" dirty="0"/>
           </a:p>
@@ -9760,7 +10145,7 @@
                 <a:ea typeface="Calibri" pitchFamily="34" charset="-122"/>
                 <a:cs typeface="Calibri" pitchFamily="34" charset="-120"/>
               </a:rPr>
-              <a:t>pruning</a:t>
+              <a:t>路径裁剪</a:t>
             </a:r>
             <a:endParaRPr lang="en-US" sz="1000" dirty="0"/>
           </a:p>
@@ -9768,14 +10153,14 @@
       </p:sp>
       <p:sp>
         <p:nvSpPr>
-          <p:cNvPr id="31" name="Shape 29"/>
+          <p:cNvPr id="36" name="Shape 34"/>
           <p:cNvSpPr/>
           <p:nvPr/>
         </p:nvSpPr>
         <p:spPr>
           <a:xfrm>
             <a:off x="7406640" y="2560320"/>
-            <a:ext cx="1371600" cy="1828800"/>
+            <a:ext cx="1280160" cy="1463040"/>
           </a:xfrm>
           <a:prstGeom prst="rect">
             <a:avLst/>
@@ -9795,14 +10180,14 @@
       </p:sp>
       <p:sp>
         <p:nvSpPr>
-          <p:cNvPr id="32" name="Shape 30"/>
+          <p:cNvPr id="37" name="Shape 35"/>
           <p:cNvSpPr/>
           <p:nvPr/>
         </p:nvSpPr>
         <p:spPr>
           <a:xfrm>
             <a:off x="7406640" y="2560320"/>
-            <a:ext cx="1371600" cy="36576"/>
+            <a:ext cx="1280160" cy="36576"/>
           </a:xfrm>
           <a:prstGeom prst="rect">
             <a:avLst/>
@@ -9815,14 +10200,14 @@
       </p:sp>
       <p:sp>
         <p:nvSpPr>
-          <p:cNvPr id="33" name="Text 31"/>
-          <p:cNvSpPr/>
-          <p:nvPr/>
-        </p:nvSpPr>
-        <p:spPr>
-          <a:xfrm>
-            <a:off x="7498080" y="2743200"/>
-            <a:ext cx="1188720" cy="1371600"/>
+          <p:cNvPr id="38" name="Text 36"/>
+          <p:cNvSpPr/>
+          <p:nvPr/>
+        </p:nvSpPr>
+        <p:spPr>
+          <a:xfrm>
+            <a:off x="7498080" y="2697480"/>
+            <a:ext cx="1097280" cy="1188720"/>
           </a:xfrm>
           <a:prstGeom prst="rect">
             <a:avLst/>
@@ -9846,7 +10231,7 @@
                 <a:ea typeface="Calibri" pitchFamily="34" charset="-122"/>
                 <a:cs typeface="Calibri" pitchFamily="34" charset="-120"/>
               </a:rPr>
-              <a:t>Verify triple</a:t>
+              <a:t>校验三元组</a:t>
             </a:r>
             <a:endParaRPr lang="en-US" sz="1000" dirty="0"/>
           </a:p>
@@ -9863,7 +10248,7 @@
                 <a:ea typeface="Calibri" pitchFamily="34" charset="-122"/>
                 <a:cs typeface="Calibri" pitchFamily="34" charset="-120"/>
               </a:rPr>
-              <a:t>whitelist</a:t>
+              <a:t>白名单过滤</a:t>
             </a:r>
             <a:endParaRPr lang="en-US" sz="1000" dirty="0"/>
           </a:p>
@@ -9871,14 +10256,14 @@
       </p:sp>
       <p:sp>
         <p:nvSpPr>
-          <p:cNvPr id="34" name="Shape 32"/>
-          <p:cNvSpPr/>
-          <p:nvPr/>
-        </p:nvSpPr>
-        <p:spPr>
-          <a:xfrm>
-            <a:off x="457200" y="4572000"/>
-            <a:ext cx="8229600" cy="457200"/>
+          <p:cNvPr id="39" name="Shape 37"/>
+          <p:cNvSpPr/>
+          <p:nvPr/>
+        </p:nvSpPr>
+        <p:spPr>
+          <a:xfrm>
+            <a:off x="457200" y="4297680"/>
+            <a:ext cx="8229600" cy="502920"/>
           </a:xfrm>
           <a:prstGeom prst="rect">
             <a:avLst/>
@@ -9891,14 +10276,14 @@
       </p:sp>
       <p:sp>
         <p:nvSpPr>
-          <p:cNvPr id="35" name="Text 33"/>
-          <p:cNvSpPr/>
-          <p:nvPr/>
-        </p:nvSpPr>
-        <p:spPr>
-          <a:xfrm>
-            <a:off x="640080" y="4572000"/>
-            <a:ext cx="7863840" cy="457200"/>
+          <p:cNvPr id="40" name="Text 38"/>
+          <p:cNvSpPr/>
+          <p:nvPr/>
+        </p:nvSpPr>
+        <p:spPr>
+          <a:xfrm>
+            <a:off x="640080" y="4297680"/>
+            <a:ext cx="7863840" cy="502920"/>
           </a:xfrm>
           <a:prstGeom prst="rect">
             <a:avLst/>
@@ -9922,7 +10307,7 @@
                 <a:ea typeface="Calibri" pitchFamily="34" charset="-122"/>
                 <a:cs typeface="Calibri" pitchFamily="34" charset="-120"/>
               </a:rPr>
-              <a:t>Tech Stack: Qwen | LoRA | vLLM | LangGraph | Neo4j | BGE | Elasticsearch</a:t>
+              <a:t>技术栈：Qwen 大模型 | LoRA 微调 | vLLM 推理加速 | LangGraph 编排 | Neo4j 知识库 | BGE + ES 检索</a:t>
             </a:r>
             <a:endParaRPr lang="en-US" sz="1000" dirty="0"/>
           </a:p>
@@ -10013,7 +10398,7 @@
                 <a:ea typeface="Arial" pitchFamily="34" charset="-122"/>
                 <a:cs typeface="Arial" pitchFamily="34" charset="-120"/>
               </a:rPr>
-              <a:t>效果数据与对比</a:t>
+              <a:t>效果说话</a:t>
             </a:r>
             <a:endParaRPr lang="en-US" sz="2800" dirty="0"/>
           </a:p>
@@ -10052,7 +10437,7 @@
                 <a:ea typeface="Calibri" pitchFamily="34" charset="-122"/>
                 <a:cs typeface="Calibri" pitchFamily="34" charset="-120"/>
               </a:rPr>
-              <a:t>Ontology-RAG vs. Standard RAG</a:t>
+              <a:t>Ontology-RAG vs 标准RAG</a:t>
             </a:r>
             <a:endParaRPr lang="en-US" sz="1400" dirty="0"/>
           </a:p>
@@ -10103,7 +10488,7 @@
                           <a:ea typeface="Arial" pitchFamily="34" charset="-122"/>
                           <a:cs typeface="Arial" pitchFamily="34" charset="-120"/>
                         </a:rPr>
-                        <a:t>维度</a:t>
+                        <a:t>对比维度</a:t>
                       </a:r>
                       <a:endParaRPr lang="en-US" sz="1200" dirty="0">
                         <a:latin typeface="Arial" charset="0"/>
@@ -10171,7 +10556,7 @@
                           <a:ea typeface="Arial" pitchFamily="34" charset="-122"/>
                           <a:cs typeface="Arial" pitchFamily="34" charset="-120"/>
                         </a:rPr>
-                        <a:t>Standard RAG</a:t>
+                        <a:t>标准RAG</a:t>
                       </a:r>
                       <a:endParaRPr lang="en-US" sz="1200" dirty="0">
                         <a:latin typeface="Arial" charset="0"/>
@@ -10239,7 +10624,7 @@
                           <a:ea typeface="Arial" pitchFamily="34" charset="-122"/>
                           <a:cs typeface="Arial" pitchFamily="34" charset="-120"/>
                         </a:rPr>
-                        <a:t>Ontology-RAG</a:t>
+                        <a:t>Ontology-RAG ✓</a:t>
                       </a:r>
                       <a:endParaRPr lang="en-US" sz="1200" dirty="0">
                         <a:latin typeface="Arial" charset="0"/>
@@ -10291,7 +10676,7 @@
                   </a:tcPr>
                 </a:tc>
               </a:tr>
-              <a:tr h="502920">
+              <a:tr h="457200">
                 <a:tc>
                   <a:txBody>
                     <a:bodyPr/>
@@ -10374,7 +10759,7 @@
                           <a:ea typeface="Calibri" pitchFamily="34" charset="-122"/>
                           <a:cs typeface="Calibri" pitchFamily="34" charset="-120"/>
                         </a:rPr>
-                        <a:t>Baseline</a:t>
+                        <a:t>基准水平</a:t>
                       </a:r>
                       <a:endParaRPr lang="en-US" sz="1100" dirty="0">
                         <a:latin typeface="Calibri" charset="0"/>
@@ -10439,7 +10824,7 @@
                           <a:ea typeface="Calibri" pitchFamily="34" charset="-122"/>
                           <a:cs typeface="Calibri" pitchFamily="34" charset="-120"/>
                         </a:rPr>
-                        <a:t>Significantly improved</a:t>
+                        <a:t>明显提升 ↑</a:t>
                       </a:r>
                       <a:endParaRPr lang="en-US" sz="1100" dirty="0">
                         <a:latin typeface="Calibri" charset="0"/>
@@ -10488,7 +10873,7 @@
                   </a:tcPr>
                 </a:tc>
               </a:tr>
-              <a:tr h="502920">
+              <a:tr h="457200">
                 <a:tc>
                   <a:txBody>
                     <a:bodyPr/>
@@ -10571,7 +10956,7 @@
                           <a:ea typeface="Calibri" pitchFamily="34" charset="-122"/>
                           <a:cs typeface="Calibri" pitchFamily="34" charset="-120"/>
                         </a:rPr>
-                        <a:t>Unstable</a:t>
+                        <a:t>不稳定 ✗</a:t>
                       </a:r>
                       <a:endParaRPr lang="en-US" sz="1100" dirty="0">
                         <a:latin typeface="Calibri" charset="0"/>
@@ -10636,7 +11021,7 @@
                           <a:ea typeface="Calibri" pitchFamily="34" charset="-122"/>
                           <a:cs typeface="Calibri" pitchFamily="34" charset="-120"/>
                         </a:rPr>
-                        <a:t>Explicitly traceable</a:t>
+                        <a:t>清晰可追溯 ✓</a:t>
                       </a:r>
                       <a:endParaRPr lang="en-US" sz="1100" dirty="0">
                         <a:latin typeface="Calibri" charset="0"/>
@@ -10685,7 +11070,7 @@
                   </a:tcPr>
                 </a:tc>
               </a:tr>
-              <a:tr h="502920">
+              <a:tr h="457200">
                 <a:tc>
                   <a:txBody>
                     <a:bodyPr/>
@@ -10768,7 +11153,7 @@
                           <a:ea typeface="Calibri" pitchFamily="34" charset="-122"/>
                           <a:cs typeface="Calibri" pitchFamily="34" charset="-120"/>
                         </a:rPr>
-                        <a:t>Limited</a:t>
+                        <a:t>效果有限 △</a:t>
                       </a:r>
                       <a:endParaRPr lang="en-US" sz="1100" dirty="0">
                         <a:latin typeface="Calibri" charset="0"/>
@@ -10833,7 +11218,7 @@
                           <a:ea typeface="Calibri" pitchFamily="34" charset="-122"/>
                           <a:cs typeface="Calibri" pitchFamily="34" charset="-120"/>
                         </a:rPr>
-                        <a:t>Systematically reduced</a:t>
+                        <a:t>系统性降低 ✓</a:t>
                       </a:r>
                       <a:endParaRPr lang="en-US" sz="1100" dirty="0">
                         <a:latin typeface="Calibri" charset="0"/>
@@ -10882,7 +11267,7 @@
                   </a:tcPr>
                 </a:tc>
               </a:tr>
-              <a:tr h="502920">
+              <a:tr h="457200">
                 <a:tc>
                   <a:txBody>
                     <a:bodyPr/>
@@ -10965,7 +11350,7 @@
                           <a:ea typeface="Calibri" pitchFamily="34" charset="-122"/>
                           <a:cs typeface="Calibri" pitchFamily="34" charset="-120"/>
                         </a:rPr>
-                        <a:t>Black-box</a:t>
+                        <a:t>黑盒 ✗</a:t>
                       </a:r>
                       <a:endParaRPr lang="en-US" sz="1100" dirty="0">
                         <a:latin typeface="Calibri" charset="0"/>
@@ -11030,7 +11415,7 @@
                           <a:ea typeface="Calibri" pitchFamily="34" charset="-122"/>
                           <a:cs typeface="Calibri" pitchFamily="34" charset="-120"/>
                         </a:rPr>
-                        <a:t>Chain-verified</a:t>
+                        <a:t>链式验证 ✓</a:t>
                       </a:r>
                       <a:endParaRPr lang="en-US" sz="1100" dirty="0">
                         <a:latin typeface="Calibri" charset="0"/>
@@ -11079,7 +11464,7 @@
                   </a:tcPr>
                 </a:tc>
               </a:tr>
-              <a:tr h="502920">
+              <a:tr h="457200">
                 <a:tc>
                   <a:txBody>
                     <a:bodyPr/>
@@ -11162,7 +11547,7 @@
                           <a:ea typeface="Calibri" pitchFamily="34" charset="-122"/>
                           <a:cs typeface="Calibri" pitchFamily="34" charset="-120"/>
                         </a:rPr>
-                        <a:t>General-purpose</a:t>
+                        <a:t>通用</a:t>
                       </a:r>
                       <a:endParaRPr lang="en-US" sz="1100" dirty="0">
                         <a:latin typeface="Calibri" charset="0"/>
@@ -11227,7 +11612,7 @@
                           <a:ea typeface="Calibri" pitchFamily="34" charset="-122"/>
                           <a:cs typeface="Calibri" pitchFamily="34" charset="-120"/>
                         </a:rPr>
-                        <a:t>Knowledge-customizable</a:t>
+                        <a:t>知识可定制 ✓</a:t>
                       </a:r>
                       <a:endParaRPr lang="en-US" sz="1100" dirty="0">
                         <a:latin typeface="Calibri" charset="0"/>
@@ -11288,8 +11673,8 @@
         </p:nvSpPr>
         <p:spPr>
           <a:xfrm>
-            <a:off x="457200" y="4206240"/>
-            <a:ext cx="8229600" cy="731520"/>
+            <a:off x="457200" y="4023360"/>
+            <a:ext cx="8229600" cy="822960"/>
           </a:xfrm>
           <a:prstGeom prst="rect">
             <a:avLst/>
@@ -11308,7 +11693,7 @@
         </p:nvSpPr>
         <p:spPr>
           <a:xfrm>
-            <a:off x="731520" y="4251960"/>
+            <a:off x="731520" y="4114800"/>
             <a:ext cx="7680960" cy="640080"/>
           </a:xfrm>
           <a:prstGeom prst="rect">
@@ -11321,17 +11706,6 @@
           <a:bodyPr wrap="square" rtlCol="0" anchor="ctr"/>
           <a:lstStyle/>
           <a:p>
-            <a:pPr indent="0" marL="0">
-              <a:buNone/>
-            </a:pPr>
-            <a:r>
-              <a:rPr lang="en-US" dirty="0">
-                <a:solidFill>
-                  <a:srgbClr val="10B981"/>
-                </a:solidFill>
-              </a:rPr>
-              <a:t>✅  </a:t>
-            </a:r>
             <a:pPr indent="0" marL="0">
               <a:buNone/>
             </a:pPr>
@@ -11344,28 +11718,9 @@
                 <a:ea typeface="Calibri" pitchFamily="34" charset="-122"/>
                 <a:cs typeface="Calibri" pitchFamily="34" charset="-120"/>
               </a:rPr>
-              <a:t>Prediction accuracy &gt;95% across multiple engineering datasets</a:t>
-            </a:r>
-            <a:pPr indent="0" marL="0">
-              <a:buNone/>
-            </a:pPr>
-            <a:endParaRPr lang="en-US" sz="1200" dirty="0"/>
-          </a:p>
-          <a:p>
-            <a:pPr indent="0" marL="0">
-              <a:buNone/>
-            </a:pPr>
-            <a:r>
-              <a:rPr lang="en-US" sz="1200" dirty="0">
-                <a:solidFill>
-                  <a:srgbClr val="10B981"/>
-                </a:solidFill>
-              </a:rPr>
-              <a:t>✅  </a:t>
-            </a:r>
-            <a:endParaRPr lang="en-US" sz="1200" dirty="0"/>
-          </a:p>
-          <a:p>
+              <a:t>✅  预测精度 &gt;95%  — 多个工程数据集验证
+</a:t>
+            </a:r>
             <a:pPr indent="0" marL="0">
               <a:buNone/>
             </a:pPr>
@@ -11378,7 +11733,7 @@
                 <a:ea typeface="Calibri" pitchFamily="34" charset="-122"/>
                 <a:cs typeface="Calibri" pitchFamily="34" charset="-120"/>
               </a:rPr>
-              <a:t>Clear advantage over standard RAG in accuracy &amp; reasoning consistency</a:t>
+              <a:t>✅  对比标准RAG全面领先 — 已交付生产环境</a:t>
             </a:r>
             <a:endParaRPr lang="en-US" sz="1200" dirty="0"/>
           </a:p>
